--- a/docs/strategy/ges2-service-cx-proposal.pptx
+++ b/docs/strategy/ges2-service-cx-proposal.pptx
@@ -2073,7 +2073,7 @@
                 <a:ea typeface="Arial" pitchFamily="34" charset="-122"/>
                 <a:cs typeface="Arial" pitchFamily="34" charset="-120"/>
               </a:rPr>
-              <a:t>Сергей Красин · сентябрь 2026</a:t>
+              <a:t>Сентябрь 2026</a:t>
             </a:r>
             <a:endParaRPr lang="en-US" sz="1100" dirty="0"/>
           </a:p>

--- a/docs/strategy/ges2-service-cx-proposal.pptx
+++ b/docs/strategy/ges2-service-cx-proposal.pptx
@@ -2677,12 +2677,19 @@
           </a:p>
         </p:txBody>
       </p:sp>
-      <p:sp>
-        <p:nvSpPr>
-          <p:cNvPr id="4" name="Shape 2"/>
-          <p:cNvSpPr/>
-          <p:nvPr/>
-        </p:nvSpPr>
+      <p:pic>
+        <p:nvPicPr>
+          <p:cNvPr id="4" name="Image 0" descr="/home/user/ges-2/docs/strategy/deck-images/platforms.jpg">    </p:cNvPr>
+          <p:cNvPicPr>
+            <a:picLocks noChangeAspect="1"/>
+          </p:cNvPicPr>
+          <p:nvPr/>
+        </p:nvPicPr>
+        <p:blipFill>
+          <a:blip r:embed="rId1"/>
+          <a:srcRect l="0" r="0" t="0" b="0"/>
+          <a:stretch/>
+        </p:blipFill>
         <p:spPr>
           <a:xfrm>
             <a:off x="6309360" y="1691640"/>
@@ -2691,9 +2698,22 @@
           <a:prstGeom prst="rect">
             <a:avLst/>
           </a:prstGeom>
-          <a:solidFill>
-            <a:srgbClr val="EEEEEE"/>
-          </a:solidFill>
+        </p:spPr>
+      </p:pic>
+      <p:sp>
+        <p:nvSpPr>
+          <p:cNvPr id="5" name="Shape 2"/>
+          <p:cNvSpPr/>
+          <p:nvPr/>
+        </p:nvSpPr>
+        <p:spPr>
+          <a:xfrm>
+            <a:off x="6309360" y="1691640"/>
+            <a:ext cx="5239512" cy="4023360"/>
+          </a:xfrm>
+          <a:prstGeom prst="rect">
+            <a:avLst/>
+          </a:prstGeom>
           <a:ln w="6350">
             <a:solidFill>
               <a:srgbClr val="000000"/>
@@ -2701,45 +2721,6 @@
             <a:prstDash val="solid"/>
           </a:ln>
         </p:spPr>
-      </p:sp>
-      <p:sp>
-        <p:nvSpPr>
-          <p:cNvPr id="5" name="Text 3"/>
-          <p:cNvSpPr txBox="1"/>
-          <p:nvPr/>
-        </p:nvSpPr>
-        <p:spPr>
-          <a:xfrm>
-            <a:off x="6492240" y="3291840"/>
-            <a:ext cx="4873752" cy="822960"/>
-          </a:xfrm>
-          <a:prstGeom prst="rect">
-            <a:avLst/>
-          </a:prstGeom>
-          <a:noFill/>
-          <a:ln/>
-        </p:spPr>
-        <p:txBody>
-          <a:bodyPr wrap="square" lIns="0" tIns="0" rIns="0" bIns="0" rtlCol="0" anchor="ctr"/>
-          <a:lstStyle/>
-          <a:p>
-            <a:pPr algn="ctr" indent="0" marL="0">
-              <a:buNone/>
-            </a:pPr>
-            <a:r>
-              <a:rPr lang="en-US" sz="1000" dirty="0">
-                <a:solidFill>
-                  <a:srgbClr val="9CA3AF"/>
-                </a:solidFill>
-                <a:latin typeface="Arial" pitchFamily="34" charset="0"/>
-                <a:ea typeface="Arial" pitchFamily="34" charset="-122"/>
-                <a:cs typeface="Arial" pitchFamily="34" charset="-120"/>
-              </a:rPr>
-              <a:t>Фото: кафе или гардероб</a:t>
-            </a:r>
-            <a:endParaRPr lang="en-US" sz="1000" dirty="0"/>
-          </a:p>
-        </p:txBody>
       </p:sp>
     </p:spTree>
   </p:cSld>
@@ -3095,12 +3076,19 @@
           </a:p>
         </p:txBody>
       </p:sp>
-      <p:sp>
-        <p:nvSpPr>
-          <p:cNvPr id="7" name="Shape 5"/>
-          <p:cNvSpPr/>
-          <p:nvPr/>
-        </p:nvSpPr>
+      <p:pic>
+        <p:nvPicPr>
+          <p:cNvPr id="7" name="Image 0" descr="/home/user/ges-2/docs/strategy/deck-images/books.jpg">    </p:cNvPr>
+          <p:cNvPicPr>
+            <a:picLocks noChangeAspect="1"/>
+          </p:cNvPicPr>
+          <p:nvPr/>
+        </p:nvPicPr>
+        <p:blipFill>
+          <a:blip r:embed="rId1"/>
+          <a:srcRect l="0" r="0" t="0" b="0"/>
+          <a:stretch/>
+        </p:blipFill>
         <p:spPr>
           <a:xfrm>
             <a:off x="8229600" y="1691640"/>
@@ -3109,9 +3097,22 @@
           <a:prstGeom prst="rect">
             <a:avLst/>
           </a:prstGeom>
-          <a:solidFill>
-            <a:srgbClr val="EEEEEE"/>
-          </a:solidFill>
+        </p:spPr>
+      </p:pic>
+      <p:sp>
+        <p:nvSpPr>
+          <p:cNvPr id="8" name="Shape 5"/>
+          <p:cNvSpPr/>
+          <p:nvPr/>
+        </p:nvSpPr>
+        <p:spPr>
+          <a:xfrm>
+            <a:off x="8229600" y="1691640"/>
+            <a:ext cx="3319272" cy="3657600"/>
+          </a:xfrm>
+          <a:prstGeom prst="rect">
+            <a:avLst/>
+          </a:prstGeom>
           <a:ln w="6350">
             <a:solidFill>
               <a:srgbClr val="000000"/>
@@ -3122,46 +3123,7 @@
       </p:sp>
       <p:sp>
         <p:nvSpPr>
-          <p:cNvPr id="8" name="Text 6"/>
-          <p:cNvSpPr txBox="1"/>
-          <p:nvPr/>
-        </p:nvSpPr>
-        <p:spPr>
-          <a:xfrm>
-            <a:off x="8412480" y="3108960"/>
-            <a:ext cx="2953512" cy="822960"/>
-          </a:xfrm>
-          <a:prstGeom prst="rect">
-            <a:avLst/>
-          </a:prstGeom>
-          <a:noFill/>
-          <a:ln/>
-        </p:spPr>
-        <p:txBody>
-          <a:bodyPr wrap="square" lIns="0" tIns="0" rIns="0" bIns="0" rtlCol="0" anchor="ctr"/>
-          <a:lstStyle/>
-          <a:p>
-            <a:pPr algn="ctr" indent="0" marL="0">
-              <a:buNone/>
-            </a:pPr>
-            <a:r>
-              <a:rPr lang="en-US" sz="1000" dirty="0">
-                <a:solidFill>
-                  <a:srgbClr val="9CA3AF"/>
-                </a:solidFill>
-                <a:latin typeface="Arial" pitchFamily="34" charset="0"/>
-                <a:ea typeface="Arial" pitchFamily="34" charset="-122"/>
-                <a:cs typeface="Arial" pitchFamily="34" charset="-120"/>
-              </a:rPr>
-              <a:t>Фото: магазин ГЭС-2</a:t>
-            </a:r>
-            <a:endParaRPr lang="en-US" sz="1000" dirty="0"/>
-          </a:p>
-        </p:txBody>
-      </p:sp>
-      <p:sp>
-        <p:nvSpPr>
-          <p:cNvPr id="9" name="Shape 7"/>
+          <p:cNvPr id="9" name="Shape 6"/>
           <p:cNvSpPr/>
           <p:nvPr/>
         </p:nvSpPr>
@@ -3184,7 +3146,7 @@
       </p:sp>
       <p:sp>
         <p:nvSpPr>
-          <p:cNvPr id="10" name="Text 8"/>
+          <p:cNvPr id="10" name="Text 7"/>
           <p:cNvSpPr txBox="1"/>
           <p:nvPr/>
         </p:nvSpPr>
@@ -3517,12 +3479,19 @@
           </a:p>
         </p:txBody>
       </p:sp>
-      <p:sp>
-        <p:nvSpPr>
-          <p:cNvPr id="8" name="Shape 6"/>
-          <p:cNvSpPr/>
-          <p:nvPr/>
-        </p:nvSpPr>
+      <p:pic>
+        <p:nvPicPr>
+          <p:cNvPr id="8" name="Image 0" descr="/home/user/ges-2/docs/strategy/deck-images/facade.jpg">    </p:cNvPr>
+          <p:cNvPicPr>
+            <a:picLocks noChangeAspect="1"/>
+          </p:cNvPicPr>
+          <p:nvPr/>
+        </p:nvPicPr>
+        <p:blipFill>
+          <a:blip r:embed="rId1"/>
+          <a:srcRect l="0" r="0" t="0" b="0"/>
+          <a:stretch/>
+        </p:blipFill>
         <p:spPr>
           <a:xfrm>
             <a:off x="7589520" y="1691640"/>
@@ -3531,9 +3500,22 @@
           <a:prstGeom prst="rect">
             <a:avLst/>
           </a:prstGeom>
-          <a:solidFill>
-            <a:srgbClr val="EEEEEE"/>
-          </a:solidFill>
+        </p:spPr>
+      </p:pic>
+      <p:sp>
+        <p:nvSpPr>
+          <p:cNvPr id="9" name="Shape 6"/>
+          <p:cNvSpPr/>
+          <p:nvPr/>
+        </p:nvSpPr>
+        <p:spPr>
+          <a:xfrm>
+            <a:off x="7589520" y="1691640"/>
+            <a:ext cx="3959352" cy="4023360"/>
+          </a:xfrm>
+          <a:prstGeom prst="rect">
+            <a:avLst/>
+          </a:prstGeom>
           <a:ln w="6350">
             <a:solidFill>
               <a:srgbClr val="000000"/>
@@ -3541,62 +3523,6 @@
             <a:prstDash val="solid"/>
           </a:ln>
         </p:spPr>
-      </p:sp>
-      <p:sp>
-        <p:nvSpPr>
-          <p:cNvPr id="9" name="Text 7"/>
-          <p:cNvSpPr txBox="1"/>
-          <p:nvPr/>
-        </p:nvSpPr>
-        <p:spPr>
-          <a:xfrm>
-            <a:off x="7772400" y="3291840"/>
-            <a:ext cx="3593592" cy="822960"/>
-          </a:xfrm>
-          <a:prstGeom prst="rect">
-            <a:avLst/>
-          </a:prstGeom>
-          <a:noFill/>
-          <a:ln/>
-        </p:spPr>
-        <p:txBody>
-          <a:bodyPr wrap="square" lIns="0" tIns="0" rIns="0" bIns="0" rtlCol="0" anchor="ctr"/>
-          <a:lstStyle/>
-          <a:p>
-            <a:pPr algn="ctr" indent="0" marL="0">
-              <a:buNone/>
-            </a:pPr>
-            <a:r>
-              <a:rPr lang="en-US" sz="1000" dirty="0">
-                <a:solidFill>
-                  <a:srgbClr val="9CA3AF"/>
-                </a:solidFill>
-                <a:latin typeface="Arial" pitchFamily="34" charset="0"/>
-                <a:ea typeface="Arial" pitchFamily="34" charset="-122"/>
-                <a:cs typeface="Arial" pitchFamily="34" charset="-120"/>
-              </a:rPr>
-              <a:t>Фото: фасад ГЭС-2</a:t>
-            </a:r>
-            <a:endParaRPr lang="en-US" sz="1000" dirty="0"/>
-          </a:p>
-          <a:p>
-            <a:pPr algn="ctr" indent="0" marL="0">
-              <a:buNone/>
-            </a:pPr>
-            <a:r>
-              <a:rPr lang="en-US" sz="1000" dirty="0">
-                <a:solidFill>
-                  <a:srgbClr val="9CA3AF"/>
-                </a:solidFill>
-                <a:latin typeface="Arial" pitchFamily="34" charset="0"/>
-                <a:ea typeface="Arial" pitchFamily="34" charset="-122"/>
-                <a:cs typeface="Arial" pitchFamily="34" charset="-120"/>
-              </a:rPr>
-              <a:t>с Болотной набережной</a:t>
-            </a:r>
-            <a:endParaRPr lang="en-US" sz="1000" dirty="0"/>
-          </a:p>
-        </p:txBody>
       </p:sp>
     </p:spTree>
   </p:cSld>
@@ -4470,12 +4396,19 @@
           </a:ln>
         </p:spPr>
       </p:sp>
-      <p:sp>
-        <p:nvSpPr>
-          <p:cNvPr id="27" name="Shape 25"/>
-          <p:cNvSpPr/>
-          <p:nvPr/>
-        </p:nvSpPr>
+      <p:pic>
+        <p:nvPicPr>
+          <p:cNvPr id="27" name="Image 0" descr="/home/user/ges-2/docs/strategy/deck-images/prospekt.jpg">    </p:cNvPr>
+          <p:cNvPicPr>
+            <a:picLocks noChangeAspect="1"/>
+          </p:cNvPicPr>
+          <p:nvPr/>
+        </p:nvPicPr>
+        <p:blipFill>
+          <a:blip r:embed="rId1"/>
+          <a:srcRect l="0" r="0" t="0" b="0"/>
+          <a:stretch/>
+        </p:blipFill>
         <p:spPr>
           <a:xfrm>
             <a:off x="7040880" y="1691640"/>
@@ -4484,9 +4417,22 @@
           <a:prstGeom prst="rect">
             <a:avLst/>
           </a:prstGeom>
-          <a:solidFill>
-            <a:srgbClr val="EEEEEE"/>
-          </a:solidFill>
+        </p:spPr>
+      </p:pic>
+      <p:sp>
+        <p:nvSpPr>
+          <p:cNvPr id="28" name="Shape 25"/>
+          <p:cNvSpPr/>
+          <p:nvPr/>
+        </p:nvSpPr>
+        <p:spPr>
+          <a:xfrm>
+            <a:off x="7040880" y="1691640"/>
+            <a:ext cx="4507992" cy="4251960"/>
+          </a:xfrm>
+          <a:prstGeom prst="rect">
+            <a:avLst/>
+          </a:prstGeom>
           <a:ln w="6350">
             <a:solidFill>
               <a:srgbClr val="000000"/>
@@ -4494,45 +4440,6 @@
             <a:prstDash val="solid"/>
           </a:ln>
         </p:spPr>
-      </p:sp>
-      <p:sp>
-        <p:nvSpPr>
-          <p:cNvPr id="28" name="Text 26"/>
-          <p:cNvSpPr txBox="1"/>
-          <p:nvPr/>
-        </p:nvSpPr>
-        <p:spPr>
-          <a:xfrm>
-            <a:off x="7223760" y="3406140"/>
-            <a:ext cx="4142232" cy="822960"/>
-          </a:xfrm>
-          <a:prstGeom prst="rect">
-            <a:avLst/>
-          </a:prstGeom>
-          <a:noFill/>
-          <a:ln/>
-        </p:spPr>
-        <p:txBody>
-          <a:bodyPr wrap="square" lIns="0" tIns="0" rIns="0" bIns="0" rtlCol="0" anchor="ctr"/>
-          <a:lstStyle/>
-          <a:p>
-            <a:pPr algn="ctr" indent="0" marL="0">
-              <a:buNone/>
-            </a:pPr>
-            <a:r>
-              <a:rPr lang="en-US" sz="1000" dirty="0">
-                <a:solidFill>
-                  <a:srgbClr val="9CA3AF"/>
-                </a:solidFill>
-                <a:latin typeface="Arial" pitchFamily="34" charset="0"/>
-                <a:ea typeface="Arial" pitchFamily="34" charset="-122"/>
-                <a:cs typeface="Arial" pitchFamily="34" charset="-120"/>
-              </a:rPr>
-              <a:t>Фото: внутренний двор</a:t>
-            </a:r>
-            <a:endParaRPr lang="en-US" sz="1000" dirty="0"/>
-          </a:p>
-        </p:txBody>
       </p:sp>
     </p:spTree>
   </p:cSld>
@@ -5096,12 +5003,19 @@
           </a:p>
         </p:txBody>
       </p:sp>
-      <p:sp>
-        <p:nvSpPr>
-          <p:cNvPr id="3" name="Shape 1"/>
-          <p:cNvSpPr/>
-          <p:nvPr/>
-        </p:nvSpPr>
+      <p:pic>
+        <p:nvPicPr>
+          <p:cNvPr id="3" name="Image 0" descr="/home/user/ges-2/docs/strategy/deck-images/svody.jpg">    </p:cNvPr>
+          <p:cNvPicPr>
+            <a:picLocks noChangeAspect="1"/>
+          </p:cNvPicPr>
+          <p:nvPr/>
+        </p:nvPicPr>
+        <p:blipFill>
+          <a:blip r:embed="rId1"/>
+          <a:srcRect l="0" r="0" t="0" b="0"/>
+          <a:stretch/>
+        </p:blipFill>
         <p:spPr>
           <a:xfrm>
             <a:off x="640080" y="1691640"/>
@@ -5110,9 +5024,22 @@
           <a:prstGeom prst="rect">
             <a:avLst/>
           </a:prstGeom>
-          <a:solidFill>
-            <a:srgbClr val="EEEEEE"/>
-          </a:solidFill>
+        </p:spPr>
+      </p:pic>
+      <p:sp>
+        <p:nvSpPr>
+          <p:cNvPr id="4" name="Shape 1"/>
+          <p:cNvSpPr/>
+          <p:nvPr/>
+        </p:nvSpPr>
+        <p:spPr>
+          <a:xfrm>
+            <a:off x="640080" y="1691640"/>
+            <a:ext cx="4754880" cy="4114800"/>
+          </a:xfrm>
+          <a:prstGeom prst="rect">
+            <a:avLst/>
+          </a:prstGeom>
           <a:ln w="6350">
             <a:solidFill>
               <a:srgbClr val="000000"/>
@@ -5123,63 +5050,7 @@
       </p:sp>
       <p:sp>
         <p:nvSpPr>
-          <p:cNvPr id="4" name="Text 2"/>
-          <p:cNvSpPr txBox="1"/>
-          <p:nvPr/>
-        </p:nvSpPr>
-        <p:spPr>
-          <a:xfrm>
-            <a:off x="822960" y="3337560"/>
-            <a:ext cx="4389120" cy="822960"/>
-          </a:xfrm>
-          <a:prstGeom prst="rect">
-            <a:avLst/>
-          </a:prstGeom>
-          <a:noFill/>
-          <a:ln/>
-        </p:spPr>
-        <p:txBody>
-          <a:bodyPr wrap="square" lIns="0" tIns="0" rIns="0" bIns="0" rtlCol="0" anchor="ctr"/>
-          <a:lstStyle/>
-          <a:p>
-            <a:pPr algn="ctr" indent="0" marL="0">
-              <a:buNone/>
-            </a:pPr>
-            <a:r>
-              <a:rPr lang="en-US" sz="1000" dirty="0">
-                <a:solidFill>
-                  <a:srgbClr val="9CA3AF"/>
-                </a:solidFill>
-                <a:latin typeface="Arial" pitchFamily="34" charset="0"/>
-                <a:ea typeface="Arial" pitchFamily="34" charset="-122"/>
-                <a:cs typeface="Arial" pitchFamily="34" charset="-120"/>
-              </a:rPr>
-              <a:t>Фото: закулисье —</a:t>
-            </a:r>
-            <a:endParaRPr lang="en-US" sz="1000" dirty="0"/>
-          </a:p>
-          <a:p>
-            <a:pPr algn="ctr" indent="0" marL="0">
-              <a:buNone/>
-            </a:pPr>
-            <a:r>
-              <a:rPr lang="en-US" sz="1000" dirty="0">
-                <a:solidFill>
-                  <a:srgbClr val="9CA3AF"/>
-                </a:solidFill>
-                <a:latin typeface="Arial" pitchFamily="34" charset="0"/>
-                <a:ea typeface="Arial" pitchFamily="34" charset="-122"/>
-                <a:cs typeface="Arial" pitchFamily="34" charset="-120"/>
-              </a:rPr>
-              <a:t>монтаж выставки или «Своды»</a:t>
-            </a:r>
-            <a:endParaRPr lang="en-US" sz="1000" dirty="0"/>
-          </a:p>
-        </p:txBody>
-      </p:sp>
-      <p:sp>
-        <p:nvSpPr>
-          <p:cNvPr id="5" name="Text 3"/>
+          <p:cNvPr id="5" name="Text 2"/>
           <p:cNvSpPr txBox="1"/>
           <p:nvPr/>
         </p:nvSpPr>
@@ -5788,12 +5659,19 @@
           </a:p>
         </p:txBody>
       </p:sp>
-      <p:sp>
-        <p:nvSpPr>
-          <p:cNvPr id="13" name="Shape 11"/>
-          <p:cNvSpPr/>
-          <p:nvPr/>
-        </p:nvSpPr>
+      <p:pic>
+        <p:nvPicPr>
+          <p:cNvPr id="13" name="Image 0" descr="/home/user/ges-2/docs/strategy/deck-images/flow.jpg">    </p:cNvPr>
+          <p:cNvPicPr>
+            <a:picLocks noChangeAspect="1"/>
+          </p:cNvPicPr>
+          <p:nvPr/>
+        </p:nvPicPr>
+        <p:blipFill>
+          <a:blip r:embed="rId1"/>
+          <a:srcRect l="0" r="0" t="0" b="0"/>
+          <a:stretch/>
+        </p:blipFill>
         <p:spPr>
           <a:xfrm>
             <a:off x="6903720" y="1691640"/>
@@ -5802,9 +5680,22 @@
           <a:prstGeom prst="rect">
             <a:avLst/>
           </a:prstGeom>
-          <a:solidFill>
-            <a:srgbClr val="EEEEEE"/>
-          </a:solidFill>
+        </p:spPr>
+      </p:pic>
+      <p:sp>
+        <p:nvSpPr>
+          <p:cNvPr id="14" name="Shape 11"/>
+          <p:cNvSpPr/>
+          <p:nvPr/>
+        </p:nvSpPr>
+        <p:spPr>
+          <a:xfrm>
+            <a:off x="6903720" y="1691640"/>
+            <a:ext cx="4645152" cy="4114800"/>
+          </a:xfrm>
+          <a:prstGeom prst="rect">
+            <a:avLst/>
+          </a:prstGeom>
           <a:ln w="6350">
             <a:solidFill>
               <a:srgbClr val="000000"/>
@@ -5812,62 +5703,6 @@
             <a:prstDash val="solid"/>
           </a:ln>
         </p:spPr>
-      </p:sp>
-      <p:sp>
-        <p:nvSpPr>
-          <p:cNvPr id="14" name="Text 12"/>
-          <p:cNvSpPr txBox="1"/>
-          <p:nvPr/>
-        </p:nvSpPr>
-        <p:spPr>
-          <a:xfrm>
-            <a:off x="7086600" y="3337560"/>
-            <a:ext cx="4279392" cy="822960"/>
-          </a:xfrm>
-          <a:prstGeom prst="rect">
-            <a:avLst/>
-          </a:prstGeom>
-          <a:noFill/>
-          <a:ln/>
-        </p:spPr>
-        <p:txBody>
-          <a:bodyPr wrap="square" lIns="0" tIns="0" rIns="0" bIns="0" rtlCol="0" anchor="ctr"/>
-          <a:lstStyle/>
-          <a:p>
-            <a:pPr algn="ctr" indent="0" marL="0">
-              <a:buNone/>
-            </a:pPr>
-            <a:r>
-              <a:rPr lang="en-US" sz="1000" dirty="0">
-                <a:solidFill>
-                  <a:srgbClr val="9CA3AF"/>
-                </a:solidFill>
-                <a:latin typeface="Arial" pitchFamily="34" charset="0"/>
-                <a:ea typeface="Arial" pitchFamily="34" charset="-122"/>
-                <a:cs typeface="Arial" pitchFamily="34" charset="-120"/>
-              </a:rPr>
-              <a:t>Фото: собственный снимок</a:t>
-            </a:r>
-            <a:endParaRPr lang="en-US" sz="1000" dirty="0"/>
-          </a:p>
-          <a:p>
-            <a:pPr algn="ctr" indent="0" marL="0">
-              <a:buNone/>
-            </a:pPr>
-            <a:r>
-              <a:rPr lang="en-US" sz="1000" dirty="0">
-                <a:solidFill>
-                  <a:srgbClr val="9CA3AF"/>
-                </a:solidFill>
-                <a:latin typeface="Arial" pitchFamily="34" charset="0"/>
-                <a:ea typeface="Arial" pitchFamily="34" charset="-122"/>
-                <a:cs typeface="Arial" pitchFamily="34" charset="-120"/>
-              </a:rPr>
-              <a:t>с прохода пути — точка трения</a:t>
-            </a:r>
-            <a:endParaRPr lang="en-US" sz="1000" dirty="0"/>
-          </a:p>
-        </p:txBody>
       </p:sp>
     </p:spTree>
   </p:cSld>
@@ -7123,12 +6958,19 @@
           </a:p>
         </p:txBody>
       </p:sp>
-      <p:sp>
-        <p:nvSpPr>
-          <p:cNvPr id="3" name="Shape 1"/>
-          <p:cNvSpPr/>
-          <p:nvPr/>
-        </p:nvSpPr>
+      <p:pic>
+        <p:nvPicPr>
+          <p:cNvPr id="3" name="Image 0" descr="/home/user/ges-2/docs/strategy/deck-images/mediation.jpg">    </p:cNvPr>
+          <p:cNvPicPr>
+            <a:picLocks noChangeAspect="1"/>
+          </p:cNvPicPr>
+          <p:nvPr/>
+        </p:nvPicPr>
+        <p:blipFill>
+          <a:blip r:embed="rId1"/>
+          <a:srcRect l="0" r="0" t="0" b="0"/>
+          <a:stretch/>
+        </p:blipFill>
         <p:spPr>
           <a:xfrm>
             <a:off x="640080" y="1691640"/>
@@ -7137,9 +6979,22 @@
           <a:prstGeom prst="rect">
             <a:avLst/>
           </a:prstGeom>
-          <a:solidFill>
-            <a:srgbClr val="EEEEEE"/>
-          </a:solidFill>
+        </p:spPr>
+      </p:pic>
+      <p:sp>
+        <p:nvSpPr>
+          <p:cNvPr id="4" name="Shape 1"/>
+          <p:cNvSpPr/>
+          <p:nvPr/>
+        </p:nvSpPr>
+        <p:spPr>
+          <a:xfrm>
+            <a:off x="640080" y="1691640"/>
+            <a:ext cx="3931920" cy="4114800"/>
+          </a:xfrm>
+          <a:prstGeom prst="rect">
+            <a:avLst/>
+          </a:prstGeom>
           <a:ln w="6350">
             <a:solidFill>
               <a:srgbClr val="000000"/>
@@ -7150,63 +7005,7 @@
       </p:sp>
       <p:sp>
         <p:nvSpPr>
-          <p:cNvPr id="4" name="Text 2"/>
-          <p:cNvSpPr txBox="1"/>
-          <p:nvPr/>
-        </p:nvSpPr>
-        <p:spPr>
-          <a:xfrm>
-            <a:off x="822960" y="3337560"/>
-            <a:ext cx="3566160" cy="822960"/>
-          </a:xfrm>
-          <a:prstGeom prst="rect">
-            <a:avLst/>
-          </a:prstGeom>
-          <a:noFill/>
-          <a:ln/>
-        </p:spPr>
-        <p:txBody>
-          <a:bodyPr wrap="square" lIns="0" tIns="0" rIns="0" bIns="0" rtlCol="0" anchor="ctr"/>
-          <a:lstStyle/>
-          <a:p>
-            <a:pPr algn="ctr" indent="0" marL="0">
-              <a:buNone/>
-            </a:pPr>
-            <a:r>
-              <a:rPr lang="en-US" sz="1000" dirty="0">
-                <a:solidFill>
-                  <a:srgbClr val="9CA3AF"/>
-                </a:solidFill>
-                <a:latin typeface="Arial" pitchFamily="34" charset="0"/>
-                <a:ea typeface="Arial" pitchFamily="34" charset="-122"/>
-                <a:cs typeface="Arial" pitchFamily="34" charset="-120"/>
-              </a:rPr>
-              <a:t>Фото: сотрудник в диалоге</a:t>
-            </a:r>
-            <a:endParaRPr lang="en-US" sz="1000" dirty="0"/>
-          </a:p>
-          <a:p>
-            <a:pPr algn="ctr" indent="0" marL="0">
-              <a:buNone/>
-            </a:pPr>
-            <a:r>
-              <a:rPr lang="en-US" sz="1000" dirty="0">
-                <a:solidFill>
-                  <a:srgbClr val="9CA3AF"/>
-                </a:solidFill>
-                <a:latin typeface="Arial" pitchFamily="34" charset="0"/>
-                <a:ea typeface="Arial" pitchFamily="34" charset="-122"/>
-                <a:cs typeface="Arial" pitchFamily="34" charset="-120"/>
-              </a:rPr>
-              <a:t>с посетителем — лицо, не интерьер</a:t>
-            </a:r>
-            <a:endParaRPr lang="en-US" sz="1000" dirty="0"/>
-          </a:p>
-        </p:txBody>
-      </p:sp>
-      <p:sp>
-        <p:nvSpPr>
-          <p:cNvPr id="5" name="Text 3"/>
+          <p:cNvPr id="5" name="Text 2"/>
           <p:cNvSpPr txBox="1"/>
           <p:nvPr/>
         </p:nvSpPr>
@@ -7245,7 +7044,7 @@
       </p:sp>
       <p:sp>
         <p:nvSpPr>
-          <p:cNvPr id="6" name="Text 4"/>
+          <p:cNvPr id="6" name="Text 3"/>
           <p:cNvSpPr txBox="1"/>
           <p:nvPr/>
         </p:nvSpPr>
@@ -7363,7 +7162,7 @@
       </p:sp>
       <p:sp>
         <p:nvSpPr>
-          <p:cNvPr id="7" name="Text 5"/>
+          <p:cNvPr id="7" name="Text 4"/>
           <p:cNvSpPr txBox="1"/>
           <p:nvPr/>
         </p:nvSpPr>
@@ -7402,7 +7201,7 @@
       </p:sp>
       <p:sp>
         <p:nvSpPr>
-          <p:cNvPr id="8" name="Text 6"/>
+          <p:cNvPr id="8" name="Text 5"/>
           <p:cNvSpPr txBox="1"/>
           <p:nvPr/>
         </p:nvSpPr>

--- a/docs/strategy/ges2-service-cx-proposal.pptx
+++ b/docs/strategy/ges2-service-cx-proposal.pptx
@@ -16,10 +16,9 @@
     <p:sldId id="264" r:id="rId10"/>
     <p:sldId id="265" r:id="rId11"/>
     <p:sldId id="266" r:id="rId12"/>
-    <p:sldId id="267" r:id="rId13"/>
   </p:sldIdLst>
   <p:notesMasterIdLst>
-    <p:notesMasterId r:id="rId14"/>
+    <p:notesMasterId r:id="rId13"/>
   </p:notesMasterIdLst>
   <p:sldSz cx="12192000" cy="6858000"/>
   <p:notesSz cx="6858000" cy="12192000"/>
@@ -513,7 +512,7 @@
           <a:p>
             <a:r>
               <a:rPr lang="en-US" dirty="0"/>
-              <a:t>Титул. Оформление по дизайн-системе ГЭС-2: монохром, без скруглений и теней, вес на типографике. Шрифт Diagramatika проприетарный — верстка на fallback (Arial / Helvetica Neue).</a:t>
+              <a:t>Титул. Оформление по дизайн-системе ГЭС-2: монохром, без скруглений и теней, вес на типографике. Шрифт Diagramatika проприетарный - верстка на fallback (Arial / Helvetica Neue).</a:t>
             </a:r>
             <a:endParaRPr lang="en-US" dirty="0"/>
           </a:p>
@@ -601,7 +600,7 @@
           <a:p>
             <a:r>
               <a:rPr lang="en-US" dirty="0"/>
-              <a:t>Скриншоты делаются самостоятельно за полчаса и работают как доказательство, а не иллюстрация.</a:t>
+              <a:t>Качество на стыках с внешними операторами обеспечивается договором, а не просьбами.</a:t>
             </a:r>
             <a:endParaRPr lang="en-US" dirty="0"/>
           </a:p>
@@ -689,7 +688,7 @@
           <a:p>
             <a:r>
               <a:rPr lang="en-US" dirty="0"/>
-              <a:t>Качество на стыках с внешними операторами обеспечивается договором, а не просьбами.</a:t>
+              <a:t>Платить за то, чтобы получить больше, укрепляет доверие. Платить за то, чтобы войти, испытывает его.</a:t>
             </a:r>
             <a:endParaRPr lang="en-US" dirty="0"/>
           </a:p>
@@ -713,94 +712,6 @@
             <a:fld id="{F7021451-1387-4CA6-816F-3879F97B5CBC}" type="slidenum">
               <a:rPr lang="en-US"/>
               <a:t>11</a:t>
-            </a:fld>
-            <a:endParaRPr lang="en-US"/>
-          </a:p>
-        </p:txBody>
-      </p:sp>
-    </p:spTree>
-    <p:extLst>
-      <p:ext uri="{BB962C8B-B14F-4D97-AF65-F5344CB8AC3E}">
-        <p14:creationId xmlns:p14="http://schemas.microsoft.com/office/powerpoint/2010/main" val="1024086991"/>
-      </p:ext>
-    </p:extLst>
-  </p:cSld>
-  <p:clrMapOvr>
-    <a:masterClrMapping/>
-  </p:clrMapOvr>
-</p:notes>
-</file>
-
-<file path=ppt/notesSlides/notesSlide12.xml><?xml version="1.0" encoding="utf-8"?>
-<p:notes xmlns:a="http://schemas.openxmlformats.org/drawingml/2006/main" xmlns:r="http://schemas.openxmlformats.org/officeDocument/2006/relationships" xmlns:p="http://schemas.openxmlformats.org/presentationml/2006/main">
-  <p:cSld>
-    <p:spTree>
-      <p:nvGrpSpPr>
-        <p:cNvPr id="1" name=""/>
-        <p:cNvGrpSpPr/>
-        <p:nvPr/>
-      </p:nvGrpSpPr>
-      <p:grpSpPr>
-        <a:xfrm>
-          <a:off x="0" y="0"/>
-          <a:ext cx="0" cy="0"/>
-          <a:chOff x="0" y="0"/>
-          <a:chExt cx="0" cy="0"/>
-        </a:xfrm>
-      </p:grpSpPr>
-      <p:sp>
-        <p:nvSpPr>
-          <p:cNvPr id="2" name="Slide Image Placeholder 1"/>
-          <p:cNvSpPr>
-            <a:spLocks noGrp="1" noRot="1" noChangeAspect="1"/>
-          </p:cNvSpPr>
-          <p:nvPr>
-            <p:ph type="sldImg"/>
-          </p:nvPr>
-        </p:nvSpPr>
-        <p:spPr/>
-      </p:sp>
-      <p:sp>
-        <p:nvSpPr>
-          <p:cNvPr id="3" name="Notes Placeholder 2"/>
-          <p:cNvSpPr>
-            <a:spLocks noGrp="1"/>
-          </p:cNvSpPr>
-          <p:nvPr>
-            <p:ph type="body" idx="1"/>
-          </p:nvPr>
-        </p:nvSpPr>
-        <p:spPr/>
-        <p:txBody>
-          <a:bodyPr/>
-          <a:lstStyle/>
-          <a:p>
-            <a:r>
-              <a:rPr lang="en-US" dirty="0"/>
-              <a:t>Платить за то, чтобы получить больше, укрепляет доверие. Платить за то, чтобы войти, испытывает его.</a:t>
-            </a:r>
-            <a:endParaRPr lang="en-US" dirty="0"/>
-          </a:p>
-        </p:txBody>
-      </p:sp>
-      <p:sp>
-        <p:nvSpPr>
-          <p:cNvPr id="4" name="Slide Number Placeholder 3"/>
-          <p:cNvSpPr>
-            <a:spLocks noGrp="1"/>
-          </p:cNvSpPr>
-          <p:nvPr>
-            <p:ph type="sldNum" sz="quarter" idx="10"/>
-          </p:nvPr>
-        </p:nvSpPr>
-        <p:spPr/>
-        <p:txBody>
-          <a:bodyPr/>
-          <a:lstStyle/>
-          <a:p>
-            <a:fld id="{F7021451-1387-4CA6-816F-3879F97B5CBC}" type="slidenum">
-              <a:rPr lang="en-US"/>
-              <a:t>12</a:t>
             </a:fld>
             <a:endParaRPr lang="en-US"/>
           </a:p>
@@ -865,7 +776,7 @@
           <a:p>
             <a:r>
               <a:rPr lang="en-US" dirty="0"/>
-              <a:t>Три утверждения, задающие рамку. Фото фасада — узнаваемость за секунду.</a:t>
+              <a:t>Три утверждения, задающие рамку. Фото фасада - узнаваемость за секунду.</a:t>
             </a:r>
             <a:endParaRPr lang="en-US" dirty="0"/>
           </a:p>
@@ -1041,7 +952,7 @@
           <a:p>
             <a:r>
               <a:rPr lang="en-US" dirty="0"/>
-              <a:t>Не границы ответственности, а предмет совместной работы с каждой функцией.</a:t>
+              <a:t>Механизмы, а не намерения: горизонталь строится процедурами и деньгами, не призывами.</a:t>
             </a:r>
             <a:endParaRPr lang="en-US" dirty="0"/>
           </a:p>
@@ -1129,7 +1040,7 @@
           <a:p>
             <a:r>
               <a:rPr lang="en-US" dirty="0"/>
-              <a:t>Механизмы, а не намерения: горизонталь строится процедурами и деньгами, не призывами.</a:t>
+              <a:t>Порядок значим. Фотографию лучше заменить на собственный снимок реальной точки трения, сделанный при проходе пути.</a:t>
             </a:r>
             <a:endParaRPr lang="en-US" dirty="0"/>
           </a:p>
@@ -1217,7 +1128,7 @@
           <a:p>
             <a:r>
               <a:rPr lang="en-US" dirty="0"/>
-              <a:t>Порядок значим. Фотографию делаем сами: пройти как посетитель и снять две-три реальные точки трения.</a:t>
+              <a:t>Минимум показателей, по которым реально принимаются решения. Всё начинается с нулевого замера. Под таблицей - три постоянных источника обратной связи.</a:t>
             </a:r>
             <a:endParaRPr lang="en-US" dirty="0"/>
           </a:p>
@@ -1305,7 +1216,7 @@
           <a:p>
             <a:r>
               <a:rPr lang="en-US" dirty="0"/>
-              <a:t>Минимум показателей, по которым реально принимаются решения. Всё начинается с нулевого замера.</a:t>
+              <a:t>Разделение намеренное: одним обучением дефицит гостеприимства не закрывается, условия работы влияют не меньше.</a:t>
             </a:r>
             <a:endParaRPr lang="en-US" dirty="0"/>
           </a:p>
@@ -1393,7 +1304,7 @@
           <a:p>
             <a:r>
               <a:rPr lang="en-US" dirty="0"/>
-              <a:t>Разделение намеренное: одним обучением дефицит гостеприимства не закрывается, условия работы влияют не меньше.</a:t>
+              <a:t>Пять артефактов, которые появляются на выходе. Порядок: сначала диагностика, потом документы.</a:t>
             </a:r>
             <a:endParaRPr lang="en-US" dirty="0"/>
           </a:p>
@@ -1481,7 +1392,7 @@
           <a:p>
             <a:r>
               <a:rPr lang="en-US" dirty="0"/>
-              <a:t>Пять артефактов, которые появляются на выходе. Порядок: сначала диагностика, потом документы.</a:t>
+              <a:t>Скриншот главной страницы сайта. Снимается самостоятельно - из этой среды внешние сайты недоступны.</a:t>
             </a:r>
             <a:endParaRPr lang="en-US" dirty="0"/>
           </a:p>
@@ -2137,7 +2048,7 @@
                 <a:ea typeface="Arial" pitchFamily="34" charset="-122"/>
                 <a:cs typeface="Arial" pitchFamily="34" charset="-120"/>
               </a:rPr>
-              <a:t>Цифровые сервисы</a:t>
+              <a:t>Площадка</a:t>
             </a:r>
             <a:endParaRPr lang="en-US" sz="3000" dirty="0"/>
           </a:p>
@@ -2151,8 +2062,8 @@
         </p:nvSpPr>
         <p:spPr>
           <a:xfrm>
-            <a:off x="640080" y="1783080"/>
-            <a:ext cx="4754880" cy="2011680"/>
+            <a:off x="640080" y="1874520"/>
+            <a:ext cx="5029200" cy="2194560"/>
           </a:xfrm>
           <a:prstGeom prst="rect">
             <a:avLst/>
@@ -2183,7 +2094,7 @@
                 <a:ea typeface="Arial" pitchFamily="34" charset="-122"/>
                 <a:cs typeface="Arial" pitchFamily="34" charset="-120"/>
               </a:rPr>
-              <a:t>UI/UX сайта и цифровые пути</a:t>
+              <a:t>Чат неполадок: увидел - сообщил - починили</a:t>
             </a:r>
             <a:endParaRPr lang="en-US" sz="1500" dirty="0"/>
           </a:p>
@@ -2207,7 +2118,7 @@
                 <a:ea typeface="Arial" pitchFamily="34" charset="-122"/>
                 <a:cs typeface="Arial" pitchFamily="34" charset="-120"/>
               </a:rPr>
-              <a:t>Мобильное приложение и веб-сервисы ГЭС-2 для посетителей</a:t>
+              <a:t>Улучшение точек питания</a:t>
             </a:r>
             <a:endParaRPr lang="en-US" sz="1500" dirty="0"/>
           </a:p>
@@ -2231,29 +2142,50 @@
                 <a:ea typeface="Arial" pitchFamily="34" charset="-122"/>
                 <a:cs typeface="Arial" pitchFamily="34" charset="-120"/>
               </a:rPr>
-              <a:t>Жизненный цикл систем, переход на микросервисную архитектуру</a:t>
+              <a:t>SLA с внешними операторами: питание, клининг, паркинг, билетный сервис</a:t>
             </a:r>
             <a:endParaRPr lang="en-US" sz="1500" dirty="0"/>
           </a:p>
         </p:txBody>
       </p:sp>
-      <p:sp>
-        <p:nvSpPr>
-          <p:cNvPr id="4" name="Shape 2"/>
+      <p:pic>
+        <p:nvPicPr>
+          <p:cNvPr id="4" name="Image 0" descr="/home/user/ges-2/docs/strategy/deck-images/platforms.jpg">    </p:cNvPr>
+          <p:cNvPicPr>
+            <a:picLocks noChangeAspect="1"/>
+          </p:cNvPicPr>
+          <p:nvPr/>
+        </p:nvPicPr>
+        <p:blipFill>
+          <a:blip r:embed="rId1"/>
+          <a:stretch>
+            <a:fillRect/>
+          </a:stretch>
+        </p:blipFill>
+        <p:spPr>
+          <a:xfrm>
+            <a:off x="6309360" y="2148840"/>
+            <a:ext cx="5239512" cy="3493008"/>
+          </a:xfrm>
+          <a:prstGeom prst="rect">
+            <a:avLst/>
+          </a:prstGeom>
+        </p:spPr>
+      </p:pic>
+      <p:sp>
+        <p:nvSpPr>
+          <p:cNvPr id="5" name="Shape 2"/>
           <p:cNvSpPr/>
           <p:nvPr/>
         </p:nvSpPr>
         <p:spPr>
           <a:xfrm>
-            <a:off x="5852160" y="1691640"/>
-            <a:ext cx="1737360" cy="3291840"/>
-          </a:xfrm>
-          <a:prstGeom prst="rect">
-            <a:avLst/>
-          </a:prstGeom>
-          <a:solidFill>
-            <a:srgbClr val="EEEEEE"/>
-          </a:solidFill>
+            <a:off x="6309360" y="2148840"/>
+            <a:ext cx="5239512" cy="3493008"/>
+          </a:xfrm>
+          <a:prstGeom prst="rect">
+            <a:avLst/>
+          </a:prstGeom>
           <a:ln w="6350">
             <a:solidFill>
               <a:srgbClr val="000000"/>
@@ -2261,263 +2193,6 @@
             <a:prstDash val="solid"/>
           </a:ln>
         </p:spPr>
-      </p:sp>
-      <p:sp>
-        <p:nvSpPr>
-          <p:cNvPr id="5" name="Text 3"/>
-          <p:cNvSpPr txBox="1"/>
-          <p:nvPr/>
-        </p:nvSpPr>
-        <p:spPr>
-          <a:xfrm>
-            <a:off x="6035040" y="2926080"/>
-            <a:ext cx="1371600" cy="822960"/>
-          </a:xfrm>
-          <a:prstGeom prst="rect">
-            <a:avLst/>
-          </a:prstGeom>
-          <a:noFill/>
-          <a:ln/>
-        </p:spPr>
-        <p:txBody>
-          <a:bodyPr wrap="square" lIns="0" tIns="0" rIns="0" bIns="0" rtlCol="0" anchor="ctr"/>
-          <a:lstStyle/>
-          <a:p>
-            <a:pPr algn="ctr" indent="0" marL="0">
-              <a:buNone/>
-            </a:pPr>
-            <a:r>
-              <a:rPr lang="en-US" sz="1000" dirty="0">
-                <a:solidFill>
-                  <a:srgbClr val="9CA3AF"/>
-                </a:solidFill>
-                <a:latin typeface="Arial" pitchFamily="34" charset="0"/>
-                <a:ea typeface="Arial" pitchFamily="34" charset="-122"/>
-                <a:cs typeface="Arial" pitchFamily="34" charset="-120"/>
-              </a:rPr>
-              <a:t>Экран 1</a:t>
-            </a:r>
-            <a:endParaRPr lang="en-US" sz="1000" dirty="0"/>
-          </a:p>
-          <a:p>
-            <a:pPr algn="ctr" indent="0" marL="0">
-              <a:buNone/>
-            </a:pPr>
-            <a:r>
-              <a:rPr lang="en-US" sz="1000" dirty="0">
-                <a:solidFill>
-                  <a:srgbClr val="9CA3AF"/>
-                </a:solidFill>
-                <a:latin typeface="Arial" pitchFamily="34" charset="0"/>
-                <a:ea typeface="Arial" pitchFamily="34" charset="-122"/>
-                <a:cs typeface="Arial" pitchFamily="34" charset="-120"/>
-              </a:rPr>
-              <a:t>поиск события</a:t>
-            </a:r>
-            <a:endParaRPr lang="en-US" sz="1000" dirty="0"/>
-          </a:p>
-        </p:txBody>
-      </p:sp>
-      <p:sp>
-        <p:nvSpPr>
-          <p:cNvPr id="6" name="Shape 4"/>
-          <p:cNvSpPr/>
-          <p:nvPr/>
-        </p:nvSpPr>
-        <p:spPr>
-          <a:xfrm>
-            <a:off x="7836408" y="1691640"/>
-            <a:ext cx="1737360" cy="3291840"/>
-          </a:xfrm>
-          <a:prstGeom prst="rect">
-            <a:avLst/>
-          </a:prstGeom>
-          <a:solidFill>
-            <a:srgbClr val="EEEEEE"/>
-          </a:solidFill>
-          <a:ln w="6350">
-            <a:solidFill>
-              <a:srgbClr val="000000"/>
-            </a:solidFill>
-            <a:prstDash val="solid"/>
-          </a:ln>
-        </p:spPr>
-      </p:sp>
-      <p:sp>
-        <p:nvSpPr>
-          <p:cNvPr id="7" name="Text 5"/>
-          <p:cNvSpPr txBox="1"/>
-          <p:nvPr/>
-        </p:nvSpPr>
-        <p:spPr>
-          <a:xfrm>
-            <a:off x="8019288" y="2926080"/>
-            <a:ext cx="1371600" cy="822960"/>
-          </a:xfrm>
-          <a:prstGeom prst="rect">
-            <a:avLst/>
-          </a:prstGeom>
-          <a:noFill/>
-          <a:ln/>
-        </p:spPr>
-        <p:txBody>
-          <a:bodyPr wrap="square" lIns="0" tIns="0" rIns="0" bIns="0" rtlCol="0" anchor="ctr"/>
-          <a:lstStyle/>
-          <a:p>
-            <a:pPr algn="ctr" indent="0" marL="0">
-              <a:buNone/>
-            </a:pPr>
-            <a:r>
-              <a:rPr lang="en-US" sz="1000" dirty="0">
-                <a:solidFill>
-                  <a:srgbClr val="9CA3AF"/>
-                </a:solidFill>
-                <a:latin typeface="Arial" pitchFamily="34" charset="0"/>
-                <a:ea typeface="Arial" pitchFamily="34" charset="-122"/>
-                <a:cs typeface="Arial" pitchFamily="34" charset="-120"/>
-              </a:rPr>
-              <a:t>Экран 2</a:t>
-            </a:r>
-            <a:endParaRPr lang="en-US" sz="1000" dirty="0"/>
-          </a:p>
-          <a:p>
-            <a:pPr algn="ctr" indent="0" marL="0">
-              <a:buNone/>
-            </a:pPr>
-            <a:r>
-              <a:rPr lang="en-US" sz="1000" dirty="0">
-                <a:solidFill>
-                  <a:srgbClr val="9CA3AF"/>
-                </a:solidFill>
-                <a:latin typeface="Arial" pitchFamily="34" charset="0"/>
-                <a:ea typeface="Arial" pitchFamily="34" charset="-122"/>
-                <a:cs typeface="Arial" pitchFamily="34" charset="-120"/>
-              </a:rPr>
-              <a:t>регистрация</a:t>
-            </a:r>
-            <a:endParaRPr lang="en-US" sz="1000" dirty="0"/>
-          </a:p>
-        </p:txBody>
-      </p:sp>
-      <p:sp>
-        <p:nvSpPr>
-          <p:cNvPr id="8" name="Shape 6"/>
-          <p:cNvSpPr/>
-          <p:nvPr/>
-        </p:nvSpPr>
-        <p:spPr>
-          <a:xfrm>
-            <a:off x="9820656" y="1691640"/>
-            <a:ext cx="1737360" cy="3291840"/>
-          </a:xfrm>
-          <a:prstGeom prst="rect">
-            <a:avLst/>
-          </a:prstGeom>
-          <a:solidFill>
-            <a:srgbClr val="EEEEEE"/>
-          </a:solidFill>
-          <a:ln w="6350">
-            <a:solidFill>
-              <a:srgbClr val="000000"/>
-            </a:solidFill>
-            <a:prstDash val="solid"/>
-          </a:ln>
-        </p:spPr>
-      </p:sp>
-      <p:sp>
-        <p:nvSpPr>
-          <p:cNvPr id="9" name="Text 7"/>
-          <p:cNvSpPr txBox="1"/>
-          <p:nvPr/>
-        </p:nvSpPr>
-        <p:spPr>
-          <a:xfrm>
-            <a:off x="10003536" y="2926080"/>
-            <a:ext cx="1371600" cy="822960"/>
-          </a:xfrm>
-          <a:prstGeom prst="rect">
-            <a:avLst/>
-          </a:prstGeom>
-          <a:noFill/>
-          <a:ln/>
-        </p:spPr>
-        <p:txBody>
-          <a:bodyPr wrap="square" lIns="0" tIns="0" rIns="0" bIns="0" rtlCol="0" anchor="ctr"/>
-          <a:lstStyle/>
-          <a:p>
-            <a:pPr algn="ctr" indent="0" marL="0">
-              <a:buNone/>
-            </a:pPr>
-            <a:r>
-              <a:rPr lang="en-US" sz="1000" dirty="0">
-                <a:solidFill>
-                  <a:srgbClr val="9CA3AF"/>
-                </a:solidFill>
-                <a:latin typeface="Arial" pitchFamily="34" charset="0"/>
-                <a:ea typeface="Arial" pitchFamily="34" charset="-122"/>
-                <a:cs typeface="Arial" pitchFamily="34" charset="-120"/>
-              </a:rPr>
-              <a:t>Экран 3</a:t>
-            </a:r>
-            <a:endParaRPr lang="en-US" sz="1000" dirty="0"/>
-          </a:p>
-          <a:p>
-            <a:pPr algn="ctr" indent="0" marL="0">
-              <a:buNone/>
-            </a:pPr>
-            <a:r>
-              <a:rPr lang="en-US" sz="1000" dirty="0">
-                <a:solidFill>
-                  <a:srgbClr val="9CA3AF"/>
-                </a:solidFill>
-                <a:latin typeface="Arial" pitchFamily="34" charset="0"/>
-                <a:ea typeface="Arial" pitchFamily="34" charset="-122"/>
-                <a:cs typeface="Arial" pitchFamily="34" charset="-120"/>
-              </a:rPr>
-              <a:t>подтверждение</a:t>
-            </a:r>
-            <a:endParaRPr lang="en-US" sz="1000" dirty="0"/>
-          </a:p>
-        </p:txBody>
-      </p:sp>
-      <p:sp>
-        <p:nvSpPr>
-          <p:cNvPr id="10" name="Text 8"/>
-          <p:cNvSpPr txBox="1"/>
-          <p:nvPr/>
-        </p:nvSpPr>
-        <p:spPr>
-          <a:xfrm>
-            <a:off x="5852160" y="5120640"/>
-            <a:ext cx="5696712" cy="320040"/>
-          </a:xfrm>
-          <a:prstGeom prst="rect">
-            <a:avLst/>
-          </a:prstGeom>
-          <a:noFill/>
-          <a:ln/>
-        </p:spPr>
-        <p:txBody>
-          <a:bodyPr wrap="square" lIns="0" tIns="0" rIns="0" bIns="0" rtlCol="0" anchor="ctr"/>
-          <a:lstStyle/>
-          <a:p>
-            <a:pPr indent="0" marL="0">
-              <a:buNone/>
-            </a:pPr>
-            <a:r>
-              <a:rPr lang="en-US" sz="1100" dirty="0">
-                <a:solidFill>
-                  <a:srgbClr val="9CA3AF"/>
-                </a:solidFill>
-                <a:latin typeface="Arial" pitchFamily="34" charset="0"/>
-                <a:ea typeface="Arial" pitchFamily="34" charset="-122"/>
-                <a:cs typeface="Arial" pitchFamily="34" charset="-120"/>
-              </a:rPr>
-              <a:t>Скриншоты текущего пути с пометками, где человек теряется</a:t>
-            </a:r>
-            <a:endParaRPr lang="en-US" sz="1100" dirty="0"/>
-          </a:p>
-        </p:txBody>
       </p:sp>
     </p:spTree>
   </p:cSld>
@@ -2577,7 +2252,7 @@
                 <a:ea typeface="Arial" pitchFamily="34" charset="-122"/>
                 <a:cs typeface="Arial" pitchFamily="34" charset="-120"/>
               </a:rPr>
-              <a:t>Площадка</a:t>
+              <a:t>Монетизация и продукты</a:t>
             </a:r>
             <a:endParaRPr lang="en-US" sz="3000" dirty="0"/>
           </a:p>
@@ -2592,7 +2267,46 @@
         <p:spPr>
           <a:xfrm>
             <a:off x="640080" y="1783080"/>
-            <a:ext cx="5029200" cy="2194560"/>
+            <a:ext cx="3474720" cy="320040"/>
+          </a:xfrm>
+          <a:prstGeom prst="rect">
+            <a:avLst/>
+          </a:prstGeom>
+          <a:noFill/>
+          <a:ln/>
+        </p:spPr>
+        <p:txBody>
+          <a:bodyPr wrap="square" lIns="0" tIns="0" rIns="0" bIns="0" rtlCol="0" anchor="ctr"/>
+          <a:lstStyle/>
+          <a:p>
+            <a:pPr indent="0" marL="0">
+              <a:buNone/>
+            </a:pPr>
+            <a:r>
+              <a:rPr lang="en-US" sz="1600" b="1" dirty="0">
+                <a:solidFill>
+                  <a:srgbClr val="000000"/>
+                </a:solidFill>
+                <a:latin typeface="Arial" pitchFamily="34" charset="0"/>
+                <a:ea typeface="Arial" pitchFamily="34" charset="-122"/>
+                <a:cs typeface="Arial" pitchFamily="34" charset="-120"/>
+              </a:rPr>
+              <a:t>На существующем потоке</a:t>
+            </a:r>
+            <a:endParaRPr lang="en-US" sz="1600" dirty="0"/>
+          </a:p>
+        </p:txBody>
+      </p:sp>
+      <p:sp>
+        <p:nvSpPr>
+          <p:cNvPr id="4" name="Text 2"/>
+          <p:cNvSpPr txBox="1"/>
+          <p:nvPr/>
+        </p:nvSpPr>
+        <p:spPr>
+          <a:xfrm>
+            <a:off x="640080" y="2194560"/>
+            <a:ext cx="3474720" cy="1645920"/>
           </a:xfrm>
           <a:prstGeom prst="rect">
             <a:avLst/>
@@ -2615,7 +2329,7 @@
               <a:buChar char="•"/>
             </a:pPr>
             <a:r>
-              <a:rPr lang="en-US" sz="1500" dirty="0">
+              <a:rPr lang="en-US" sz="1300" dirty="0">
                 <a:solidFill>
                   <a:srgbClr val="000000"/>
                 </a:solidFill>
@@ -2623,9 +2337,9 @@
                 <a:ea typeface="Arial" pitchFamily="34" charset="-122"/>
                 <a:cs typeface="Arial" pitchFamily="34" charset="-120"/>
               </a:rPr>
-              <a:t>Чат неполадок: увидел — сообщил — починили</a:t>
-            </a:r>
-            <a:endParaRPr lang="en-US" sz="1500" dirty="0"/>
+              <a:t>Средний чек: магазин, питание, платные форматы</a:t>
+            </a:r>
+            <a:endParaRPr lang="en-US" sz="1300" dirty="0"/>
           </a:p>
           <a:p>
             <a:pPr marL="342900" indent="-342900">
@@ -2639,7 +2353,7 @@
               <a:buChar char="•"/>
             </a:pPr>
             <a:r>
-              <a:rPr lang="en-US" sz="1500" dirty="0">
+              <a:rPr lang="en-US" sz="1300" dirty="0">
                 <a:solidFill>
                   <a:srgbClr val="000000"/>
                 </a:solidFill>
@@ -2647,10 +2361,71 @@
                 <a:ea typeface="Arial" pitchFamily="34" charset="-122"/>
                 <a:cs typeface="Arial" pitchFamily="34" charset="-120"/>
               </a:rPr>
-              <a:t>Улучшение точек питания</a:t>
-            </a:r>
-            <a:endParaRPr lang="en-US" sz="1500" dirty="0"/>
-          </a:p>
+              <a:t>Патронаж и членство для частных лиц</a:t>
+            </a:r>
+            <a:endParaRPr lang="en-US" sz="1300" dirty="0"/>
+          </a:p>
+        </p:txBody>
+      </p:sp>
+      <p:sp>
+        <p:nvSpPr>
+          <p:cNvPr id="5" name="Text 3"/>
+          <p:cNvSpPr txBox="1"/>
+          <p:nvPr/>
+        </p:nvSpPr>
+        <p:spPr>
+          <a:xfrm>
+            <a:off x="4343400" y="1783080"/>
+            <a:ext cx="3383280" cy="320040"/>
+          </a:xfrm>
+          <a:prstGeom prst="rect">
+            <a:avLst/>
+          </a:prstGeom>
+          <a:noFill/>
+          <a:ln/>
+        </p:spPr>
+        <p:txBody>
+          <a:bodyPr wrap="square" lIns="0" tIns="0" rIns="0" bIns="0" rtlCol="0" anchor="ctr"/>
+          <a:lstStyle/>
+          <a:p>
+            <a:pPr indent="0" marL="0">
+              <a:buNone/>
+            </a:pPr>
+            <a:r>
+              <a:rPr lang="en-US" sz="1600" b="1" dirty="0">
+                <a:solidFill>
+                  <a:srgbClr val="000000"/>
+                </a:solidFill>
+                <a:latin typeface="Arial" pitchFamily="34" charset="0"/>
+                <a:ea typeface="Arial" pitchFamily="34" charset="-122"/>
+                <a:cs typeface="Arial" pitchFamily="34" charset="-120"/>
+              </a:rPr>
+              <a:t>Новые продукты</a:t>
+            </a:r>
+            <a:endParaRPr lang="en-US" sz="1600" dirty="0"/>
+          </a:p>
+        </p:txBody>
+      </p:sp>
+      <p:sp>
+        <p:nvSpPr>
+          <p:cNvPr id="6" name="Text 4"/>
+          <p:cNvSpPr txBox="1"/>
+          <p:nvPr/>
+        </p:nvSpPr>
+        <p:spPr>
+          <a:xfrm>
+            <a:off x="4343400" y="2194560"/>
+            <a:ext cx="3383280" cy="2926080"/>
+          </a:xfrm>
+          <a:prstGeom prst="rect">
+            <a:avLst/>
+          </a:prstGeom>
+          <a:noFill/>
+          <a:ln/>
+        </p:spPr>
+        <p:txBody>
+          <a:bodyPr wrap="square" lIns="0" tIns="0" rIns="0" bIns="0" rtlCol="0" anchor="ctr"/>
+          <a:lstStyle/>
           <a:p>
             <a:pPr marL="342900" indent="-342900">
               <a:lnSpc>
@@ -2663,7 +2438,7 @@
               <a:buChar char="•"/>
             </a:pPr>
             <a:r>
-              <a:rPr lang="en-US" sz="1500" dirty="0">
+              <a:rPr lang="en-US" sz="1300" dirty="0">
                 <a:solidFill>
                   <a:srgbClr val="000000"/>
                 </a:solidFill>
@@ -2671,180 +2446,10 @@
                 <a:ea typeface="Arial" pitchFamily="34" charset="-122"/>
                 <a:cs typeface="Arial" pitchFamily="34" charset="-120"/>
               </a:rPr>
-              <a:t>SLA с внешними операторами: питание, клининг, паркинг, билетный сервис</a:t>
-            </a:r>
-            <a:endParaRPr lang="en-US" sz="1500" dirty="0"/>
-          </a:p>
-        </p:txBody>
-      </p:sp>
-      <p:pic>
-        <p:nvPicPr>
-          <p:cNvPr id="4" name="Image 0" descr="/home/user/ges-2/docs/strategy/deck-images/platforms.jpg">    </p:cNvPr>
-          <p:cNvPicPr>
-            <a:picLocks noChangeAspect="1"/>
-          </p:cNvPicPr>
-          <p:nvPr/>
-        </p:nvPicPr>
-        <p:blipFill>
-          <a:blip r:embed="rId1"/>
-          <a:srcRect l="0" r="0" t="0" b="0"/>
-          <a:stretch/>
-        </p:blipFill>
-        <p:spPr>
-          <a:xfrm>
-            <a:off x="6309360" y="1691640"/>
-            <a:ext cx="5239512" cy="4023360"/>
-          </a:xfrm>
-          <a:prstGeom prst="rect">
-            <a:avLst/>
-          </a:prstGeom>
-        </p:spPr>
-      </p:pic>
-      <p:sp>
-        <p:nvSpPr>
-          <p:cNvPr id="5" name="Shape 2"/>
-          <p:cNvSpPr/>
-          <p:nvPr/>
-        </p:nvSpPr>
-        <p:spPr>
-          <a:xfrm>
-            <a:off x="6309360" y="1691640"/>
-            <a:ext cx="5239512" cy="4023360"/>
-          </a:xfrm>
-          <a:prstGeom prst="rect">
-            <a:avLst/>
-          </a:prstGeom>
-          <a:ln w="6350">
-            <a:solidFill>
-              <a:srgbClr val="000000"/>
-            </a:solidFill>
-            <a:prstDash val="solid"/>
-          </a:ln>
-        </p:spPr>
-      </p:sp>
-    </p:spTree>
-  </p:cSld>
-  <p:clrMapOvr>
-    <a:masterClrMapping/>
-  </p:clrMapOvr>
-</p:sld>
-</file>
-
-<file path=ppt/slides/slide12.xml><?xml version="1.0" encoding="utf-8"?>
-<p:sld xmlns:a="http://schemas.openxmlformats.org/drawingml/2006/main" xmlns:r="http://schemas.openxmlformats.org/officeDocument/2006/relationships" xmlns:p="http://schemas.openxmlformats.org/presentationml/2006/main">
-  <p:cSld name="Slide 12">
-    <p:spTree>
-      <p:nvGrpSpPr>
-        <p:cNvPr id="1" name=""/>
-        <p:cNvGrpSpPr/>
-        <p:nvPr/>
-      </p:nvGrpSpPr>
-      <p:grpSpPr>
-        <a:xfrm>
-          <a:off x="0" y="0"/>
-          <a:ext cx="0" cy="0"/>
-          <a:chOff x="0" y="0"/>
-          <a:chExt cx="0" cy="0"/>
-        </a:xfrm>
-      </p:grpSpPr>
-      <p:sp>
-        <p:nvSpPr>
-          <p:cNvPr id="2" name="Text 0"/>
-          <p:cNvSpPr txBox="1"/>
-          <p:nvPr/>
-        </p:nvSpPr>
-        <p:spPr>
-          <a:xfrm>
-            <a:off x="640080" y="457200"/>
-            <a:ext cx="10911535" cy="731520"/>
-          </a:xfrm>
-          <a:prstGeom prst="rect">
-            <a:avLst/>
-          </a:prstGeom>
-          <a:noFill/>
-          <a:ln/>
-        </p:spPr>
-        <p:txBody>
-          <a:bodyPr wrap="square" lIns="0" tIns="0" rIns="0" bIns="0" rtlCol="0" anchor="t"/>
-          <a:lstStyle/>
-          <a:p>
-            <a:pPr algn="l" indent="0" marL="0">
-              <a:buNone/>
-            </a:pPr>
-            <a:r>
-              <a:rPr lang="en-US" sz="3000" spc="60" kern="0" dirty="0">
-                <a:solidFill>
-                  <a:srgbClr val="000000"/>
-                </a:solidFill>
-                <a:latin typeface="Arial" pitchFamily="34" charset="0"/>
-                <a:ea typeface="Arial" pitchFamily="34" charset="-122"/>
-                <a:cs typeface="Arial" pitchFamily="34" charset="-120"/>
-              </a:rPr>
-              <a:t>Монетизация и продукты</a:t>
-            </a:r>
-            <a:endParaRPr lang="en-US" sz="3000" dirty="0"/>
-          </a:p>
-        </p:txBody>
-      </p:sp>
-      <p:sp>
-        <p:nvSpPr>
-          <p:cNvPr id="3" name="Text 1"/>
-          <p:cNvSpPr txBox="1"/>
-          <p:nvPr/>
-        </p:nvSpPr>
-        <p:spPr>
-          <a:xfrm>
-            <a:off x="640080" y="1691640"/>
-            <a:ext cx="3566160" cy="320040"/>
-          </a:xfrm>
-          <a:prstGeom prst="rect">
-            <a:avLst/>
-          </a:prstGeom>
-          <a:noFill/>
-          <a:ln/>
-        </p:spPr>
-        <p:txBody>
-          <a:bodyPr wrap="square" lIns="0" tIns="0" rIns="0" bIns="0" rtlCol="0" anchor="ctr"/>
-          <a:lstStyle/>
-          <a:p>
-            <a:pPr indent="0" marL="0">
-              <a:buNone/>
-            </a:pPr>
-            <a:r>
-              <a:rPr lang="en-US" sz="1600" b="1" dirty="0">
-                <a:solidFill>
-                  <a:srgbClr val="000000"/>
-                </a:solidFill>
-                <a:latin typeface="Arial" pitchFamily="34" charset="0"/>
-                <a:ea typeface="Arial" pitchFamily="34" charset="-122"/>
-                <a:cs typeface="Arial" pitchFamily="34" charset="-120"/>
-              </a:rPr>
-              <a:t>На существующем потоке</a:t>
-            </a:r>
-            <a:endParaRPr lang="en-US" sz="1600" dirty="0"/>
-          </a:p>
-        </p:txBody>
-      </p:sp>
-      <p:sp>
-        <p:nvSpPr>
-          <p:cNvPr id="4" name="Text 2"/>
-          <p:cNvSpPr txBox="1"/>
-          <p:nvPr/>
-        </p:nvSpPr>
-        <p:spPr>
-          <a:xfrm>
-            <a:off x="640080" y="2103120"/>
-            <a:ext cx="3566160" cy="1645920"/>
-          </a:xfrm>
-          <a:prstGeom prst="rect">
-            <a:avLst/>
-          </a:prstGeom>
-          <a:noFill/>
-          <a:ln/>
-        </p:spPr>
-        <p:txBody>
-          <a:bodyPr wrap="square" lIns="0" tIns="0" rIns="0" bIns="0" rtlCol="0" anchor="ctr"/>
-          <a:lstStyle/>
+              <a:t>Группа коммерческих сервисов</a:t>
+            </a:r>
+            <a:endParaRPr lang="en-US" sz="1300" dirty="0"/>
+          </a:p>
           <a:p>
             <a:pPr marL="342900" indent="-342900">
               <a:lnSpc>
@@ -2865,7 +2470,7 @@
                 <a:ea typeface="Arial" pitchFamily="34" charset="-122"/>
                 <a:cs typeface="Arial" pitchFamily="34" charset="-120"/>
               </a:rPr>
-              <a:t>Средний чек: магазин, питание, платные форматы</a:t>
+              <a:t>Монетизация «Сводов»</a:t>
             </a:r>
             <a:endParaRPr lang="en-US" sz="1300" dirty="0"/>
           </a:p>
@@ -2889,71 +2494,10 @@
                 <a:ea typeface="Arial" pitchFamily="34" charset="-122"/>
                 <a:cs typeface="Arial" pitchFamily="34" charset="-120"/>
               </a:rPr>
-              <a:t>Патронаж и членство для частных лиц</a:t>
+              <a:t>Инкубатор гипотез в MVP</a:t>
             </a:r>
             <a:endParaRPr lang="en-US" sz="1300" dirty="0"/>
           </a:p>
-        </p:txBody>
-      </p:sp>
-      <p:sp>
-        <p:nvSpPr>
-          <p:cNvPr id="5" name="Text 3"/>
-          <p:cNvSpPr txBox="1"/>
-          <p:nvPr/>
-        </p:nvSpPr>
-        <p:spPr>
-          <a:xfrm>
-            <a:off x="4434840" y="1691640"/>
-            <a:ext cx="3566160" cy="320040"/>
-          </a:xfrm>
-          <a:prstGeom prst="rect">
-            <a:avLst/>
-          </a:prstGeom>
-          <a:noFill/>
-          <a:ln/>
-        </p:spPr>
-        <p:txBody>
-          <a:bodyPr wrap="square" lIns="0" tIns="0" rIns="0" bIns="0" rtlCol="0" anchor="ctr"/>
-          <a:lstStyle/>
-          <a:p>
-            <a:pPr indent="0" marL="0">
-              <a:buNone/>
-            </a:pPr>
-            <a:r>
-              <a:rPr lang="en-US" sz="1600" b="1" dirty="0">
-                <a:solidFill>
-                  <a:srgbClr val="000000"/>
-                </a:solidFill>
-                <a:latin typeface="Arial" pitchFamily="34" charset="0"/>
-                <a:ea typeface="Arial" pitchFamily="34" charset="-122"/>
-                <a:cs typeface="Arial" pitchFamily="34" charset="-120"/>
-              </a:rPr>
-              <a:t>Новые продукты</a:t>
-            </a:r>
-            <a:endParaRPr lang="en-US" sz="1600" dirty="0"/>
-          </a:p>
-        </p:txBody>
-      </p:sp>
-      <p:sp>
-        <p:nvSpPr>
-          <p:cNvPr id="6" name="Text 4"/>
-          <p:cNvSpPr txBox="1"/>
-          <p:nvPr/>
-        </p:nvSpPr>
-        <p:spPr>
-          <a:xfrm>
-            <a:off x="4434840" y="2103120"/>
-            <a:ext cx="3566160" cy="2926080"/>
-          </a:xfrm>
-          <a:prstGeom prst="rect">
-            <a:avLst/>
-          </a:prstGeom>
-          <a:noFill/>
-          <a:ln/>
-        </p:spPr>
-        <p:txBody>
-          <a:bodyPr wrap="square" lIns="0" tIns="0" rIns="0" bIns="0" rtlCol="0" anchor="ctr"/>
-          <a:lstStyle/>
           <a:p>
             <a:pPr marL="342900" indent="-342900">
               <a:lnSpc>
@@ -2974,7 +2518,7 @@
                 <a:ea typeface="Arial" pitchFamily="34" charset="-122"/>
                 <a:cs typeface="Arial" pitchFamily="34" charset="-120"/>
               </a:rPr>
-              <a:t>Группа коммерческих сервисов</a:t>
+              <a:t>Услуги на внешнем рынке, арт-консалтинг</a:t>
             </a:r>
             <a:endParaRPr lang="en-US" sz="1300" dirty="0"/>
           </a:p>
@@ -2998,78 +2542,6 @@
                 <a:ea typeface="Arial" pitchFamily="34" charset="-122"/>
                 <a:cs typeface="Arial" pitchFamily="34" charset="-120"/>
               </a:rPr>
-              <a:t>Монетизация «Сводов»</a:t>
-            </a:r>
-            <a:endParaRPr lang="en-US" sz="1300" dirty="0"/>
-          </a:p>
-          <a:p>
-            <a:pPr marL="342900" indent="-342900">
-              <a:lnSpc>
-                <a:spcPct val="115000"/>
-              </a:lnSpc>
-              <a:spcAft>
-                <a:spcPts val="1000"/>
-              </a:spcAft>
-              <a:buSzPct val="100000"/>
-              <a:buChar char="•"/>
-            </a:pPr>
-            <a:r>
-              <a:rPr lang="en-US" sz="1300" dirty="0">
-                <a:solidFill>
-                  <a:srgbClr val="000000"/>
-                </a:solidFill>
-                <a:latin typeface="Arial" pitchFamily="34" charset="0"/>
-                <a:ea typeface="Arial" pitchFamily="34" charset="-122"/>
-                <a:cs typeface="Arial" pitchFamily="34" charset="-120"/>
-              </a:rPr>
-              <a:t>Инкубатор гипотез → MVP</a:t>
-            </a:r>
-            <a:endParaRPr lang="en-US" sz="1300" dirty="0"/>
-          </a:p>
-          <a:p>
-            <a:pPr marL="342900" indent="-342900">
-              <a:lnSpc>
-                <a:spcPct val="115000"/>
-              </a:lnSpc>
-              <a:spcAft>
-                <a:spcPts val="1000"/>
-              </a:spcAft>
-              <a:buSzPct val="100000"/>
-              <a:buChar char="•"/>
-            </a:pPr>
-            <a:r>
-              <a:rPr lang="en-US" sz="1300" dirty="0">
-                <a:solidFill>
-                  <a:srgbClr val="000000"/>
-                </a:solidFill>
-                <a:latin typeface="Arial" pitchFamily="34" charset="0"/>
-                <a:ea typeface="Arial" pitchFamily="34" charset="-122"/>
-                <a:cs typeface="Arial" pitchFamily="34" charset="-120"/>
-              </a:rPr>
-              <a:t>Услуги на внешнем рынке, арт-консалтинг</a:t>
-            </a:r>
-            <a:endParaRPr lang="en-US" sz="1300" dirty="0"/>
-          </a:p>
-          <a:p>
-            <a:pPr marL="342900" indent="-342900">
-              <a:lnSpc>
-                <a:spcPct val="115000"/>
-              </a:lnSpc>
-              <a:spcAft>
-                <a:spcPts val="1000"/>
-              </a:spcAft>
-              <a:buSzPct val="100000"/>
-              <a:buChar char="•"/>
-            </a:pPr>
-            <a:r>
-              <a:rPr lang="en-US" sz="1300" dirty="0">
-                <a:solidFill>
-                  <a:srgbClr val="000000"/>
-                </a:solidFill>
-                <a:latin typeface="Arial" pitchFamily="34" charset="0"/>
-                <a:ea typeface="Arial" pitchFamily="34" charset="-122"/>
-                <a:cs typeface="Arial" pitchFamily="34" charset="-120"/>
-              </a:rPr>
               <a:t>Выставки корпоративных коллекций партнёров</a:t>
             </a:r>
             <a:endParaRPr lang="en-US" sz="1300" dirty="0"/>
@@ -3086,13 +2558,14 @@
         </p:nvPicPr>
         <p:blipFill>
           <a:blip r:embed="rId1"/>
-          <a:srcRect l="0" r="0" t="0" b="0"/>
-          <a:stretch/>
+          <a:stretch>
+            <a:fillRect/>
+          </a:stretch>
         </p:blipFill>
         <p:spPr>
           <a:xfrm>
-            <a:off x="8229600" y="1691640"/>
-            <a:ext cx="3319272" cy="3657600"/>
+            <a:off x="7955280" y="2194560"/>
+            <a:ext cx="3593592" cy="2395728"/>
           </a:xfrm>
           <a:prstGeom prst="rect">
             <a:avLst/>
@@ -3107,8 +2580,8 @@
         </p:nvSpPr>
         <p:spPr>
           <a:xfrm>
-            <a:off x="8229600" y="1691640"/>
-            <a:ext cx="3319272" cy="3657600"/>
+            <a:off x="7955280" y="2194560"/>
+            <a:ext cx="3593592" cy="2395728"/>
           </a:xfrm>
           <a:prstGeom prst="rect">
             <a:avLst/>
@@ -3120,68 +2593,6 @@
             <a:prstDash val="solid"/>
           </a:ln>
         </p:spPr>
-      </p:sp>
-      <p:sp>
-        <p:nvSpPr>
-          <p:cNvPr id="9" name="Shape 6"/>
-          <p:cNvSpPr/>
-          <p:nvPr/>
-        </p:nvSpPr>
-        <p:spPr>
-          <a:xfrm>
-            <a:off x="640080" y="5623560"/>
-            <a:ext cx="10911535" cy="0"/>
-          </a:xfrm>
-          <a:prstGeom prst="line">
-            <a:avLst/>
-          </a:prstGeom>
-          <a:noFill/>
-          <a:ln w="9525">
-            <a:solidFill>
-              <a:srgbClr val="EEEEEE"/>
-            </a:solidFill>
-            <a:prstDash val="solid"/>
-          </a:ln>
-        </p:spPr>
-      </p:sp>
-      <p:sp>
-        <p:nvSpPr>
-          <p:cNvPr id="10" name="Text 7"/>
-          <p:cNvSpPr txBox="1"/>
-          <p:nvPr/>
-        </p:nvSpPr>
-        <p:spPr>
-          <a:xfrm>
-            <a:off x="640080" y="5760720"/>
-            <a:ext cx="10911535" cy="365760"/>
-          </a:xfrm>
-          <a:prstGeom prst="rect">
-            <a:avLst/>
-          </a:prstGeom>
-          <a:noFill/>
-          <a:ln/>
-        </p:spPr>
-        <p:txBody>
-          <a:bodyPr wrap="square" lIns="0" tIns="0" rIns="0" bIns="0" rtlCol="0" anchor="ctr"/>
-          <a:lstStyle/>
-          <a:p>
-            <a:pPr indent="0" marL="0">
-              <a:buNone/>
-            </a:pPr>
-            <a:r>
-              <a:rPr lang="en-US" sz="1500" i="1" dirty="0">
-                <a:solidFill>
-                  <a:srgbClr val="000000"/>
-                </a:solidFill>
-                <a:latin typeface="Arial" pitchFamily="34" charset="0"/>
-                <a:ea typeface="Arial" pitchFamily="34" charset="-122"/>
-                <a:cs typeface="Arial" pitchFamily="34" charset="-120"/>
-              </a:rPr>
-              <a:t>Принцип отбора — продаём углубление, а не доступ</a:t>
-            </a:r>
-            <a:endParaRPr lang="en-US" sz="1500" dirty="0"/>
-          </a:p>
-        </p:txBody>
       </p:sp>
     </p:spTree>
   </p:cSld>
@@ -3255,8 +2666,8 @@
         </p:nvSpPr>
         <p:spPr>
           <a:xfrm>
-            <a:off x="640080" y="1691640"/>
-            <a:ext cx="6400800" cy="914400"/>
+            <a:off x="640080" y="1783080"/>
+            <a:ext cx="5669280" cy="914400"/>
           </a:xfrm>
           <a:prstGeom prst="rect">
             <a:avLst/>
@@ -3275,7 +2686,7 @@
               <a:buNone/>
             </a:pPr>
             <a:r>
-              <a:rPr lang="en-US" sz="1900" spc="38" kern="0" dirty="0">
+              <a:rPr lang="en-US" sz="1800" spc="36" kern="0" dirty="0">
                 <a:solidFill>
                   <a:srgbClr val="000000"/>
                 </a:solidFill>
@@ -3283,9 +2694,9 @@
                 <a:ea typeface="Arial" pitchFamily="34" charset="-122"/>
                 <a:cs typeface="Arial" pitchFamily="34" charset="-120"/>
               </a:rPr>
-              <a:t>Доверие аудитории — то,</a:t>
-            </a:r>
-            <a:endParaRPr lang="en-US" sz="1900" dirty="0"/>
+              <a:t>Доверие аудитории - то,</a:t>
+            </a:r>
+            <a:endParaRPr lang="en-US" sz="1800" dirty="0"/>
           </a:p>
           <a:p>
             <a:pPr indent="0" marL="0">
@@ -3295,7 +2706,7 @@
               <a:buNone/>
             </a:pPr>
             <a:r>
-              <a:rPr lang="en-US" sz="1900" spc="38" kern="0" dirty="0">
+              <a:rPr lang="en-US" sz="1800" spc="36" kern="0" dirty="0">
                 <a:solidFill>
                   <a:srgbClr val="000000"/>
                 </a:solidFill>
@@ -3305,7 +2716,7 @@
               </a:rPr>
               <a:t>ради чего существует сервис</a:t>
             </a:r>
-            <a:endParaRPr lang="en-US" sz="1900" dirty="0"/>
+            <a:endParaRPr lang="en-US" sz="1800" dirty="0"/>
           </a:p>
         </p:txBody>
       </p:sp>
@@ -3317,8 +2728,8 @@
         </p:nvSpPr>
         <p:spPr>
           <a:xfrm>
-            <a:off x="640080" y="2807208"/>
-            <a:ext cx="6400800" cy="0"/>
+            <a:off x="640080" y="2862072"/>
+            <a:ext cx="5669280" cy="0"/>
           </a:xfrm>
           <a:prstGeom prst="line">
             <a:avLst/>
@@ -3340,8 +2751,8 @@
         </p:nvSpPr>
         <p:spPr>
           <a:xfrm>
-            <a:off x="640080" y="3063240"/>
-            <a:ext cx="6400800" cy="914400"/>
+            <a:off x="640080" y="3108960"/>
+            <a:ext cx="5669280" cy="914400"/>
           </a:xfrm>
           <a:prstGeom prst="rect">
             <a:avLst/>
@@ -3360,7 +2771,7 @@
               <a:buNone/>
             </a:pPr>
             <a:r>
-              <a:rPr lang="en-US" sz="1900" spc="38" kern="0" dirty="0">
+              <a:rPr lang="en-US" sz="1800" spc="36" kern="0" dirty="0">
                 <a:solidFill>
                   <a:srgbClr val="000000"/>
                 </a:solidFill>
@@ -3370,7 +2781,7 @@
               </a:rPr>
               <a:t>Сервис не создаёт доверие,</a:t>
             </a:r>
-            <a:endParaRPr lang="en-US" sz="1900" dirty="0"/>
+            <a:endParaRPr lang="en-US" sz="1800" dirty="0"/>
           </a:p>
           <a:p>
             <a:pPr indent="0" marL="0">
@@ -3380,7 +2791,7 @@
               <a:buNone/>
             </a:pPr>
             <a:r>
-              <a:rPr lang="en-US" sz="1900" spc="38" kern="0" dirty="0">
+              <a:rPr lang="en-US" sz="1800" spc="36" kern="0" dirty="0">
                 <a:solidFill>
                   <a:srgbClr val="000000"/>
                 </a:solidFill>
@@ -3390,7 +2801,7 @@
               </a:rPr>
               <a:t>он его исполняет и конвертирует</a:t>
             </a:r>
-            <a:endParaRPr lang="en-US" sz="1900" dirty="0"/>
+            <a:endParaRPr lang="en-US" sz="1800" dirty="0"/>
           </a:p>
         </p:txBody>
       </p:sp>
@@ -3402,8 +2813,8 @@
         </p:nvSpPr>
         <p:spPr>
           <a:xfrm>
-            <a:off x="640080" y="4178808"/>
-            <a:ext cx="6400800" cy="0"/>
+            <a:off x="640080" y="4187952"/>
+            <a:ext cx="5669280" cy="0"/>
           </a:xfrm>
           <a:prstGeom prst="line">
             <a:avLst/>
@@ -3426,7 +2837,7 @@
         <p:spPr>
           <a:xfrm>
             <a:off x="640080" y="4434840"/>
-            <a:ext cx="6400800" cy="914400"/>
+            <a:ext cx="5669280" cy="914400"/>
           </a:xfrm>
           <a:prstGeom prst="rect">
             <a:avLst/>
@@ -3445,7 +2856,7 @@
               <a:buNone/>
             </a:pPr>
             <a:r>
-              <a:rPr lang="en-US" sz="1900" spc="38" kern="0" dirty="0">
+              <a:rPr lang="en-US" sz="1800" spc="36" kern="0" dirty="0">
                 <a:solidFill>
                   <a:srgbClr val="000000"/>
                 </a:solidFill>
@@ -3453,9 +2864,9 @@
                 <a:ea typeface="Arial" pitchFamily="34" charset="-122"/>
                 <a:cs typeface="Arial" pitchFamily="34" charset="-120"/>
               </a:rPr>
-              <a:t>Периметр — весь путь, от поиска</a:t>
-            </a:r>
-            <a:endParaRPr lang="en-US" sz="1900" dirty="0"/>
+              <a:t>Периметр - весь путь, от поиска</a:t>
+            </a:r>
+            <a:endParaRPr lang="en-US" sz="1800" dirty="0"/>
           </a:p>
           <a:p>
             <a:pPr indent="0" marL="0">
@@ -3465,7 +2876,7 @@
               <a:buNone/>
             </a:pPr>
             <a:r>
-              <a:rPr lang="en-US" sz="1900" spc="38" kern="0" dirty="0">
+              <a:rPr lang="en-US" sz="1800" spc="36" kern="0" dirty="0">
                 <a:solidFill>
                   <a:srgbClr val="000000"/>
                 </a:solidFill>
@@ -3475,7 +2886,7 @@
               </a:rPr>
               <a:t>информации до выхода из здания</a:t>
             </a:r>
-            <a:endParaRPr lang="en-US" sz="1900" dirty="0"/>
+            <a:endParaRPr lang="en-US" sz="1800" dirty="0"/>
           </a:p>
         </p:txBody>
       </p:sp>
@@ -3489,13 +2900,14 @@
         </p:nvPicPr>
         <p:blipFill>
           <a:blip r:embed="rId1"/>
-          <a:srcRect l="0" r="0" t="0" b="0"/>
-          <a:stretch/>
+          <a:stretch>
+            <a:fillRect/>
+          </a:stretch>
         </p:blipFill>
         <p:spPr>
           <a:xfrm>
-            <a:off x="7589520" y="1691640"/>
-            <a:ext cx="3959352" cy="4023360"/>
+            <a:off x="6675120" y="2103120"/>
+            <a:ext cx="4873752" cy="3249168"/>
           </a:xfrm>
           <a:prstGeom prst="rect">
             <a:avLst/>
@@ -3510,8 +2922,8 @@
         </p:nvSpPr>
         <p:spPr>
           <a:xfrm>
-            <a:off x="7589520" y="1691640"/>
-            <a:ext cx="3959352" cy="4023360"/>
+            <a:off x="6675120" y="2103120"/>
+            <a:ext cx="4873752" cy="3249168"/>
           </a:xfrm>
           <a:prstGeom prst="rect">
             <a:avLst/>
@@ -3596,7 +3008,7 @@
         </p:nvSpPr>
         <p:spPr>
           <a:xfrm>
-            <a:off x="640080" y="1691640"/>
+            <a:off x="640080" y="1737360"/>
             <a:ext cx="548640" cy="365760"/>
           </a:xfrm>
           <a:prstGeom prst="rect">
@@ -3635,8 +3047,8 @@
         </p:nvSpPr>
         <p:spPr>
           <a:xfrm>
-            <a:off x="1325880" y="1691640"/>
-            <a:ext cx="5120640" cy="365760"/>
+            <a:off x="1280160" y="1737360"/>
+            <a:ext cx="4572000" cy="365760"/>
           </a:xfrm>
           <a:prstGeom prst="rect">
             <a:avLst/>
@@ -3674,8 +3086,8 @@
         </p:nvSpPr>
         <p:spPr>
           <a:xfrm>
-            <a:off x="640080" y="2103120"/>
-            <a:ext cx="5806440" cy="0"/>
+            <a:off x="640080" y="2148840"/>
+            <a:ext cx="5212080" cy="0"/>
           </a:xfrm>
           <a:prstGeom prst="line">
             <a:avLst/>
@@ -3697,7 +3109,7 @@
         </p:nvSpPr>
         <p:spPr>
           <a:xfrm>
-            <a:off x="640080" y="2221992"/>
+            <a:off x="640080" y="2267712"/>
             <a:ext cx="548640" cy="365760"/>
           </a:xfrm>
           <a:prstGeom prst="rect">
@@ -3736,8 +3148,8 @@
         </p:nvSpPr>
         <p:spPr>
           <a:xfrm>
-            <a:off x="1325880" y="2221992"/>
-            <a:ext cx="5120640" cy="365760"/>
+            <a:off x="1280160" y="2267712"/>
+            <a:ext cx="4572000" cy="365760"/>
           </a:xfrm>
           <a:prstGeom prst="rect">
             <a:avLst/>
@@ -3775,8 +3187,8 @@
         </p:nvSpPr>
         <p:spPr>
           <a:xfrm>
-            <a:off x="640080" y="2633472"/>
-            <a:ext cx="5806440" cy="0"/>
+            <a:off x="640080" y="2679192"/>
+            <a:ext cx="5212080" cy="0"/>
           </a:xfrm>
           <a:prstGeom prst="line">
             <a:avLst/>
@@ -3798,7 +3210,7 @@
         </p:nvSpPr>
         <p:spPr>
           <a:xfrm>
-            <a:off x="640080" y="2752344"/>
+            <a:off x="640080" y="2798064"/>
             <a:ext cx="548640" cy="365760"/>
           </a:xfrm>
           <a:prstGeom prst="rect">
@@ -3837,8 +3249,8 @@
         </p:nvSpPr>
         <p:spPr>
           <a:xfrm>
-            <a:off x="1325880" y="2752344"/>
-            <a:ext cx="5120640" cy="365760"/>
+            <a:off x="1280160" y="2798064"/>
+            <a:ext cx="4572000" cy="365760"/>
           </a:xfrm>
           <a:prstGeom prst="rect">
             <a:avLst/>
@@ -3876,8 +3288,8 @@
         </p:nvSpPr>
         <p:spPr>
           <a:xfrm>
-            <a:off x="640080" y="3163824"/>
-            <a:ext cx="5806440" cy="0"/>
+            <a:off x="640080" y="3209544"/>
+            <a:ext cx="5212080" cy="0"/>
           </a:xfrm>
           <a:prstGeom prst="line">
             <a:avLst/>
@@ -3899,7 +3311,7 @@
         </p:nvSpPr>
         <p:spPr>
           <a:xfrm>
-            <a:off x="640080" y="3282696"/>
+            <a:off x="640080" y="3328416"/>
             <a:ext cx="548640" cy="365760"/>
           </a:xfrm>
           <a:prstGeom prst="rect">
@@ -3938,8 +3350,8 @@
         </p:nvSpPr>
         <p:spPr>
           <a:xfrm>
-            <a:off x="1325880" y="3282696"/>
-            <a:ext cx="5120640" cy="365760"/>
+            <a:off x="1280160" y="3328416"/>
+            <a:ext cx="4572000" cy="365760"/>
           </a:xfrm>
           <a:prstGeom prst="rect">
             <a:avLst/>
@@ -3977,8 +3389,8 @@
         </p:nvSpPr>
         <p:spPr>
           <a:xfrm>
-            <a:off x="640080" y="3694176"/>
-            <a:ext cx="5806440" cy="0"/>
+            <a:off x="640080" y="3739896"/>
+            <a:ext cx="5212080" cy="0"/>
           </a:xfrm>
           <a:prstGeom prst="line">
             <a:avLst/>
@@ -4000,7 +3412,7 @@
         </p:nvSpPr>
         <p:spPr>
           <a:xfrm>
-            <a:off x="640080" y="3813048"/>
+            <a:off x="640080" y="3858768"/>
             <a:ext cx="548640" cy="365760"/>
           </a:xfrm>
           <a:prstGeom prst="rect">
@@ -4039,8 +3451,8 @@
         </p:nvSpPr>
         <p:spPr>
           <a:xfrm>
-            <a:off x="1325880" y="3813048"/>
-            <a:ext cx="5120640" cy="365760"/>
+            <a:off x="1280160" y="3858768"/>
+            <a:ext cx="4572000" cy="365760"/>
           </a:xfrm>
           <a:prstGeom prst="rect">
             <a:avLst/>
@@ -4078,8 +3490,8 @@
         </p:nvSpPr>
         <p:spPr>
           <a:xfrm>
-            <a:off x="640080" y="4224528"/>
-            <a:ext cx="5806440" cy="0"/>
+            <a:off x="640080" y="4270248"/>
+            <a:ext cx="5212080" cy="0"/>
           </a:xfrm>
           <a:prstGeom prst="line">
             <a:avLst/>
@@ -4101,7 +3513,7 @@
         </p:nvSpPr>
         <p:spPr>
           <a:xfrm>
-            <a:off x="640080" y="4343400"/>
+            <a:off x="640080" y="4389120"/>
             <a:ext cx="548640" cy="365760"/>
           </a:xfrm>
           <a:prstGeom prst="rect">
@@ -4140,8 +3552,8 @@
         </p:nvSpPr>
         <p:spPr>
           <a:xfrm>
-            <a:off x="1325880" y="4343400"/>
-            <a:ext cx="5120640" cy="365760"/>
+            <a:off x="1280160" y="4389120"/>
+            <a:ext cx="4572000" cy="365760"/>
           </a:xfrm>
           <a:prstGeom prst="rect">
             <a:avLst/>
@@ -4179,8 +3591,8 @@
         </p:nvSpPr>
         <p:spPr>
           <a:xfrm>
-            <a:off x="640080" y="4754880"/>
-            <a:ext cx="5806440" cy="0"/>
+            <a:off x="640080" y="4800600"/>
+            <a:ext cx="5212080" cy="0"/>
           </a:xfrm>
           <a:prstGeom prst="line">
             <a:avLst/>
@@ -4202,7 +3614,7 @@
         </p:nvSpPr>
         <p:spPr>
           <a:xfrm>
-            <a:off x="640080" y="4873752"/>
+            <a:off x="640080" y="4919472"/>
             <a:ext cx="548640" cy="365760"/>
           </a:xfrm>
           <a:prstGeom prst="rect">
@@ -4241,8 +3653,8 @@
         </p:nvSpPr>
         <p:spPr>
           <a:xfrm>
-            <a:off x="1325880" y="4873752"/>
-            <a:ext cx="5120640" cy="365760"/>
+            <a:off x="1280160" y="4919472"/>
+            <a:ext cx="4572000" cy="365760"/>
           </a:xfrm>
           <a:prstGeom prst="rect">
             <a:avLst/>
@@ -4280,8 +3692,8 @@
         </p:nvSpPr>
         <p:spPr>
           <a:xfrm>
-            <a:off x="640080" y="5285232"/>
-            <a:ext cx="5806440" cy="0"/>
+            <a:off x="640080" y="5330952"/>
+            <a:ext cx="5212080" cy="0"/>
           </a:xfrm>
           <a:prstGeom prst="line">
             <a:avLst/>
@@ -4303,7 +3715,7 @@
         </p:nvSpPr>
         <p:spPr>
           <a:xfrm>
-            <a:off x="640080" y="5404104"/>
+            <a:off x="640080" y="5449824"/>
             <a:ext cx="548640" cy="365760"/>
           </a:xfrm>
           <a:prstGeom prst="rect">
@@ -4342,8 +3754,8 @@
         </p:nvSpPr>
         <p:spPr>
           <a:xfrm>
-            <a:off x="1325880" y="5404104"/>
-            <a:ext cx="5120640" cy="365760"/>
+            <a:off x="1280160" y="5449824"/>
+            <a:ext cx="4572000" cy="365760"/>
           </a:xfrm>
           <a:prstGeom prst="rect">
             <a:avLst/>
@@ -4381,8 +3793,8 @@
         </p:nvSpPr>
         <p:spPr>
           <a:xfrm>
-            <a:off x="640080" y="5815584"/>
-            <a:ext cx="5806440" cy="0"/>
+            <a:off x="640080" y="5861304"/>
+            <a:ext cx="5212080" cy="0"/>
           </a:xfrm>
           <a:prstGeom prst="line">
             <a:avLst/>
@@ -4406,13 +3818,14 @@
         </p:nvPicPr>
         <p:blipFill>
           <a:blip r:embed="rId1"/>
-          <a:srcRect l="0" r="0" t="0" b="0"/>
-          <a:stretch/>
+          <a:stretch>
+            <a:fillRect/>
+          </a:stretch>
         </p:blipFill>
         <p:spPr>
           <a:xfrm>
-            <a:off x="7040880" y="1691640"/>
-            <a:ext cx="4507992" cy="4251960"/>
+            <a:off x="6309360" y="2148840"/>
+            <a:ext cx="5239512" cy="3493008"/>
           </a:xfrm>
           <a:prstGeom prst="rect">
             <a:avLst/>
@@ -4427,8 +3840,8 @@
         </p:nvSpPr>
         <p:spPr>
           <a:xfrm>
-            <a:off x="7040880" y="1691640"/>
-            <a:ext cx="4507992" cy="4251960"/>
+            <a:off x="6309360" y="2148840"/>
+            <a:ext cx="5239512" cy="3493008"/>
           </a:xfrm>
           <a:prstGeom prst="rect">
             <a:avLst/>
@@ -4499,69 +3912,53 @@
                 <a:ea typeface="Arial" pitchFamily="34" charset="-122"/>
                 <a:cs typeface="Arial" pitchFamily="34" charset="-120"/>
               </a:rPr>
-              <a:t>С кем работаем вместе</a:t>
+              <a:t>Как выстраивается взаимодействие</a:t>
             </a:r>
             <a:endParaRPr lang="en-US" sz="3000" dirty="0"/>
           </a:p>
         </p:txBody>
       </p:sp>
-      <p:sp>
-        <p:nvSpPr>
-          <p:cNvPr id="3" name="Text 1"/>
-          <p:cNvSpPr txBox="1"/>
-          <p:nvPr/>
-        </p:nvSpPr>
-        <p:spPr>
-          <a:xfrm>
-            <a:off x="640080" y="1298448"/>
-            <a:ext cx="10911535" cy="365760"/>
-          </a:xfrm>
-          <a:prstGeom prst="rect">
-            <a:avLst/>
-          </a:prstGeom>
-          <a:noFill/>
-          <a:ln/>
-        </p:spPr>
-        <p:txBody>
-          <a:bodyPr wrap="square" lIns="0" tIns="0" rIns="0" bIns="0" rtlCol="0" anchor="ctr"/>
-          <a:lstStyle/>
-          <a:p>
-            <a:pPr indent="0" marL="0">
-              <a:buNone/>
-            </a:pPr>
-            <a:r>
-              <a:rPr lang="en-US" sz="1500" dirty="0">
-                <a:solidFill>
-                  <a:srgbClr val="000000"/>
-                </a:solidFill>
-                <a:latin typeface="Arial" pitchFamily="34" charset="0"/>
-                <a:ea typeface="Arial" pitchFamily="34" charset="-122"/>
-                <a:cs typeface="Arial" pitchFamily="34" charset="-120"/>
-              </a:rPr>
-              <a:t>Впечатление посетителя/клиента единое — складывается из работы нескольких команд</a:t>
-            </a:r>
-            <a:endParaRPr lang="en-US" sz="1500" dirty="0"/>
-          </a:p>
-        </p:txBody>
-      </p:sp>
-      <p:sp>
-        <p:nvSpPr>
-          <p:cNvPr id="4" name="Shape 2"/>
+      <p:pic>
+        <p:nvPicPr>
+          <p:cNvPr id="3" name="Image 0" descr="/home/user/ges-2/docs/strategy/deck-images/svody.jpg">    </p:cNvPr>
+          <p:cNvPicPr>
+            <a:picLocks noChangeAspect="1"/>
+          </p:cNvPicPr>
+          <p:nvPr/>
+        </p:nvPicPr>
+        <p:blipFill>
+          <a:blip r:embed="rId1"/>
+          <a:stretch>
+            <a:fillRect/>
+          </a:stretch>
+        </p:blipFill>
+        <p:spPr>
+          <a:xfrm>
+            <a:off x="640080" y="2011680"/>
+            <a:ext cx="4754880" cy="3169920"/>
+          </a:xfrm>
+          <a:prstGeom prst="rect">
+            <a:avLst/>
+          </a:prstGeom>
+        </p:spPr>
+      </p:pic>
+      <p:sp>
+        <p:nvSpPr>
+          <p:cNvPr id="4" name="Shape 1"/>
           <p:cNvSpPr/>
           <p:nvPr/>
         </p:nvSpPr>
         <p:spPr>
           <a:xfrm>
-            <a:off x="640080" y="1783080"/>
-            <a:ext cx="10911535" cy="0"/>
-          </a:xfrm>
-          <a:prstGeom prst="line">
-            <a:avLst/>
-          </a:prstGeom>
-          <a:noFill/>
-          <a:ln w="9525">
+            <a:off x="640080" y="2011680"/>
+            <a:ext cx="4754880" cy="3169920"/>
+          </a:xfrm>
+          <a:prstGeom prst="rect">
+            <a:avLst/>
+          </a:prstGeom>
+          <a:ln w="6350">
             <a:solidFill>
-              <a:srgbClr val="EEEEEE"/>
+              <a:srgbClr val="000000"/>
             </a:solidFill>
             <a:prstDash val="solid"/>
           </a:ln>
@@ -4569,14 +3966,14 @@
       </p:sp>
       <p:sp>
         <p:nvSpPr>
-          <p:cNvPr id="5" name="Text 3"/>
+          <p:cNvPr id="5" name="Text 2"/>
           <p:cNvSpPr txBox="1"/>
           <p:nvPr/>
         </p:nvSpPr>
         <p:spPr>
           <a:xfrm>
-            <a:off x="640080" y="2011680"/>
-            <a:ext cx="5102352" cy="1188720"/>
+            <a:off x="5897880" y="1874520"/>
+            <a:ext cx="5650992" cy="3657600"/>
           </a:xfrm>
           <a:prstGeom prst="rect">
             <a:avLst/>
@@ -4585,17 +3982,21 @@
           <a:ln/>
         </p:spPr>
         <p:txBody>
-          <a:bodyPr wrap="square" lIns="0" tIns="0" rIns="0" bIns="0" rtlCol="0" anchor="t"/>
-          <a:lstStyle/>
-          <a:p>
-            <a:pPr indent="0" marL="0">
+          <a:bodyPr wrap="square" lIns="0" tIns="0" rIns="0" bIns="0" rtlCol="0" anchor="ctr"/>
+          <a:lstStyle/>
+          <a:p>
+            <a:pPr marL="342900" indent="-342900">
               <a:lnSpc>
                 <a:spcPct val="115000"/>
               </a:lnSpc>
-              <a:buNone/>
-            </a:pPr>
-            <a:r>
-              <a:rPr lang="en-US" sz="1500" b="1" dirty="0">
+              <a:spcAft>
+                <a:spcPts val="1000"/>
+              </a:spcAft>
+              <a:buSzPct val="100000"/>
+              <a:buChar char="•"/>
+            </a:pPr>
+            <a:r>
+              <a:rPr lang="en-US" sz="1500" dirty="0">
                 <a:solidFill>
                   <a:srgbClr val="000000"/>
                 </a:solidFill>
@@ -4603,61 +4004,47 @@
                 <a:ea typeface="Arial" pitchFamily="34" charset="-122"/>
                 <a:cs typeface="Arial" pitchFamily="34" charset="-120"/>
               </a:rPr>
-              <a:t>Продюсерский блок</a:t>
+              <a:t>Регулярные совместные совещания с продюсерским и коммерческим блоками</a:t>
             </a:r>
             <a:endParaRPr lang="en-US" sz="1500" dirty="0"/>
           </a:p>
           <a:p>
-            <a:pPr indent="0" marL="0">
+            <a:pPr marL="342900" indent="-342900">
               <a:lnSpc>
                 <a:spcPct val="115000"/>
               </a:lnSpc>
-              <a:buNone/>
-            </a:pPr>
-            <a:r>
-              <a:rPr lang="en-US" sz="1300" dirty="0">
-                <a:solidFill>
-                  <a:srgbClr val="333333"/>
-                </a:solidFill>
-                <a:latin typeface="Arial" pitchFamily="34" charset="0"/>
-                <a:ea typeface="Arial" pitchFamily="34" charset="-122"/>
-                <a:cs typeface="Arial" pitchFamily="34" charset="-120"/>
-              </a:rPr>
-              <a:t>Календарь и загрузка площадки, совместимость программных и коммерческих событий, окна на монтаж</a:t>
+              <a:spcAft>
+                <a:spcPts val="1000"/>
+              </a:spcAft>
+              <a:buSzPct val="100000"/>
+              <a:buChar char="•"/>
+            </a:pPr>
+            <a:r>
+              <a:rPr lang="en-US" sz="1500" dirty="0">
+                <a:solidFill>
+                  <a:srgbClr val="000000"/>
+                </a:solidFill>
+                <a:latin typeface="Arial" pitchFamily="34" charset="0"/>
+                <a:ea typeface="Arial" pitchFamily="34" charset="-122"/>
+                <a:cs typeface="Arial" pitchFamily="34" charset="-120"/>
+              </a:rPr>
+              <a:t>Ротация сотрудников бэк-офиса в зал</a:t>
             </a:r>
             <a:endParaRPr lang="en-US" sz="1500" dirty="0"/>
           </a:p>
-        </p:txBody>
-      </p:sp>
-      <p:sp>
-        <p:nvSpPr>
-          <p:cNvPr id="6" name="Text 4"/>
-          <p:cNvSpPr txBox="1"/>
-          <p:nvPr/>
-        </p:nvSpPr>
-        <p:spPr>
-          <a:xfrm>
-            <a:off x="640080" y="3383280"/>
-            <a:ext cx="5102352" cy="1188720"/>
-          </a:xfrm>
-          <a:prstGeom prst="rect">
-            <a:avLst/>
-          </a:prstGeom>
-          <a:noFill/>
-          <a:ln/>
-        </p:spPr>
-        <p:txBody>
-          <a:bodyPr wrap="square" lIns="0" tIns="0" rIns="0" bIns="0" rtlCol="0" anchor="t"/>
-          <a:lstStyle/>
-          <a:p>
-            <a:pPr indent="0" marL="0">
+          <a:p>
+            <a:pPr marL="342900" indent="-342900">
               <a:lnSpc>
                 <a:spcPct val="115000"/>
               </a:lnSpc>
-              <a:buNone/>
-            </a:pPr>
-            <a:r>
-              <a:rPr lang="en-US" sz="1500" b="1" dirty="0">
+              <a:spcAft>
+                <a:spcPts val="1000"/>
+              </a:spcAft>
+              <a:buSzPct val="100000"/>
+              <a:buChar char="•"/>
+            </a:pPr>
+            <a:r>
+              <a:rPr lang="en-US" sz="1500" dirty="0">
                 <a:solidFill>
                   <a:srgbClr val="000000"/>
                 </a:solidFill>
@@ -4665,61 +4052,47 @@
                 <a:ea typeface="Arial" pitchFamily="34" charset="-122"/>
                 <a:cs typeface="Arial" pitchFamily="34" charset="-120"/>
               </a:rPr>
-              <a:t>Маркетинг</a:t>
+              <a:t>Премиальный фонд для смежных подразделений в коммерческих проектах</a:t>
             </a:r>
             <a:endParaRPr lang="en-US" sz="1500" dirty="0"/>
           </a:p>
           <a:p>
-            <a:pPr indent="0" marL="0">
+            <a:pPr marL="342900" indent="-342900">
               <a:lnSpc>
                 <a:spcPct val="115000"/>
               </a:lnSpc>
-              <a:buNone/>
-            </a:pPr>
-            <a:r>
-              <a:rPr lang="en-US" sz="1300" dirty="0">
-                <a:solidFill>
-                  <a:srgbClr val="333333"/>
-                </a:solidFill>
-                <a:latin typeface="Arial" pitchFamily="34" charset="0"/>
-                <a:ea typeface="Arial" pitchFamily="34" charset="-122"/>
-                <a:cs typeface="Arial" pitchFamily="34" charset="-120"/>
-              </a:rPr>
-              <a:t>Совпадение обещания и опыта: анонс должен сойтись с тем, что человек получает на входе</a:t>
+              <a:spcAft>
+                <a:spcPts val="1000"/>
+              </a:spcAft>
+              <a:buSzPct val="100000"/>
+              <a:buChar char="•"/>
+            </a:pPr>
+            <a:r>
+              <a:rPr lang="en-US" sz="1500" dirty="0">
+                <a:solidFill>
+                  <a:srgbClr val="000000"/>
+                </a:solidFill>
+                <a:latin typeface="Arial" pitchFamily="34" charset="0"/>
+                <a:ea typeface="Arial" pitchFamily="34" charset="-122"/>
+                <a:cs typeface="Arial" pitchFamily="34" charset="-120"/>
+              </a:rPr>
+              <a:t>Внутренняя мотивация и делегирование ответственности</a:t>
             </a:r>
             <a:endParaRPr lang="en-US" sz="1500" dirty="0"/>
           </a:p>
-        </p:txBody>
-      </p:sp>
-      <p:sp>
-        <p:nvSpPr>
-          <p:cNvPr id="7" name="Text 5"/>
-          <p:cNvSpPr txBox="1"/>
-          <p:nvPr/>
-        </p:nvSpPr>
-        <p:spPr>
-          <a:xfrm>
-            <a:off x="640080" y="4754880"/>
-            <a:ext cx="5102352" cy="1188720"/>
-          </a:xfrm>
-          <a:prstGeom prst="rect">
-            <a:avLst/>
-          </a:prstGeom>
-          <a:noFill/>
-          <a:ln/>
-        </p:spPr>
-        <p:txBody>
-          <a:bodyPr wrap="square" lIns="0" tIns="0" rIns="0" bIns="0" rtlCol="0" anchor="t"/>
-          <a:lstStyle/>
-          <a:p>
-            <a:pPr indent="0" marL="0">
+          <a:p>
+            <a:pPr marL="342900" indent="-342900">
               <a:lnSpc>
                 <a:spcPct val="115000"/>
               </a:lnSpc>
-              <a:buNone/>
-            </a:pPr>
-            <a:r>
-              <a:rPr lang="en-US" sz="1500" b="1" dirty="0">
+              <a:spcAft>
+                <a:spcPts val="1000"/>
+              </a:spcAft>
+              <a:buSzPct val="100000"/>
+              <a:buChar char="•"/>
+            </a:pPr>
+            <a:r>
+              <a:rPr lang="en-US" sz="1500" dirty="0">
                 <a:solidFill>
                   <a:srgbClr val="000000"/>
                 </a:solidFill>
@@ -4727,213 +4100,7 @@
                 <a:ea typeface="Arial" pitchFamily="34" charset="-122"/>
                 <a:cs typeface="Arial" pitchFamily="34" charset="-120"/>
               </a:rPr>
-              <a:t>Внутренние и внешние коммуникации</a:t>
-            </a:r>
-            <a:endParaRPr lang="en-US" sz="1500" dirty="0"/>
-          </a:p>
-          <a:p>
-            <a:pPr indent="0" marL="0">
-              <a:lnSpc>
-                <a:spcPct val="115000"/>
-              </a:lnSpc>
-              <a:buNone/>
-            </a:pPr>
-            <a:r>
-              <a:rPr lang="en-US" sz="1300" dirty="0">
-                <a:solidFill>
-                  <a:srgbClr val="333333"/>
-                </a:solidFill>
-                <a:latin typeface="Arial" pitchFamily="34" charset="0"/>
-                <a:ea typeface="Arial" pitchFamily="34" charset="-122"/>
-                <a:cs typeface="Arial" pitchFamily="34" charset="-120"/>
-              </a:rPr>
-              <a:t>Единые формулировки во всех каналах, работа с публичными отзывами</a:t>
-            </a:r>
-            <a:endParaRPr lang="en-US" sz="1500" dirty="0"/>
-          </a:p>
-        </p:txBody>
-      </p:sp>
-      <p:sp>
-        <p:nvSpPr>
-          <p:cNvPr id="8" name="Text 6"/>
-          <p:cNvSpPr txBox="1"/>
-          <p:nvPr/>
-        </p:nvSpPr>
-        <p:spPr>
-          <a:xfrm>
-            <a:off x="6446520" y="2011680"/>
-            <a:ext cx="5102352" cy="1188720"/>
-          </a:xfrm>
-          <a:prstGeom prst="rect">
-            <a:avLst/>
-          </a:prstGeom>
-          <a:noFill/>
-          <a:ln/>
-        </p:spPr>
-        <p:txBody>
-          <a:bodyPr wrap="square" lIns="0" tIns="0" rIns="0" bIns="0" rtlCol="0" anchor="t"/>
-          <a:lstStyle/>
-          <a:p>
-            <a:pPr indent="0" marL="0">
-              <a:lnSpc>
-                <a:spcPct val="115000"/>
-              </a:lnSpc>
-              <a:buNone/>
-            </a:pPr>
-            <a:r>
-              <a:rPr lang="en-US" sz="1500" b="1" dirty="0">
-                <a:solidFill>
-                  <a:srgbClr val="000000"/>
-                </a:solidFill>
-                <a:latin typeface="Arial" pitchFamily="34" charset="0"/>
-                <a:ea typeface="Arial" pitchFamily="34" charset="-122"/>
-                <a:cs typeface="Arial" pitchFamily="34" charset="-120"/>
-              </a:rPr>
-              <a:t>Медиация</a:t>
-            </a:r>
-            <a:endParaRPr lang="en-US" sz="1500" dirty="0"/>
-          </a:p>
-          <a:p>
-            <a:pPr indent="0" marL="0">
-              <a:lnSpc>
-                <a:spcPct val="115000"/>
-              </a:lnSpc>
-              <a:buNone/>
-            </a:pPr>
-            <a:r>
-              <a:rPr lang="en-US" sz="1300" dirty="0">
-                <a:solidFill>
-                  <a:srgbClr val="333333"/>
-                </a:solidFill>
-                <a:latin typeface="Arial" pitchFamily="34" charset="0"/>
-                <a:ea typeface="Arial" pitchFamily="34" charset="-122"/>
-                <a:cs typeface="Arial" pitchFamily="34" charset="-120"/>
-              </a:rPr>
-              <a:t>Общие стандарты разговора с посетителем: для гостя медиатор и сотрудник службы неразличимы</a:t>
-            </a:r>
-            <a:endParaRPr lang="en-US" sz="1500" dirty="0"/>
-          </a:p>
-        </p:txBody>
-      </p:sp>
-      <p:sp>
-        <p:nvSpPr>
-          <p:cNvPr id="9" name="Text 7"/>
-          <p:cNvSpPr txBox="1"/>
-          <p:nvPr/>
-        </p:nvSpPr>
-        <p:spPr>
-          <a:xfrm>
-            <a:off x="6446520" y="3383280"/>
-            <a:ext cx="5102352" cy="1188720"/>
-          </a:xfrm>
-          <a:prstGeom prst="rect">
-            <a:avLst/>
-          </a:prstGeom>
-          <a:noFill/>
-          <a:ln/>
-        </p:spPr>
-        <p:txBody>
-          <a:bodyPr wrap="square" lIns="0" tIns="0" rIns="0" bIns="0" rtlCol="0" anchor="t"/>
-          <a:lstStyle/>
-          <a:p>
-            <a:pPr indent="0" marL="0">
-              <a:lnSpc>
-                <a:spcPct val="115000"/>
-              </a:lnSpc>
-              <a:buNone/>
-            </a:pPr>
-            <a:r>
-              <a:rPr lang="en-US" sz="1500" b="1" dirty="0">
-                <a:solidFill>
-                  <a:srgbClr val="000000"/>
-                </a:solidFill>
-                <a:latin typeface="Arial" pitchFamily="34" charset="0"/>
-                <a:ea typeface="Arial" pitchFamily="34" charset="-122"/>
-                <a:cs typeface="Arial" pitchFamily="34" charset="-120"/>
-              </a:rPr>
-              <a:t>HR</a:t>
-            </a:r>
-            <a:endParaRPr lang="en-US" sz="1500" dirty="0"/>
-          </a:p>
-          <a:p>
-            <a:pPr indent="0" marL="0">
-              <a:lnSpc>
-                <a:spcPct val="115000"/>
-              </a:lnSpc>
-              <a:buNone/>
-            </a:pPr>
-            <a:r>
-              <a:rPr lang="en-US" sz="1300" dirty="0">
-                <a:solidFill>
-                  <a:srgbClr val="333333"/>
-                </a:solidFill>
-                <a:latin typeface="Arial" pitchFamily="34" charset="0"/>
-                <a:ea typeface="Arial" pitchFamily="34" charset="-122"/>
-                <a:cs typeface="Arial" pitchFamily="34" charset="-120"/>
-              </a:rPr>
-              <a:t>Статус, условия и обучение фронт-линии</a:t>
-            </a:r>
-            <a:endParaRPr lang="en-US" sz="1500" dirty="0"/>
-          </a:p>
-        </p:txBody>
-      </p:sp>
-      <p:sp>
-        <p:nvSpPr>
-          <p:cNvPr id="10" name="Text 8"/>
-          <p:cNvSpPr txBox="1"/>
-          <p:nvPr/>
-        </p:nvSpPr>
-        <p:spPr>
-          <a:xfrm>
-            <a:off x="6446520" y="4754880"/>
-            <a:ext cx="5102352" cy="1188720"/>
-          </a:xfrm>
-          <a:prstGeom prst="rect">
-            <a:avLst/>
-          </a:prstGeom>
-          <a:noFill/>
-          <a:ln/>
-        </p:spPr>
-        <p:txBody>
-          <a:bodyPr wrap="square" lIns="0" tIns="0" rIns="0" bIns="0" rtlCol="0" anchor="t"/>
-          <a:lstStyle/>
-          <a:p>
-            <a:pPr indent="0" marL="0">
-              <a:lnSpc>
-                <a:spcPct val="115000"/>
-              </a:lnSpc>
-              <a:buNone/>
-            </a:pPr>
-            <a:r>
-              <a:rPr lang="en-US" sz="1500" b="1" dirty="0">
-                <a:solidFill>
-                  <a:srgbClr val="000000"/>
-                </a:solidFill>
-                <a:latin typeface="Arial" pitchFamily="34" charset="0"/>
-                <a:ea typeface="Arial" pitchFamily="34" charset="-122"/>
-                <a:cs typeface="Arial" pitchFamily="34" charset="-120"/>
-              </a:rPr>
-              <a:t>Внешние операторы</a:t>
-            </a:r>
-            <a:endParaRPr lang="en-US" sz="1500" dirty="0"/>
-          </a:p>
-          <a:p>
-            <a:pPr indent="0" marL="0">
-              <a:lnSpc>
-                <a:spcPct val="115000"/>
-              </a:lnSpc>
-              <a:buNone/>
-            </a:pPr>
-            <a:r>
-              <a:rPr lang="en-US" sz="1300" dirty="0">
-                <a:solidFill>
-                  <a:srgbClr val="333333"/>
-                </a:solidFill>
-                <a:latin typeface="Arial" pitchFamily="34" charset="0"/>
-                <a:ea typeface="Arial" pitchFamily="34" charset="-122"/>
-                <a:cs typeface="Arial" pitchFamily="34" charset="-120"/>
-              </a:rPr>
-              <a:t>Питание, клининг, паркинг, билетный сервис</a:t>
+              <a:t>Рабочая коммуникация в каналах, где люди действительно есть</a:t>
             </a:r>
             <a:endParaRPr lang="en-US" sz="1500" dirty="0"/>
           </a:p>
@@ -4997,15 +4164,420 @@
                 <a:ea typeface="Arial" pitchFamily="34" charset="-122"/>
                 <a:cs typeface="Arial" pitchFamily="34" charset="-120"/>
               </a:rPr>
-              <a:t>Как выстраивается взаимодействие</a:t>
+              <a:t>Диагностика</a:t>
             </a:r>
             <a:endParaRPr lang="en-US" sz="3000" dirty="0"/>
+          </a:p>
+        </p:txBody>
+      </p:sp>
+      <p:sp>
+        <p:nvSpPr>
+          <p:cNvPr id="3" name="Text 1"/>
+          <p:cNvSpPr txBox="1"/>
+          <p:nvPr/>
+        </p:nvSpPr>
+        <p:spPr>
+          <a:xfrm>
+            <a:off x="640080" y="1837944"/>
+            <a:ext cx="457200" cy="457200"/>
+          </a:xfrm>
+          <a:prstGeom prst="rect">
+            <a:avLst/>
+          </a:prstGeom>
+          <a:noFill/>
+          <a:ln/>
+        </p:spPr>
+        <p:txBody>
+          <a:bodyPr wrap="square" lIns="0" tIns="0" rIns="0" bIns="0" rtlCol="0" anchor="ctr"/>
+          <a:lstStyle/>
+          <a:p>
+            <a:pPr indent="0" marL="0">
+              <a:buNone/>
+            </a:pPr>
+            <a:r>
+              <a:rPr lang="en-US" sz="2200" spc="44" kern="0" dirty="0">
+                <a:solidFill>
+                  <a:srgbClr val="C0C1C0"/>
+                </a:solidFill>
+                <a:latin typeface="Arial" pitchFamily="34" charset="0"/>
+                <a:ea typeface="Arial" pitchFamily="34" charset="-122"/>
+                <a:cs typeface="Arial" pitchFamily="34" charset="-120"/>
+              </a:rPr>
+              <a:t>1</a:t>
+            </a:r>
+            <a:endParaRPr lang="en-US" sz="2200" dirty="0"/>
+          </a:p>
+        </p:txBody>
+      </p:sp>
+      <p:sp>
+        <p:nvSpPr>
+          <p:cNvPr id="4" name="Text 2"/>
+          <p:cNvSpPr txBox="1"/>
+          <p:nvPr/>
+        </p:nvSpPr>
+        <p:spPr>
+          <a:xfrm>
+            <a:off x="1207008" y="1874520"/>
+            <a:ext cx="5029200" cy="640080"/>
+          </a:xfrm>
+          <a:prstGeom prst="rect">
+            <a:avLst/>
+          </a:prstGeom>
+          <a:noFill/>
+          <a:ln/>
+        </p:spPr>
+        <p:txBody>
+          <a:bodyPr wrap="square" lIns="0" tIns="0" rIns="0" bIns="0" rtlCol="0" anchor="t"/>
+          <a:lstStyle/>
+          <a:p>
+            <a:pPr indent="0" marL="0">
+              <a:lnSpc>
+                <a:spcPct val="115000"/>
+              </a:lnSpc>
+              <a:buNone/>
+            </a:pPr>
+            <a:r>
+              <a:rPr lang="en-US" sz="1500" dirty="0">
+                <a:solidFill>
+                  <a:srgbClr val="000000"/>
+                </a:solidFill>
+                <a:latin typeface="Arial" pitchFamily="34" charset="0"/>
+                <a:ea typeface="Arial" pitchFamily="34" charset="-122"/>
+                <a:cs typeface="Arial" pitchFamily="34" charset="-120"/>
+              </a:rPr>
+              <a:t>Пройти путь самостоятельно - цифровой и физический</a:t>
+            </a:r>
+            <a:endParaRPr lang="en-US" sz="1500" dirty="0"/>
+          </a:p>
+        </p:txBody>
+      </p:sp>
+      <p:sp>
+        <p:nvSpPr>
+          <p:cNvPr id="5" name="Text 3"/>
+          <p:cNvSpPr txBox="1"/>
+          <p:nvPr/>
+        </p:nvSpPr>
+        <p:spPr>
+          <a:xfrm>
+            <a:off x="640080" y="2587752"/>
+            <a:ext cx="457200" cy="457200"/>
+          </a:xfrm>
+          <a:prstGeom prst="rect">
+            <a:avLst/>
+          </a:prstGeom>
+          <a:noFill/>
+          <a:ln/>
+        </p:spPr>
+        <p:txBody>
+          <a:bodyPr wrap="square" lIns="0" tIns="0" rIns="0" bIns="0" rtlCol="0" anchor="ctr"/>
+          <a:lstStyle/>
+          <a:p>
+            <a:pPr indent="0" marL="0">
+              <a:buNone/>
+            </a:pPr>
+            <a:r>
+              <a:rPr lang="en-US" sz="2200" spc="44" kern="0" dirty="0">
+                <a:solidFill>
+                  <a:srgbClr val="C0C1C0"/>
+                </a:solidFill>
+                <a:latin typeface="Arial" pitchFamily="34" charset="0"/>
+                <a:ea typeface="Arial" pitchFamily="34" charset="-122"/>
+                <a:cs typeface="Arial" pitchFamily="34" charset="-120"/>
+              </a:rPr>
+              <a:t>2</a:t>
+            </a:r>
+            <a:endParaRPr lang="en-US" sz="2200" dirty="0"/>
+          </a:p>
+        </p:txBody>
+      </p:sp>
+      <p:sp>
+        <p:nvSpPr>
+          <p:cNvPr id="6" name="Text 4"/>
+          <p:cNvSpPr txBox="1"/>
+          <p:nvPr/>
+        </p:nvSpPr>
+        <p:spPr>
+          <a:xfrm>
+            <a:off x="1207008" y="2624328"/>
+            <a:ext cx="5029200" cy="640080"/>
+          </a:xfrm>
+          <a:prstGeom prst="rect">
+            <a:avLst/>
+          </a:prstGeom>
+          <a:noFill/>
+          <a:ln/>
+        </p:spPr>
+        <p:txBody>
+          <a:bodyPr wrap="square" lIns="0" tIns="0" rIns="0" bIns="0" rtlCol="0" anchor="t"/>
+          <a:lstStyle/>
+          <a:p>
+            <a:pPr indent="0" marL="0">
+              <a:lnSpc>
+                <a:spcPct val="115000"/>
+              </a:lnSpc>
+              <a:buNone/>
+            </a:pPr>
+            <a:r>
+              <a:rPr lang="en-US" sz="1500" dirty="0">
+                <a:solidFill>
+                  <a:srgbClr val="000000"/>
+                </a:solidFill>
+                <a:latin typeface="Arial" pitchFamily="34" charset="0"/>
+                <a:ea typeface="Arial" pitchFamily="34" charset="-122"/>
+                <a:cs typeface="Arial" pitchFamily="34" charset="-120"/>
+              </a:rPr>
+              <a:t>Профили посетителей и карты пути</a:t>
+            </a:r>
+            <a:endParaRPr lang="en-US" sz="1500" dirty="0"/>
+          </a:p>
+        </p:txBody>
+      </p:sp>
+      <p:sp>
+        <p:nvSpPr>
+          <p:cNvPr id="7" name="Text 5"/>
+          <p:cNvSpPr txBox="1"/>
+          <p:nvPr/>
+        </p:nvSpPr>
+        <p:spPr>
+          <a:xfrm>
+            <a:off x="640080" y="3337560"/>
+            <a:ext cx="457200" cy="457200"/>
+          </a:xfrm>
+          <a:prstGeom prst="rect">
+            <a:avLst/>
+          </a:prstGeom>
+          <a:noFill/>
+          <a:ln/>
+        </p:spPr>
+        <p:txBody>
+          <a:bodyPr wrap="square" lIns="0" tIns="0" rIns="0" bIns="0" rtlCol="0" anchor="ctr"/>
+          <a:lstStyle/>
+          <a:p>
+            <a:pPr indent="0" marL="0">
+              <a:buNone/>
+            </a:pPr>
+            <a:r>
+              <a:rPr lang="en-US" sz="2200" spc="44" kern="0" dirty="0">
+                <a:solidFill>
+                  <a:srgbClr val="C0C1C0"/>
+                </a:solidFill>
+                <a:latin typeface="Arial" pitchFamily="34" charset="0"/>
+                <a:ea typeface="Arial" pitchFamily="34" charset="-122"/>
+                <a:cs typeface="Arial" pitchFamily="34" charset="-120"/>
+              </a:rPr>
+              <a:t>3</a:t>
+            </a:r>
+            <a:endParaRPr lang="en-US" sz="2200" dirty="0"/>
+          </a:p>
+        </p:txBody>
+      </p:sp>
+      <p:sp>
+        <p:nvSpPr>
+          <p:cNvPr id="8" name="Text 6"/>
+          <p:cNvSpPr txBox="1"/>
+          <p:nvPr/>
+        </p:nvSpPr>
+        <p:spPr>
+          <a:xfrm>
+            <a:off x="1207008" y="3374136"/>
+            <a:ext cx="5029200" cy="640080"/>
+          </a:xfrm>
+          <a:prstGeom prst="rect">
+            <a:avLst/>
+          </a:prstGeom>
+          <a:noFill/>
+          <a:ln/>
+        </p:spPr>
+        <p:txBody>
+          <a:bodyPr wrap="square" lIns="0" tIns="0" rIns="0" bIns="0" rtlCol="0" anchor="t"/>
+          <a:lstStyle/>
+          <a:p>
+            <a:pPr indent="0" marL="0">
+              <a:lnSpc>
+                <a:spcPct val="115000"/>
+              </a:lnSpc>
+              <a:buNone/>
+            </a:pPr>
+            <a:r>
+              <a:rPr lang="en-US" sz="1500" dirty="0">
+                <a:solidFill>
+                  <a:srgbClr val="000000"/>
+                </a:solidFill>
+                <a:latin typeface="Arial" pitchFamily="34" charset="0"/>
+                <a:ea typeface="Arial" pitchFamily="34" charset="-122"/>
+                <a:cs typeface="Arial" pitchFamily="34" charset="-120"/>
+              </a:rPr>
+              <a:t>Service Blueprint: кто обеспечивает каждую точку</a:t>
+            </a:r>
+            <a:endParaRPr lang="en-US" sz="1500" dirty="0"/>
+          </a:p>
+        </p:txBody>
+      </p:sp>
+      <p:sp>
+        <p:nvSpPr>
+          <p:cNvPr id="9" name="Text 7"/>
+          <p:cNvSpPr txBox="1"/>
+          <p:nvPr/>
+        </p:nvSpPr>
+        <p:spPr>
+          <a:xfrm>
+            <a:off x="640080" y="4087368"/>
+            <a:ext cx="457200" cy="457200"/>
+          </a:xfrm>
+          <a:prstGeom prst="rect">
+            <a:avLst/>
+          </a:prstGeom>
+          <a:noFill/>
+          <a:ln/>
+        </p:spPr>
+        <p:txBody>
+          <a:bodyPr wrap="square" lIns="0" tIns="0" rIns="0" bIns="0" rtlCol="0" anchor="ctr"/>
+          <a:lstStyle/>
+          <a:p>
+            <a:pPr indent="0" marL="0">
+              <a:buNone/>
+            </a:pPr>
+            <a:r>
+              <a:rPr lang="en-US" sz="2200" spc="44" kern="0" dirty="0">
+                <a:solidFill>
+                  <a:srgbClr val="C0C1C0"/>
+                </a:solidFill>
+                <a:latin typeface="Arial" pitchFamily="34" charset="0"/>
+                <a:ea typeface="Arial" pitchFamily="34" charset="-122"/>
+                <a:cs typeface="Arial" pitchFamily="34" charset="-120"/>
+              </a:rPr>
+              <a:t>4</a:t>
+            </a:r>
+            <a:endParaRPr lang="en-US" sz="2200" dirty="0"/>
+          </a:p>
+        </p:txBody>
+      </p:sp>
+      <p:sp>
+        <p:nvSpPr>
+          <p:cNvPr id="10" name="Text 8"/>
+          <p:cNvSpPr txBox="1"/>
+          <p:nvPr/>
+        </p:nvSpPr>
+        <p:spPr>
+          <a:xfrm>
+            <a:off x="1207008" y="4123944"/>
+            <a:ext cx="5029200" cy="640080"/>
+          </a:xfrm>
+          <a:prstGeom prst="rect">
+            <a:avLst/>
+          </a:prstGeom>
+          <a:noFill/>
+          <a:ln/>
+        </p:spPr>
+        <p:txBody>
+          <a:bodyPr wrap="square" lIns="0" tIns="0" rIns="0" bIns="0" rtlCol="0" anchor="t"/>
+          <a:lstStyle/>
+          <a:p>
+            <a:pPr indent="0" marL="0">
+              <a:lnSpc>
+                <a:spcPct val="115000"/>
+              </a:lnSpc>
+              <a:buNone/>
+            </a:pPr>
+            <a:r>
+              <a:rPr lang="en-US" sz="1500" dirty="0">
+                <a:solidFill>
+                  <a:srgbClr val="000000"/>
+                </a:solidFill>
+                <a:latin typeface="Arial" pitchFamily="34" charset="0"/>
+                <a:ea typeface="Arial" pitchFamily="34" charset="-122"/>
+                <a:cs typeface="Arial" pitchFamily="34" charset="-120"/>
+              </a:rPr>
+              <a:t>Аудит площадки</a:t>
+            </a:r>
+            <a:endParaRPr lang="en-US" sz="1500" dirty="0"/>
+          </a:p>
+        </p:txBody>
+      </p:sp>
+      <p:sp>
+        <p:nvSpPr>
+          <p:cNvPr id="11" name="Text 9"/>
+          <p:cNvSpPr txBox="1"/>
+          <p:nvPr/>
+        </p:nvSpPr>
+        <p:spPr>
+          <a:xfrm>
+            <a:off x="640080" y="4837176"/>
+            <a:ext cx="457200" cy="457200"/>
+          </a:xfrm>
+          <a:prstGeom prst="rect">
+            <a:avLst/>
+          </a:prstGeom>
+          <a:noFill/>
+          <a:ln/>
+        </p:spPr>
+        <p:txBody>
+          <a:bodyPr wrap="square" lIns="0" tIns="0" rIns="0" bIns="0" rtlCol="0" anchor="ctr"/>
+          <a:lstStyle/>
+          <a:p>
+            <a:pPr indent="0" marL="0">
+              <a:buNone/>
+            </a:pPr>
+            <a:r>
+              <a:rPr lang="en-US" sz="2200" spc="44" kern="0" dirty="0">
+                <a:solidFill>
+                  <a:srgbClr val="C0C1C0"/>
+                </a:solidFill>
+                <a:latin typeface="Arial" pitchFamily="34" charset="0"/>
+                <a:ea typeface="Arial" pitchFamily="34" charset="-122"/>
+                <a:cs typeface="Arial" pitchFamily="34" charset="-120"/>
+              </a:rPr>
+              <a:t>5</a:t>
+            </a:r>
+            <a:endParaRPr lang="en-US" sz="2200" dirty="0"/>
+          </a:p>
+        </p:txBody>
+      </p:sp>
+      <p:sp>
+        <p:nvSpPr>
+          <p:cNvPr id="12" name="Text 10"/>
+          <p:cNvSpPr txBox="1"/>
+          <p:nvPr/>
+        </p:nvSpPr>
+        <p:spPr>
+          <a:xfrm>
+            <a:off x="1207008" y="4873752"/>
+            <a:ext cx="5029200" cy="640080"/>
+          </a:xfrm>
+          <a:prstGeom prst="rect">
+            <a:avLst/>
+          </a:prstGeom>
+          <a:noFill/>
+          <a:ln/>
+        </p:spPr>
+        <p:txBody>
+          <a:bodyPr wrap="square" lIns="0" tIns="0" rIns="0" bIns="0" rtlCol="0" anchor="t"/>
+          <a:lstStyle/>
+          <a:p>
+            <a:pPr indent="0" marL="0">
+              <a:lnSpc>
+                <a:spcPct val="115000"/>
+              </a:lnSpc>
+              <a:buNone/>
+            </a:pPr>
+            <a:r>
+              <a:rPr lang="en-US" sz="1500" dirty="0">
+                <a:solidFill>
+                  <a:srgbClr val="000000"/>
+                </a:solidFill>
+                <a:latin typeface="Arial" pitchFamily="34" charset="0"/>
+                <a:ea typeface="Arial" pitchFamily="34" charset="-122"/>
+                <a:cs typeface="Arial" pitchFamily="34" charset="-120"/>
+              </a:rPr>
+              <a:t>Интервью: фронт-линия и посетители</a:t>
+            </a:r>
+            <a:endParaRPr lang="en-US" sz="1500" dirty="0"/>
           </a:p>
         </p:txBody>
       </p:sp>
       <p:pic>
         <p:nvPicPr>
-          <p:cNvPr id="3" name="Image 0" descr="/home/user/ges-2/docs/strategy/deck-images/svody.jpg">    </p:cNvPr>
+          <p:cNvPr id="13" name="Image 0" descr="/home/user/ges-2/docs/strategy/deck-images/flow.jpg">    </p:cNvPr>
           <p:cNvPicPr>
             <a:picLocks noChangeAspect="1"/>
           </p:cNvPicPr>
@@ -5013,13 +4585,14 @@
         </p:nvPicPr>
         <p:blipFill>
           <a:blip r:embed="rId1"/>
-          <a:srcRect l="0" r="0" t="0" b="0"/>
-          <a:stretch/>
+          <a:stretch>
+            <a:fillRect/>
+          </a:stretch>
         </p:blipFill>
         <p:spPr>
           <a:xfrm>
-            <a:off x="640080" y="1691640"/>
-            <a:ext cx="4754880" cy="4114800"/>
+            <a:off x="6903720" y="2194560"/>
+            <a:ext cx="4645152" cy="3096768"/>
           </a:xfrm>
           <a:prstGeom prst="rect">
             <a:avLst/>
@@ -5028,14 +4601,14 @@
       </p:pic>
       <p:sp>
         <p:nvSpPr>
-          <p:cNvPr id="4" name="Shape 1"/>
+          <p:cNvPr id="14" name="Shape 11"/>
           <p:cNvSpPr/>
           <p:nvPr/>
         </p:nvSpPr>
         <p:spPr>
           <a:xfrm>
-            <a:off x="640080" y="1691640"/>
-            <a:ext cx="4754880" cy="4114800"/>
+            <a:off x="6903720" y="2194560"/>
+            <a:ext cx="4645152" cy="3096768"/>
           </a:xfrm>
           <a:prstGeom prst="rect">
             <a:avLst/>
@@ -5047,148 +4620,6 @@
             <a:prstDash val="solid"/>
           </a:ln>
         </p:spPr>
-      </p:sp>
-      <p:sp>
-        <p:nvSpPr>
-          <p:cNvPr id="5" name="Text 2"/>
-          <p:cNvSpPr txBox="1"/>
-          <p:nvPr/>
-        </p:nvSpPr>
-        <p:spPr>
-          <a:xfrm>
-            <a:off x="5897880" y="1783080"/>
-            <a:ext cx="5650992" cy="3931920"/>
-          </a:xfrm>
-          <a:prstGeom prst="rect">
-            <a:avLst/>
-          </a:prstGeom>
-          <a:noFill/>
-          <a:ln/>
-        </p:spPr>
-        <p:txBody>
-          <a:bodyPr wrap="square" lIns="0" tIns="0" rIns="0" bIns="0" rtlCol="0" anchor="ctr"/>
-          <a:lstStyle/>
-          <a:p>
-            <a:pPr marL="342900" indent="-342900">
-              <a:lnSpc>
-                <a:spcPct val="115000"/>
-              </a:lnSpc>
-              <a:spcAft>
-                <a:spcPts val="1000"/>
-              </a:spcAft>
-              <a:buSzPct val="100000"/>
-              <a:buChar char="•"/>
-            </a:pPr>
-            <a:r>
-              <a:rPr lang="en-US" sz="1500" dirty="0">
-                <a:solidFill>
-                  <a:srgbClr val="000000"/>
-                </a:solidFill>
-                <a:latin typeface="Arial" pitchFamily="34" charset="0"/>
-                <a:ea typeface="Arial" pitchFamily="34" charset="-122"/>
-                <a:cs typeface="Arial" pitchFamily="34" charset="-120"/>
-              </a:rPr>
-              <a:t>Регулярные совместные совещания с продюсерским и коммерческим блоками</a:t>
-            </a:r>
-            <a:endParaRPr lang="en-US" sz="1500" dirty="0"/>
-          </a:p>
-          <a:p>
-            <a:pPr marL="342900" indent="-342900">
-              <a:lnSpc>
-                <a:spcPct val="115000"/>
-              </a:lnSpc>
-              <a:spcAft>
-                <a:spcPts val="1000"/>
-              </a:spcAft>
-              <a:buSzPct val="100000"/>
-              <a:buChar char="•"/>
-            </a:pPr>
-            <a:r>
-              <a:rPr lang="en-US" sz="1500" dirty="0">
-                <a:solidFill>
-                  <a:srgbClr val="000000"/>
-                </a:solidFill>
-                <a:latin typeface="Arial" pitchFamily="34" charset="0"/>
-                <a:ea typeface="Arial" pitchFamily="34" charset="-122"/>
-                <a:cs typeface="Arial" pitchFamily="34" charset="-120"/>
-              </a:rPr>
-              <a:t>Ротация сотрудников бэк-офиса в зал</a:t>
-            </a:r>
-            <a:endParaRPr lang="en-US" sz="1500" dirty="0"/>
-          </a:p>
-          <a:p>
-            <a:pPr marL="342900" indent="-342900">
-              <a:lnSpc>
-                <a:spcPct val="115000"/>
-              </a:lnSpc>
-              <a:spcAft>
-                <a:spcPts val="1000"/>
-              </a:spcAft>
-              <a:buSzPct val="100000"/>
-              <a:buChar char="•"/>
-            </a:pPr>
-            <a:r>
-              <a:rPr lang="en-US" sz="1500" dirty="0">
-                <a:solidFill>
-                  <a:srgbClr val="000000"/>
-                </a:solidFill>
-                <a:latin typeface="Arial" pitchFamily="34" charset="0"/>
-                <a:ea typeface="Arial" pitchFamily="34" charset="-122"/>
-                <a:cs typeface="Arial" pitchFamily="34" charset="-120"/>
-              </a:rPr>
-              <a:t>Премиальный фонд для смежных подразделений в коммерческих проектах</a:t>
-            </a:r>
-            <a:endParaRPr lang="en-US" sz="1500" dirty="0"/>
-          </a:p>
-          <a:p>
-            <a:pPr marL="342900" indent="-342900">
-              <a:lnSpc>
-                <a:spcPct val="115000"/>
-              </a:lnSpc>
-              <a:spcAft>
-                <a:spcPts val="1000"/>
-              </a:spcAft>
-              <a:buSzPct val="100000"/>
-              <a:buChar char="•"/>
-            </a:pPr>
-            <a:r>
-              <a:rPr lang="en-US" sz="1500" dirty="0">
-                <a:solidFill>
-                  <a:srgbClr val="000000"/>
-                </a:solidFill>
-                <a:latin typeface="Arial" pitchFamily="34" charset="0"/>
-                <a:ea typeface="Arial" pitchFamily="34" charset="-122"/>
-                <a:cs typeface="Arial" pitchFamily="34" charset="-120"/>
-              </a:rPr>
-              <a:t>Внутренняя мотивация и делегирование ответственности</a:t>
-            </a:r>
-            <a:endParaRPr lang="en-US" sz="1500" dirty="0"/>
-          </a:p>
-          <a:p>
-            <a:pPr marL="342900" indent="-342900">
-              <a:lnSpc>
-                <a:spcPct val="115000"/>
-              </a:lnSpc>
-              <a:spcAft>
-                <a:spcPts val="1000"/>
-              </a:spcAft>
-              <a:buSzPct val="100000"/>
-              <a:buChar char="•"/>
-            </a:pPr>
-            <a:r>
-              <a:rPr lang="en-US" sz="1500" dirty="0">
-                <a:solidFill>
-                  <a:srgbClr val="000000"/>
-                </a:solidFill>
-                <a:latin typeface="Arial" pitchFamily="34" charset="0"/>
-                <a:ea typeface="Arial" pitchFamily="34" charset="-122"/>
-                <a:cs typeface="Arial" pitchFamily="34" charset="-120"/>
-              </a:rPr>
-              <a:t>Рабочая коммуникация в каналах, где люди действительно есть</a:t>
-            </a:r>
-            <a:endParaRPr lang="en-US" sz="1500" dirty="0"/>
-          </a:p>
-        </p:txBody>
       </p:sp>
     </p:spTree>
   </p:cSld>
@@ -5248,520 +4679,6 @@
                 <a:ea typeface="Arial" pitchFamily="34" charset="-122"/>
                 <a:cs typeface="Arial" pitchFamily="34" charset="-120"/>
               </a:rPr>
-              <a:t>Диагностика</a:t>
-            </a:r>
-            <a:endParaRPr lang="en-US" sz="3000" dirty="0"/>
-          </a:p>
-        </p:txBody>
-      </p:sp>
-      <p:sp>
-        <p:nvSpPr>
-          <p:cNvPr id="3" name="Text 1"/>
-          <p:cNvSpPr txBox="1"/>
-          <p:nvPr/>
-        </p:nvSpPr>
-        <p:spPr>
-          <a:xfrm>
-            <a:off x="640080" y="1746504"/>
-            <a:ext cx="457200" cy="457200"/>
-          </a:xfrm>
-          <a:prstGeom prst="rect">
-            <a:avLst/>
-          </a:prstGeom>
-          <a:noFill/>
-          <a:ln/>
-        </p:spPr>
-        <p:txBody>
-          <a:bodyPr wrap="square" lIns="0" tIns="0" rIns="0" bIns="0" rtlCol="0" anchor="ctr"/>
-          <a:lstStyle/>
-          <a:p>
-            <a:pPr indent="0" marL="0">
-              <a:buNone/>
-            </a:pPr>
-            <a:r>
-              <a:rPr lang="en-US" sz="2200" spc="44" kern="0" dirty="0">
-                <a:solidFill>
-                  <a:srgbClr val="C0C1C0"/>
-                </a:solidFill>
-                <a:latin typeface="Arial" pitchFamily="34" charset="0"/>
-                <a:ea typeface="Arial" pitchFamily="34" charset="-122"/>
-                <a:cs typeface="Arial" pitchFamily="34" charset="-120"/>
-              </a:rPr>
-              <a:t>1</a:t>
-            </a:r>
-            <a:endParaRPr lang="en-US" sz="2200" dirty="0"/>
-          </a:p>
-        </p:txBody>
-      </p:sp>
-      <p:sp>
-        <p:nvSpPr>
-          <p:cNvPr id="4" name="Text 2"/>
-          <p:cNvSpPr txBox="1"/>
-          <p:nvPr/>
-        </p:nvSpPr>
-        <p:spPr>
-          <a:xfrm>
-            <a:off x="1207008" y="1783080"/>
-            <a:ext cx="5074920" cy="640080"/>
-          </a:xfrm>
-          <a:prstGeom prst="rect">
-            <a:avLst/>
-          </a:prstGeom>
-          <a:noFill/>
-          <a:ln/>
-        </p:spPr>
-        <p:txBody>
-          <a:bodyPr wrap="square" lIns="0" tIns="0" rIns="0" bIns="0" rtlCol="0" anchor="t"/>
-          <a:lstStyle/>
-          <a:p>
-            <a:pPr indent="0" marL="0">
-              <a:lnSpc>
-                <a:spcPct val="115000"/>
-              </a:lnSpc>
-              <a:buNone/>
-            </a:pPr>
-            <a:r>
-              <a:rPr lang="en-US" sz="1500" dirty="0">
-                <a:solidFill>
-                  <a:srgbClr val="000000"/>
-                </a:solidFill>
-                <a:latin typeface="Arial" pitchFamily="34" charset="0"/>
-                <a:ea typeface="Arial" pitchFamily="34" charset="-122"/>
-                <a:cs typeface="Arial" pitchFamily="34" charset="-120"/>
-              </a:rPr>
-              <a:t>Пройти путь самостоятельно — цифровой и физический</a:t>
-            </a:r>
-            <a:endParaRPr lang="en-US" sz="1500" dirty="0"/>
-          </a:p>
-        </p:txBody>
-      </p:sp>
-      <p:sp>
-        <p:nvSpPr>
-          <p:cNvPr id="5" name="Text 3"/>
-          <p:cNvSpPr txBox="1"/>
-          <p:nvPr/>
-        </p:nvSpPr>
-        <p:spPr>
-          <a:xfrm>
-            <a:off x="640080" y="2532888"/>
-            <a:ext cx="457200" cy="457200"/>
-          </a:xfrm>
-          <a:prstGeom prst="rect">
-            <a:avLst/>
-          </a:prstGeom>
-          <a:noFill/>
-          <a:ln/>
-        </p:spPr>
-        <p:txBody>
-          <a:bodyPr wrap="square" lIns="0" tIns="0" rIns="0" bIns="0" rtlCol="0" anchor="ctr"/>
-          <a:lstStyle/>
-          <a:p>
-            <a:pPr indent="0" marL="0">
-              <a:buNone/>
-            </a:pPr>
-            <a:r>
-              <a:rPr lang="en-US" sz="2200" spc="44" kern="0" dirty="0">
-                <a:solidFill>
-                  <a:srgbClr val="C0C1C0"/>
-                </a:solidFill>
-                <a:latin typeface="Arial" pitchFamily="34" charset="0"/>
-                <a:ea typeface="Arial" pitchFamily="34" charset="-122"/>
-                <a:cs typeface="Arial" pitchFamily="34" charset="-120"/>
-              </a:rPr>
-              <a:t>2</a:t>
-            </a:r>
-            <a:endParaRPr lang="en-US" sz="2200" dirty="0"/>
-          </a:p>
-        </p:txBody>
-      </p:sp>
-      <p:sp>
-        <p:nvSpPr>
-          <p:cNvPr id="6" name="Text 4"/>
-          <p:cNvSpPr txBox="1"/>
-          <p:nvPr/>
-        </p:nvSpPr>
-        <p:spPr>
-          <a:xfrm>
-            <a:off x="1207008" y="2569464"/>
-            <a:ext cx="5074920" cy="640080"/>
-          </a:xfrm>
-          <a:prstGeom prst="rect">
-            <a:avLst/>
-          </a:prstGeom>
-          <a:noFill/>
-          <a:ln/>
-        </p:spPr>
-        <p:txBody>
-          <a:bodyPr wrap="square" lIns="0" tIns="0" rIns="0" bIns="0" rtlCol="0" anchor="t"/>
-          <a:lstStyle/>
-          <a:p>
-            <a:pPr indent="0" marL="0">
-              <a:lnSpc>
-                <a:spcPct val="115000"/>
-              </a:lnSpc>
-              <a:buNone/>
-            </a:pPr>
-            <a:r>
-              <a:rPr lang="en-US" sz="1500" dirty="0">
-                <a:solidFill>
-                  <a:srgbClr val="000000"/>
-                </a:solidFill>
-                <a:latin typeface="Arial" pitchFamily="34" charset="0"/>
-                <a:ea typeface="Arial" pitchFamily="34" charset="-122"/>
-                <a:cs typeface="Arial" pitchFamily="34" charset="-120"/>
-              </a:rPr>
-              <a:t>Профили посетителей и карты пути</a:t>
-            </a:r>
-            <a:endParaRPr lang="en-US" sz="1500" dirty="0"/>
-          </a:p>
-        </p:txBody>
-      </p:sp>
-      <p:sp>
-        <p:nvSpPr>
-          <p:cNvPr id="7" name="Text 5"/>
-          <p:cNvSpPr txBox="1"/>
-          <p:nvPr/>
-        </p:nvSpPr>
-        <p:spPr>
-          <a:xfrm>
-            <a:off x="640080" y="3319272"/>
-            <a:ext cx="457200" cy="457200"/>
-          </a:xfrm>
-          <a:prstGeom prst="rect">
-            <a:avLst/>
-          </a:prstGeom>
-          <a:noFill/>
-          <a:ln/>
-        </p:spPr>
-        <p:txBody>
-          <a:bodyPr wrap="square" lIns="0" tIns="0" rIns="0" bIns="0" rtlCol="0" anchor="ctr"/>
-          <a:lstStyle/>
-          <a:p>
-            <a:pPr indent="0" marL="0">
-              <a:buNone/>
-            </a:pPr>
-            <a:r>
-              <a:rPr lang="en-US" sz="2200" spc="44" kern="0" dirty="0">
-                <a:solidFill>
-                  <a:srgbClr val="C0C1C0"/>
-                </a:solidFill>
-                <a:latin typeface="Arial" pitchFamily="34" charset="0"/>
-                <a:ea typeface="Arial" pitchFamily="34" charset="-122"/>
-                <a:cs typeface="Arial" pitchFamily="34" charset="-120"/>
-              </a:rPr>
-              <a:t>3</a:t>
-            </a:r>
-            <a:endParaRPr lang="en-US" sz="2200" dirty="0"/>
-          </a:p>
-        </p:txBody>
-      </p:sp>
-      <p:sp>
-        <p:nvSpPr>
-          <p:cNvPr id="8" name="Text 6"/>
-          <p:cNvSpPr txBox="1"/>
-          <p:nvPr/>
-        </p:nvSpPr>
-        <p:spPr>
-          <a:xfrm>
-            <a:off x="1207008" y="3355848"/>
-            <a:ext cx="5074920" cy="640080"/>
-          </a:xfrm>
-          <a:prstGeom prst="rect">
-            <a:avLst/>
-          </a:prstGeom>
-          <a:noFill/>
-          <a:ln/>
-        </p:spPr>
-        <p:txBody>
-          <a:bodyPr wrap="square" lIns="0" tIns="0" rIns="0" bIns="0" rtlCol="0" anchor="t"/>
-          <a:lstStyle/>
-          <a:p>
-            <a:pPr indent="0" marL="0">
-              <a:lnSpc>
-                <a:spcPct val="115000"/>
-              </a:lnSpc>
-              <a:buNone/>
-            </a:pPr>
-            <a:r>
-              <a:rPr lang="en-US" sz="1500" dirty="0">
-                <a:solidFill>
-                  <a:srgbClr val="000000"/>
-                </a:solidFill>
-                <a:latin typeface="Arial" pitchFamily="34" charset="0"/>
-                <a:ea typeface="Arial" pitchFamily="34" charset="-122"/>
-                <a:cs typeface="Arial" pitchFamily="34" charset="-120"/>
-              </a:rPr>
-              <a:t>Service Blueprint: кто обеспечивает каждую точку</a:t>
-            </a:r>
-            <a:endParaRPr lang="en-US" sz="1500" dirty="0"/>
-          </a:p>
-        </p:txBody>
-      </p:sp>
-      <p:sp>
-        <p:nvSpPr>
-          <p:cNvPr id="9" name="Text 7"/>
-          <p:cNvSpPr txBox="1"/>
-          <p:nvPr/>
-        </p:nvSpPr>
-        <p:spPr>
-          <a:xfrm>
-            <a:off x="640080" y="4105656"/>
-            <a:ext cx="457200" cy="457200"/>
-          </a:xfrm>
-          <a:prstGeom prst="rect">
-            <a:avLst/>
-          </a:prstGeom>
-          <a:noFill/>
-          <a:ln/>
-        </p:spPr>
-        <p:txBody>
-          <a:bodyPr wrap="square" lIns="0" tIns="0" rIns="0" bIns="0" rtlCol="0" anchor="ctr"/>
-          <a:lstStyle/>
-          <a:p>
-            <a:pPr indent="0" marL="0">
-              <a:buNone/>
-            </a:pPr>
-            <a:r>
-              <a:rPr lang="en-US" sz="2200" spc="44" kern="0" dirty="0">
-                <a:solidFill>
-                  <a:srgbClr val="C0C1C0"/>
-                </a:solidFill>
-                <a:latin typeface="Arial" pitchFamily="34" charset="0"/>
-                <a:ea typeface="Arial" pitchFamily="34" charset="-122"/>
-                <a:cs typeface="Arial" pitchFamily="34" charset="-120"/>
-              </a:rPr>
-              <a:t>4</a:t>
-            </a:r>
-            <a:endParaRPr lang="en-US" sz="2200" dirty="0"/>
-          </a:p>
-        </p:txBody>
-      </p:sp>
-      <p:sp>
-        <p:nvSpPr>
-          <p:cNvPr id="10" name="Text 8"/>
-          <p:cNvSpPr txBox="1"/>
-          <p:nvPr/>
-        </p:nvSpPr>
-        <p:spPr>
-          <a:xfrm>
-            <a:off x="1207008" y="4142232"/>
-            <a:ext cx="5074920" cy="640080"/>
-          </a:xfrm>
-          <a:prstGeom prst="rect">
-            <a:avLst/>
-          </a:prstGeom>
-          <a:noFill/>
-          <a:ln/>
-        </p:spPr>
-        <p:txBody>
-          <a:bodyPr wrap="square" lIns="0" tIns="0" rIns="0" bIns="0" rtlCol="0" anchor="t"/>
-          <a:lstStyle/>
-          <a:p>
-            <a:pPr indent="0" marL="0">
-              <a:lnSpc>
-                <a:spcPct val="115000"/>
-              </a:lnSpc>
-              <a:buNone/>
-            </a:pPr>
-            <a:r>
-              <a:rPr lang="en-US" sz="1500" dirty="0">
-                <a:solidFill>
-                  <a:srgbClr val="000000"/>
-                </a:solidFill>
-                <a:latin typeface="Arial" pitchFamily="34" charset="0"/>
-                <a:ea typeface="Arial" pitchFamily="34" charset="-122"/>
-                <a:cs typeface="Arial" pitchFamily="34" charset="-120"/>
-              </a:rPr>
-              <a:t>Аудит площадки</a:t>
-            </a:r>
-            <a:endParaRPr lang="en-US" sz="1500" dirty="0"/>
-          </a:p>
-        </p:txBody>
-      </p:sp>
-      <p:sp>
-        <p:nvSpPr>
-          <p:cNvPr id="11" name="Text 9"/>
-          <p:cNvSpPr txBox="1"/>
-          <p:nvPr/>
-        </p:nvSpPr>
-        <p:spPr>
-          <a:xfrm>
-            <a:off x="640080" y="4892040"/>
-            <a:ext cx="457200" cy="457200"/>
-          </a:xfrm>
-          <a:prstGeom prst="rect">
-            <a:avLst/>
-          </a:prstGeom>
-          <a:noFill/>
-          <a:ln/>
-        </p:spPr>
-        <p:txBody>
-          <a:bodyPr wrap="square" lIns="0" tIns="0" rIns="0" bIns="0" rtlCol="0" anchor="ctr"/>
-          <a:lstStyle/>
-          <a:p>
-            <a:pPr indent="0" marL="0">
-              <a:buNone/>
-            </a:pPr>
-            <a:r>
-              <a:rPr lang="en-US" sz="2200" spc="44" kern="0" dirty="0">
-                <a:solidFill>
-                  <a:srgbClr val="C0C1C0"/>
-                </a:solidFill>
-                <a:latin typeface="Arial" pitchFamily="34" charset="0"/>
-                <a:ea typeface="Arial" pitchFamily="34" charset="-122"/>
-                <a:cs typeface="Arial" pitchFamily="34" charset="-120"/>
-              </a:rPr>
-              <a:t>5</a:t>
-            </a:r>
-            <a:endParaRPr lang="en-US" sz="2200" dirty="0"/>
-          </a:p>
-        </p:txBody>
-      </p:sp>
-      <p:sp>
-        <p:nvSpPr>
-          <p:cNvPr id="12" name="Text 10"/>
-          <p:cNvSpPr txBox="1"/>
-          <p:nvPr/>
-        </p:nvSpPr>
-        <p:spPr>
-          <a:xfrm>
-            <a:off x="1207008" y="4928616"/>
-            <a:ext cx="5074920" cy="640080"/>
-          </a:xfrm>
-          <a:prstGeom prst="rect">
-            <a:avLst/>
-          </a:prstGeom>
-          <a:noFill/>
-          <a:ln/>
-        </p:spPr>
-        <p:txBody>
-          <a:bodyPr wrap="square" lIns="0" tIns="0" rIns="0" bIns="0" rtlCol="0" anchor="t"/>
-          <a:lstStyle/>
-          <a:p>
-            <a:pPr indent="0" marL="0">
-              <a:lnSpc>
-                <a:spcPct val="115000"/>
-              </a:lnSpc>
-              <a:buNone/>
-            </a:pPr>
-            <a:r>
-              <a:rPr lang="en-US" sz="1500" dirty="0">
-                <a:solidFill>
-                  <a:srgbClr val="000000"/>
-                </a:solidFill>
-                <a:latin typeface="Arial" pitchFamily="34" charset="0"/>
-                <a:ea typeface="Arial" pitchFamily="34" charset="-122"/>
-                <a:cs typeface="Arial" pitchFamily="34" charset="-120"/>
-              </a:rPr>
-              <a:t>Интервью: фронт-линия и посетители</a:t>
-            </a:r>
-            <a:endParaRPr lang="en-US" sz="1500" dirty="0"/>
-          </a:p>
-        </p:txBody>
-      </p:sp>
-      <p:pic>
-        <p:nvPicPr>
-          <p:cNvPr id="13" name="Image 0" descr="/home/user/ges-2/docs/strategy/deck-images/flow.jpg">    </p:cNvPr>
-          <p:cNvPicPr>
-            <a:picLocks noChangeAspect="1"/>
-          </p:cNvPicPr>
-          <p:nvPr/>
-        </p:nvPicPr>
-        <p:blipFill>
-          <a:blip r:embed="rId1"/>
-          <a:srcRect l="0" r="0" t="0" b="0"/>
-          <a:stretch/>
-        </p:blipFill>
-        <p:spPr>
-          <a:xfrm>
-            <a:off x="6903720" y="1691640"/>
-            <a:ext cx="4645152" cy="4114800"/>
-          </a:xfrm>
-          <a:prstGeom prst="rect">
-            <a:avLst/>
-          </a:prstGeom>
-        </p:spPr>
-      </p:pic>
-      <p:sp>
-        <p:nvSpPr>
-          <p:cNvPr id="14" name="Shape 11"/>
-          <p:cNvSpPr/>
-          <p:nvPr/>
-        </p:nvSpPr>
-        <p:spPr>
-          <a:xfrm>
-            <a:off x="6903720" y="1691640"/>
-            <a:ext cx="4645152" cy="4114800"/>
-          </a:xfrm>
-          <a:prstGeom prst="rect">
-            <a:avLst/>
-          </a:prstGeom>
-          <a:ln w="6350">
-            <a:solidFill>
-              <a:srgbClr val="000000"/>
-            </a:solidFill>
-            <a:prstDash val="solid"/>
-          </a:ln>
-        </p:spPr>
-      </p:sp>
-    </p:spTree>
-  </p:cSld>
-  <p:clrMapOvr>
-    <a:masterClrMapping/>
-  </p:clrMapOvr>
-</p:sld>
-</file>
-
-<file path=ppt/slides/slide7.xml><?xml version="1.0" encoding="utf-8"?>
-<p:sld xmlns:a="http://schemas.openxmlformats.org/drawingml/2006/main" xmlns:r="http://schemas.openxmlformats.org/officeDocument/2006/relationships" xmlns:p="http://schemas.openxmlformats.org/presentationml/2006/main">
-  <p:cSld name="Slide 7">
-    <p:spTree>
-      <p:nvGrpSpPr>
-        <p:cNvPr id="1" name=""/>
-        <p:cNvGrpSpPr/>
-        <p:nvPr/>
-      </p:nvGrpSpPr>
-      <p:grpSpPr>
-        <a:xfrm>
-          <a:off x="0" y="0"/>
-          <a:ext cx="0" cy="0"/>
-          <a:chOff x="0" y="0"/>
-          <a:chExt cx="0" cy="0"/>
-        </a:xfrm>
-      </p:grpSpPr>
-      <p:sp>
-        <p:nvSpPr>
-          <p:cNvPr id="2" name="Text 0"/>
-          <p:cNvSpPr txBox="1"/>
-          <p:nvPr/>
-        </p:nvSpPr>
-        <p:spPr>
-          <a:xfrm>
-            <a:off x="640080" y="457200"/>
-            <a:ext cx="10911535" cy="731520"/>
-          </a:xfrm>
-          <a:prstGeom prst="rect">
-            <a:avLst/>
-          </a:prstGeom>
-          <a:noFill/>
-          <a:ln/>
-        </p:spPr>
-        <p:txBody>
-          <a:bodyPr wrap="square" lIns="0" tIns="0" rIns="0" bIns="0" rtlCol="0" anchor="t"/>
-          <a:lstStyle/>
-          <a:p>
-            <a:pPr algn="l" indent="0" marL="0">
-              <a:buNone/>
-            </a:pPr>
-            <a:r>
-              <a:rPr lang="en-US" sz="3000" spc="60" kern="0" dirty="0">
-                <a:solidFill>
-                  <a:srgbClr val="000000"/>
-                </a:solidFill>
-                <a:latin typeface="Arial" pitchFamily="34" charset="0"/>
-                <a:ea typeface="Arial" pitchFamily="34" charset="-122"/>
-                <a:cs typeface="Arial" pitchFamily="34" charset="-120"/>
-              </a:rPr>
               <a:t>Обратная связь и метрики</a:t>
             </a:r>
             <a:endParaRPr lang="en-US" sz="3000" dirty="0"/>
@@ -5770,7 +4687,7 @@
       </p:sp>
       <p:graphicFrame>
         <p:nvGraphicFramePr>
-          <p:cNvPr id="8" name="Table 0"/>
+          <p:cNvPr id="7" name="Table 0"/>
           <p:cNvGraphicFramePr>
             <a:graphicFrameLocks noGrp="1"/>
           </p:cNvGraphicFramePr>
@@ -5783,19 +4700,19 @@
           </p:nvPr>
         </p:nvGraphicFramePr>
         <p:xfrm>
-          <a:off x="640080" y="1691640"/>
-          <a:ext cx="7863840" cy="914400"/>
+          <a:off x="640080" y="1783080"/>
+          <a:ext cx="10911535" cy="914400"/>
         </p:xfrm>
         <a:graphic>
           <a:graphicData uri="http://schemas.openxmlformats.org/drawingml/2006/table">
             <a:tbl>
               <a:tblPr/>
               <a:tblGrid>
-                <a:gridCol w="3657600"/>
-                <a:gridCol w="2468880"/>
-                <a:gridCol w="1737360"/>
+                <a:gridCol w="4754880"/>
+                <a:gridCol w="3200400"/>
+                <a:gridCol w="2956255"/>
               </a:tblGrid>
-              <a:tr h="384048">
+              <a:tr h="420624">
                 <a:tc>
                   <a:txBody>
                     <a:bodyPr/>
@@ -5805,7 +4722,7 @@
                         <a:buNone/>
                       </a:pPr>
                       <a:r>
-                        <a:rPr lang="en-US" sz="1300" b="1" dirty="0">
+                        <a:rPr lang="en-US" sz="1400" b="1" dirty="0">
                           <a:solidFill>
                             <a:srgbClr val="000000"/>
                           </a:solidFill>
@@ -5815,7 +4732,7 @@
                         </a:rPr>
                         <a:t>Что меряем</a:t>
                       </a:r>
-                      <a:endParaRPr lang="en-US" sz="1300" dirty="0">
+                      <a:endParaRPr lang="en-US" sz="1400" dirty="0">
                         <a:latin typeface="Arial" charset="0"/>
                         <a:ea typeface="Arial" charset="0"/>
                         <a:cs typeface="Arial" charset="0"/>
@@ -5852,7 +4769,7 @@
                         <a:buNone/>
                       </a:pPr>
                       <a:r>
-                        <a:rPr lang="en-US" sz="1300" b="1" dirty="0">
+                        <a:rPr lang="en-US" sz="1400" b="1" dirty="0">
                           <a:solidFill>
                             <a:srgbClr val="000000"/>
                           </a:solidFill>
@@ -5862,7 +4779,7 @@
                         </a:rPr>
                         <a:t>Чем</a:t>
                       </a:r>
-                      <a:endParaRPr lang="en-US" sz="1300" dirty="0">
+                      <a:endParaRPr lang="en-US" sz="1400" dirty="0">
                         <a:latin typeface="Arial" charset="0"/>
                         <a:ea typeface="Arial" charset="0"/>
                         <a:cs typeface="Arial" charset="0"/>
@@ -5899,7 +4816,7 @@
                         <a:buNone/>
                       </a:pPr>
                       <a:r>
-                        <a:rPr lang="en-US" sz="1300" b="1" dirty="0">
+                        <a:rPr lang="en-US" sz="1400" b="1" dirty="0">
                           <a:solidFill>
                             <a:srgbClr val="000000"/>
                           </a:solidFill>
@@ -5909,7 +4826,7 @@
                         </a:rPr>
                         <a:t>Как часто</a:t>
                       </a:r>
-                      <a:endParaRPr lang="en-US" sz="1300" dirty="0">
+                      <a:endParaRPr lang="en-US" sz="1400" dirty="0">
                         <a:latin typeface="Arial" charset="0"/>
                         <a:ea typeface="Arial" charset="0"/>
                         <a:cs typeface="Arial" charset="0"/>
@@ -5938,7 +4855,7 @@
                   </a:tcPr>
                 </a:tc>
               </a:tr>
-              <a:tr h="384048">
+              <a:tr h="420624">
                 <a:tc>
                   <a:txBody>
                     <a:bodyPr/>
@@ -5948,7 +4865,7 @@
                         <a:buNone/>
                       </a:pPr>
                       <a:r>
-                        <a:rPr lang="en-US" sz="1300" dirty="0">
+                        <a:rPr lang="en-US" sz="1400" dirty="0">
                           <a:solidFill>
                             <a:srgbClr val="000000"/>
                           </a:solidFill>
@@ -5958,7 +4875,7 @@
                         </a:rPr>
                         <a:t>Удовлетворённость</a:t>
                       </a:r>
-                      <a:endParaRPr lang="en-US" sz="1300" dirty="0">
+                      <a:endParaRPr lang="en-US" sz="1400" dirty="0">
                         <a:latin typeface="Arial" charset="0"/>
                         <a:ea typeface="Arial" charset="0"/>
                         <a:cs typeface="Arial" charset="0"/>
@@ -5995,7 +4912,7 @@
                         <a:buNone/>
                       </a:pPr>
                       <a:r>
-                        <a:rPr lang="en-US" sz="1300" dirty="0">
+                        <a:rPr lang="en-US" sz="1400" dirty="0">
                           <a:solidFill>
                             <a:srgbClr val="000000"/>
                           </a:solidFill>
@@ -6005,7 +4922,7 @@
                         </a:rPr>
                         <a:t>CSI / CSAT</a:t>
                       </a:r>
-                      <a:endParaRPr lang="en-US" sz="1300" dirty="0">
+                      <a:endParaRPr lang="en-US" sz="1400" dirty="0">
                         <a:latin typeface="Arial" charset="0"/>
                         <a:ea typeface="Arial" charset="0"/>
                         <a:cs typeface="Arial" charset="0"/>
@@ -6042,7 +4959,7 @@
                         <a:buNone/>
                       </a:pPr>
                       <a:r>
-                        <a:rPr lang="en-US" sz="1300" dirty="0">
+                        <a:rPr lang="en-US" sz="1400" dirty="0">
                           <a:solidFill>
                             <a:srgbClr val="9CA3AF"/>
                           </a:solidFill>
@@ -6052,7 +4969,7 @@
                         </a:rPr>
                         <a:t>непрерывно</a:t>
                       </a:r>
-                      <a:endParaRPr lang="en-US" sz="1300" dirty="0">
+                      <a:endParaRPr lang="en-US" sz="1400" dirty="0">
                         <a:latin typeface="Arial" charset="0"/>
                         <a:ea typeface="Arial" charset="0"/>
                         <a:cs typeface="Arial" charset="0"/>
@@ -6081,7 +4998,7 @@
                   </a:tcPr>
                 </a:tc>
               </a:tr>
-              <a:tr h="384048">
+              <a:tr h="420624">
                 <a:tc>
                   <a:txBody>
                     <a:bodyPr/>
@@ -6091,7 +5008,7 @@
                         <a:buNone/>
                       </a:pPr>
                       <a:r>
-                        <a:rPr lang="en-US" sz="1300" dirty="0">
+                        <a:rPr lang="en-US" sz="1400" dirty="0">
                           <a:solidFill>
                             <a:srgbClr val="000000"/>
                           </a:solidFill>
@@ -6101,7 +5018,7 @@
                         </a:rPr>
                         <a:t>Лёгкость взаимодействия</a:t>
                       </a:r>
-                      <a:endParaRPr lang="en-US" sz="1300" dirty="0">
+                      <a:endParaRPr lang="en-US" sz="1400" dirty="0">
                         <a:latin typeface="Arial" charset="0"/>
                         <a:ea typeface="Arial" charset="0"/>
                         <a:cs typeface="Arial" charset="0"/>
@@ -6138,7 +5055,7 @@
                         <a:buNone/>
                       </a:pPr>
                       <a:r>
-                        <a:rPr lang="en-US" sz="1300" dirty="0">
+                        <a:rPr lang="en-US" sz="1400" dirty="0">
                           <a:solidFill>
                             <a:srgbClr val="000000"/>
                           </a:solidFill>
@@ -6148,7 +5065,7 @@
                         </a:rPr>
                         <a:t>CES</a:t>
                       </a:r>
-                      <a:endParaRPr lang="en-US" sz="1300" dirty="0">
+                      <a:endParaRPr lang="en-US" sz="1400" dirty="0">
                         <a:latin typeface="Arial" charset="0"/>
                         <a:ea typeface="Arial" charset="0"/>
                         <a:cs typeface="Arial" charset="0"/>
@@ -6185,7 +5102,7 @@
                         <a:buNone/>
                       </a:pPr>
                       <a:r>
-                        <a:rPr lang="en-US" sz="1300" dirty="0">
+                        <a:rPr lang="en-US" sz="1400" dirty="0">
                           <a:solidFill>
                             <a:srgbClr val="9CA3AF"/>
                           </a:solidFill>
@@ -6195,7 +5112,7 @@
                         </a:rPr>
                         <a:t>непрерывно</a:t>
                       </a:r>
-                      <a:endParaRPr lang="en-US" sz="1300" dirty="0">
+                      <a:endParaRPr lang="en-US" sz="1400" dirty="0">
                         <a:latin typeface="Arial" charset="0"/>
                         <a:ea typeface="Arial" charset="0"/>
                         <a:cs typeface="Arial" charset="0"/>
@@ -6224,7 +5141,7 @@
                   </a:tcPr>
                 </a:tc>
               </a:tr>
-              <a:tr h="384048">
+              <a:tr h="420624">
                 <a:tc>
                   <a:txBody>
                     <a:bodyPr/>
@@ -6234,7 +5151,7 @@
                         <a:buNone/>
                       </a:pPr>
                       <a:r>
-                        <a:rPr lang="en-US" sz="1300" dirty="0">
+                        <a:rPr lang="en-US" sz="1400" dirty="0">
                           <a:solidFill>
                             <a:srgbClr val="000000"/>
                           </a:solidFill>
@@ -6244,7 +5161,7 @@
                         </a:rPr>
                         <a:t>Лояльность</a:t>
                       </a:r>
-                      <a:endParaRPr lang="en-US" sz="1300" dirty="0">
+                      <a:endParaRPr lang="en-US" sz="1400" dirty="0">
                         <a:latin typeface="Arial" charset="0"/>
                         <a:ea typeface="Arial" charset="0"/>
                         <a:cs typeface="Arial" charset="0"/>
@@ -6281,7 +5198,7 @@
                         <a:buNone/>
                       </a:pPr>
                       <a:r>
-                        <a:rPr lang="en-US" sz="1300" dirty="0">
+                        <a:rPr lang="en-US" sz="1400" dirty="0">
                           <a:solidFill>
                             <a:srgbClr val="000000"/>
                           </a:solidFill>
@@ -6291,7 +5208,7 @@
                         </a:rPr>
                         <a:t>NPS</a:t>
                       </a:r>
-                      <a:endParaRPr lang="en-US" sz="1300" dirty="0">
+                      <a:endParaRPr lang="en-US" sz="1400" dirty="0">
                         <a:latin typeface="Arial" charset="0"/>
                         <a:ea typeface="Arial" charset="0"/>
                         <a:cs typeface="Arial" charset="0"/>
@@ -6328,7 +5245,7 @@
                         <a:buNone/>
                       </a:pPr>
                       <a:r>
-                        <a:rPr lang="en-US" sz="1300" dirty="0">
+                        <a:rPr lang="en-US" sz="1400" dirty="0">
                           <a:solidFill>
                             <a:srgbClr val="9CA3AF"/>
                           </a:solidFill>
@@ -6338,7 +5255,7 @@
                         </a:rPr>
                         <a:t>квартал</a:t>
                       </a:r>
-                      <a:endParaRPr lang="en-US" sz="1300" dirty="0">
+                      <a:endParaRPr lang="en-US" sz="1400" dirty="0">
                         <a:latin typeface="Arial" charset="0"/>
                         <a:ea typeface="Arial" charset="0"/>
                         <a:cs typeface="Arial" charset="0"/>
@@ -6367,7 +5284,7 @@
                   </a:tcPr>
                 </a:tc>
               </a:tr>
-              <a:tr h="384048">
+              <a:tr h="420624">
                 <a:tc>
                   <a:txBody>
                     <a:bodyPr/>
@@ -6377,7 +5294,7 @@
                         <a:buNone/>
                       </a:pPr>
                       <a:r>
-                        <a:rPr lang="en-US" sz="1300" dirty="0">
+                        <a:rPr lang="en-US" sz="1400" dirty="0">
                           <a:solidFill>
                             <a:srgbClr val="000000"/>
                           </a:solidFill>
@@ -6387,7 +5304,7 @@
                         </a:rPr>
                         <a:t>Доверие</a:t>
                       </a:r>
-                      <a:endParaRPr lang="en-US" sz="1300" dirty="0">
+                      <a:endParaRPr lang="en-US" sz="1400" dirty="0">
                         <a:latin typeface="Arial" charset="0"/>
                         <a:ea typeface="Arial" charset="0"/>
                         <a:cs typeface="Arial" charset="0"/>
@@ -6424,7 +5341,7 @@
                         <a:buNone/>
                       </a:pPr>
                       <a:r>
-                        <a:rPr lang="en-US" sz="1300" dirty="0">
+                        <a:rPr lang="en-US" sz="1400" dirty="0">
                           <a:solidFill>
                             <a:srgbClr val="000000"/>
                           </a:solidFill>
@@ -6434,7 +5351,7 @@
                         </a:rPr>
                         <a:t>индекс доверия</a:t>
                       </a:r>
-                      <a:endParaRPr lang="en-US" sz="1300" dirty="0">
+                      <a:endParaRPr lang="en-US" sz="1400" dirty="0">
                         <a:latin typeface="Arial" charset="0"/>
                         <a:ea typeface="Arial" charset="0"/>
                         <a:cs typeface="Arial" charset="0"/>
@@ -6471,7 +5388,7 @@
                         <a:buNone/>
                       </a:pPr>
                       <a:r>
-                        <a:rPr lang="en-US" sz="1300" dirty="0">
+                        <a:rPr lang="en-US" sz="1400" dirty="0">
                           <a:solidFill>
                             <a:srgbClr val="9CA3AF"/>
                           </a:solidFill>
@@ -6481,7 +5398,7 @@
                         </a:rPr>
                         <a:t>год</a:t>
                       </a:r>
-                      <a:endParaRPr lang="en-US" sz="1300" dirty="0">
+                      <a:endParaRPr lang="en-US" sz="1400" dirty="0">
                         <a:latin typeface="Arial" charset="0"/>
                         <a:ea typeface="Arial" charset="0"/>
                         <a:cs typeface="Arial" charset="0"/>
@@ -6510,7 +5427,7 @@
                   </a:tcPr>
                 </a:tc>
               </a:tr>
-              <a:tr h="384048">
+              <a:tr h="420624">
                 <a:tc>
                   <a:txBody>
                     <a:bodyPr/>
@@ -6520,7 +5437,7 @@
                         <a:buNone/>
                       </a:pPr>
                       <a:r>
-                        <a:rPr lang="en-US" sz="1300" dirty="0">
+                        <a:rPr lang="en-US" sz="1400" dirty="0">
                           <a:solidFill>
                             <a:srgbClr val="000000"/>
                           </a:solidFill>
@@ -6530,7 +5447,7 @@
                         </a:rPr>
                         <a:t>Удержание</a:t>
                       </a:r>
-                      <a:endParaRPr lang="en-US" sz="1300" dirty="0">
+                      <a:endParaRPr lang="en-US" sz="1400" dirty="0">
                         <a:latin typeface="Arial" charset="0"/>
                         <a:ea typeface="Arial" charset="0"/>
                         <a:cs typeface="Arial" charset="0"/>
@@ -6567,7 +5484,7 @@
                         <a:buNone/>
                       </a:pPr>
                       <a:r>
-                        <a:rPr lang="en-US" sz="1300" dirty="0">
+                        <a:rPr lang="en-US" sz="1400" dirty="0">
                           <a:solidFill>
                             <a:srgbClr val="000000"/>
                           </a:solidFill>
@@ -6577,7 +5494,7 @@
                         </a:rPr>
                         <a:t>повторные визиты</a:t>
                       </a:r>
-                      <a:endParaRPr lang="en-US" sz="1300" dirty="0">
+                      <a:endParaRPr lang="en-US" sz="1400" dirty="0">
                         <a:latin typeface="Arial" charset="0"/>
                         <a:ea typeface="Arial" charset="0"/>
                         <a:cs typeface="Arial" charset="0"/>
@@ -6614,7 +5531,7 @@
                         <a:buNone/>
                       </a:pPr>
                       <a:r>
-                        <a:rPr lang="en-US" sz="1300" dirty="0">
+                        <a:rPr lang="en-US" sz="1400" dirty="0">
                           <a:solidFill>
                             <a:srgbClr val="9CA3AF"/>
                           </a:solidFill>
@@ -6624,7 +5541,7 @@
                         </a:rPr>
                         <a:t>месяц</a:t>
                       </a:r>
-                      <a:endParaRPr lang="en-US" sz="1300" dirty="0">
+                      <a:endParaRPr lang="en-US" sz="1400" dirty="0">
                         <a:latin typeface="Arial" charset="0"/>
                         <a:ea typeface="Arial" charset="0"/>
                         <a:cs typeface="Arial" charset="0"/>
@@ -6653,7 +5570,7 @@
                   </a:tcPr>
                 </a:tc>
               </a:tr>
-              <a:tr h="384048">
+              <a:tr h="420624">
                 <a:tc>
                   <a:txBody>
                     <a:bodyPr/>
@@ -6663,7 +5580,7 @@
                         <a:buNone/>
                       </a:pPr>
                       <a:r>
-                        <a:rPr lang="en-US" sz="1300" dirty="0">
+                        <a:rPr lang="en-US" sz="1400" dirty="0">
                           <a:solidFill>
                             <a:srgbClr val="000000"/>
                           </a:solidFill>
@@ -6673,7 +5590,7 @@
                         </a:rPr>
                         <a:t>Средний чек</a:t>
                       </a:r>
-                      <a:endParaRPr lang="en-US" sz="1300" dirty="0">
+                      <a:endParaRPr lang="en-US" sz="1400" dirty="0">
                         <a:latin typeface="Arial" charset="0"/>
                         <a:ea typeface="Arial" charset="0"/>
                         <a:cs typeface="Arial" charset="0"/>
@@ -6710,7 +5627,7 @@
                         <a:buNone/>
                       </a:pPr>
                       <a:r>
-                        <a:rPr lang="en-US" sz="1300" dirty="0">
+                        <a:rPr lang="en-US" sz="1400" dirty="0">
                           <a:solidFill>
                             <a:srgbClr val="000000"/>
                           </a:solidFill>
@@ -6720,7 +5637,7 @@
                         </a:rPr>
                         <a:t>per capita</a:t>
                       </a:r>
-                      <a:endParaRPr lang="en-US" sz="1300" dirty="0">
+                      <a:endParaRPr lang="en-US" sz="1400" dirty="0">
                         <a:latin typeface="Arial" charset="0"/>
                         <a:ea typeface="Arial" charset="0"/>
                         <a:cs typeface="Arial" charset="0"/>
@@ -6757,7 +5674,7 @@
                         <a:buNone/>
                       </a:pPr>
                       <a:r>
-                        <a:rPr lang="en-US" sz="1300" dirty="0">
+                        <a:rPr lang="en-US" sz="1400" dirty="0">
                           <a:solidFill>
                             <a:srgbClr val="9CA3AF"/>
                           </a:solidFill>
@@ -6767,7 +5684,7 @@
                         </a:rPr>
                         <a:t>месяц</a:t>
                       </a:r>
-                      <a:endParaRPr lang="en-US" sz="1300" dirty="0">
+                      <a:endParaRPr lang="en-US" sz="1400" dirty="0">
                         <a:latin typeface="Arial" charset="0"/>
                         <a:ea typeface="Arial" charset="0"/>
                         <a:cs typeface="Arial" charset="0"/>
@@ -6802,14 +5719,372 @@
       </p:graphicFrame>
       <p:sp>
         <p:nvSpPr>
-          <p:cNvPr id="4" name="Text 1"/>
+          <p:cNvPr id="4" name="Shape 1"/>
+          <p:cNvSpPr/>
+          <p:nvPr/>
+        </p:nvSpPr>
+        <p:spPr>
+          <a:xfrm>
+            <a:off x="640080" y="4983480"/>
+            <a:ext cx="10911535" cy="0"/>
+          </a:xfrm>
+          <a:prstGeom prst="line">
+            <a:avLst/>
+          </a:prstGeom>
+          <a:noFill/>
+          <a:ln w="9525">
+            <a:solidFill>
+              <a:srgbClr val="EEEEEE"/>
+            </a:solidFill>
+            <a:prstDash val="solid"/>
+          </a:ln>
+        </p:spPr>
+      </p:sp>
+      <p:sp>
+        <p:nvSpPr>
+          <p:cNvPr id="5" name="Text 2"/>
           <p:cNvSpPr txBox="1"/>
           <p:nvPr/>
         </p:nvSpPr>
         <p:spPr>
           <a:xfrm>
-            <a:off x="9144000" y="1783080"/>
-            <a:ext cx="2404872" cy="2743200"/>
+            <a:off x="640080" y="5212080"/>
+            <a:ext cx="3392424" cy="822960"/>
+          </a:xfrm>
+          <a:prstGeom prst="rect">
+            <a:avLst/>
+          </a:prstGeom>
+          <a:noFill/>
+          <a:ln/>
+        </p:spPr>
+        <p:txBody>
+          <a:bodyPr wrap="square" lIns="0" tIns="0" rIns="0" bIns="0" rtlCol="0" anchor="t"/>
+          <a:lstStyle/>
+          <a:p>
+            <a:pPr indent="0" marL="0">
+              <a:lnSpc>
+                <a:spcPct val="120000"/>
+              </a:lnSpc>
+              <a:buNone/>
+            </a:pPr>
+            <a:r>
+              <a:rPr lang="en-US" sz="1300" b="1" dirty="0">
+                <a:solidFill>
+                  <a:srgbClr val="000000"/>
+                </a:solidFill>
+                <a:latin typeface="Arial" pitchFamily="34" charset="0"/>
+                <a:ea typeface="Arial" pitchFamily="34" charset="-122"/>
+                <a:cs typeface="Arial" pitchFamily="34" charset="-120"/>
+              </a:rPr>
+              <a:t>Журнал обращений и отзывы</a:t>
+            </a:r>
+            <a:endParaRPr lang="en-US" sz="1300" dirty="0"/>
+          </a:p>
+          <a:p>
+            <a:pPr indent="0" marL="0">
+              <a:lnSpc>
+                <a:spcPct val="120000"/>
+              </a:lnSpc>
+              <a:buNone/>
+            </a:pPr>
+            <a:r>
+              <a:rPr lang="en-US" sz="1300" dirty="0">
+                <a:solidFill>
+                  <a:srgbClr val="9CA3AF"/>
+                </a:solidFill>
+                <a:latin typeface="Arial" pitchFamily="34" charset="0"/>
+                <a:ea typeface="Arial" pitchFamily="34" charset="-122"/>
+                <a:cs typeface="Arial" pitchFamily="34" charset="-120"/>
+              </a:rPr>
+              <a:t>регулярный разбор</a:t>
+            </a:r>
+            <a:endParaRPr lang="en-US" sz="1300" dirty="0"/>
+          </a:p>
+        </p:txBody>
+      </p:sp>
+      <p:sp>
+        <p:nvSpPr>
+          <p:cNvPr id="6" name="Text 3"/>
+          <p:cNvSpPr txBox="1"/>
+          <p:nvPr/>
+        </p:nvSpPr>
+        <p:spPr>
+          <a:xfrm>
+            <a:off x="4398264" y="5212080"/>
+            <a:ext cx="3392424" cy="822960"/>
+          </a:xfrm>
+          <a:prstGeom prst="rect">
+            <a:avLst/>
+          </a:prstGeom>
+          <a:noFill/>
+          <a:ln/>
+        </p:spPr>
+        <p:txBody>
+          <a:bodyPr wrap="square" lIns="0" tIns="0" rIns="0" bIns="0" rtlCol="0" anchor="t"/>
+          <a:lstStyle/>
+          <a:p>
+            <a:pPr indent="0" marL="0">
+              <a:lnSpc>
+                <a:spcPct val="120000"/>
+              </a:lnSpc>
+              <a:buNone/>
+            </a:pPr>
+            <a:r>
+              <a:rPr lang="en-US" sz="1300" b="1" dirty="0">
+                <a:solidFill>
+                  <a:srgbClr val="000000"/>
+                </a:solidFill>
+                <a:latin typeface="Arial" pitchFamily="34" charset="0"/>
+                <a:ea typeface="Arial" pitchFamily="34" charset="-122"/>
+                <a:cs typeface="Arial" pitchFamily="34" charset="-120"/>
+              </a:rPr>
+              <a:t>Тайный визит</a:t>
+            </a:r>
+            <a:endParaRPr lang="en-US" sz="1300" dirty="0"/>
+          </a:p>
+          <a:p>
+            <a:pPr indent="0" marL="0">
+              <a:lnSpc>
+                <a:spcPct val="120000"/>
+              </a:lnSpc>
+              <a:buNone/>
+            </a:pPr>
+            <a:r>
+              <a:rPr lang="en-US" sz="1300" dirty="0">
+                <a:solidFill>
+                  <a:srgbClr val="9CA3AF"/>
+                </a:solidFill>
+                <a:latin typeface="Arial" pitchFamily="34" charset="0"/>
+                <a:ea typeface="Arial" pitchFamily="34" charset="-122"/>
+                <a:cs typeface="Arial" pitchFamily="34" charset="-120"/>
+              </a:rPr>
+              <a:t>раз в год</a:t>
+            </a:r>
+            <a:endParaRPr lang="en-US" sz="1300" dirty="0"/>
+          </a:p>
+        </p:txBody>
+      </p:sp>
+      <p:sp>
+        <p:nvSpPr>
+          <p:cNvPr id="7" name="Text 4"/>
+          <p:cNvSpPr txBox="1"/>
+          <p:nvPr/>
+        </p:nvSpPr>
+        <p:spPr>
+          <a:xfrm>
+            <a:off x="8156448" y="5212080"/>
+            <a:ext cx="3392424" cy="822960"/>
+          </a:xfrm>
+          <a:prstGeom prst="rect">
+            <a:avLst/>
+          </a:prstGeom>
+          <a:noFill/>
+          <a:ln/>
+        </p:spPr>
+        <p:txBody>
+          <a:bodyPr wrap="square" lIns="0" tIns="0" rIns="0" bIns="0" rtlCol="0" anchor="t"/>
+          <a:lstStyle/>
+          <a:p>
+            <a:pPr indent="0" marL="0">
+              <a:lnSpc>
+                <a:spcPct val="120000"/>
+              </a:lnSpc>
+              <a:buNone/>
+            </a:pPr>
+            <a:r>
+              <a:rPr lang="en-US" sz="1300" b="1" dirty="0">
+                <a:solidFill>
+                  <a:srgbClr val="000000"/>
+                </a:solidFill>
+                <a:latin typeface="Arial" pitchFamily="34" charset="0"/>
+                <a:ea typeface="Arial" pitchFamily="34" charset="-122"/>
+                <a:cs typeface="Arial" pitchFamily="34" charset="-120"/>
+              </a:rPr>
+              <a:t>Бэклог запросов</a:t>
+            </a:r>
+            <a:endParaRPr lang="en-US" sz="1300" dirty="0"/>
+          </a:p>
+          <a:p>
+            <a:pPr indent="0" marL="0">
+              <a:lnSpc>
+                <a:spcPct val="120000"/>
+              </a:lnSpc>
+              <a:buNone/>
+            </a:pPr>
+            <a:r>
+              <a:rPr lang="en-US" sz="1300" dirty="0">
+                <a:solidFill>
+                  <a:srgbClr val="9CA3AF"/>
+                </a:solidFill>
+                <a:latin typeface="Arial" pitchFamily="34" charset="0"/>
+                <a:ea typeface="Arial" pitchFamily="34" charset="-122"/>
+                <a:cs typeface="Arial" pitchFamily="34" charset="-120"/>
+              </a:rPr>
+              <a:t>с оценкой стоимости</a:t>
+            </a:r>
+            <a:endParaRPr lang="en-US" sz="1300" dirty="0"/>
+          </a:p>
+        </p:txBody>
+      </p:sp>
+    </p:spTree>
+  </p:cSld>
+  <p:clrMapOvr>
+    <a:masterClrMapping/>
+  </p:clrMapOvr>
+</p:sld>
+</file>
+
+<file path=ppt/slides/slide7.xml><?xml version="1.0" encoding="utf-8"?>
+<p:sld xmlns:a="http://schemas.openxmlformats.org/drawingml/2006/main" xmlns:r="http://schemas.openxmlformats.org/officeDocument/2006/relationships" xmlns:p="http://schemas.openxmlformats.org/presentationml/2006/main">
+  <p:cSld name="Slide 7">
+    <p:spTree>
+      <p:nvGrpSpPr>
+        <p:cNvPr id="1" name=""/>
+        <p:cNvGrpSpPr/>
+        <p:nvPr/>
+      </p:nvGrpSpPr>
+      <p:grpSpPr>
+        <a:xfrm>
+          <a:off x="0" y="0"/>
+          <a:ext cx="0" cy="0"/>
+          <a:chOff x="0" y="0"/>
+          <a:chExt cx="0" cy="0"/>
+        </a:xfrm>
+      </p:grpSpPr>
+      <p:sp>
+        <p:nvSpPr>
+          <p:cNvPr id="2" name="Text 0"/>
+          <p:cNvSpPr txBox="1"/>
+          <p:nvPr/>
+        </p:nvSpPr>
+        <p:spPr>
+          <a:xfrm>
+            <a:off x="640080" y="457200"/>
+            <a:ext cx="10911535" cy="731520"/>
+          </a:xfrm>
+          <a:prstGeom prst="rect">
+            <a:avLst/>
+          </a:prstGeom>
+          <a:noFill/>
+          <a:ln/>
+        </p:spPr>
+        <p:txBody>
+          <a:bodyPr wrap="square" lIns="0" tIns="0" rIns="0" bIns="0" rtlCol="0" anchor="t"/>
+          <a:lstStyle/>
+          <a:p>
+            <a:pPr algn="l" indent="0" marL="0">
+              <a:buNone/>
+            </a:pPr>
+            <a:r>
+              <a:rPr lang="en-US" sz="3000" spc="60" kern="0" dirty="0">
+                <a:solidFill>
+                  <a:srgbClr val="000000"/>
+                </a:solidFill>
+                <a:latin typeface="Arial" pitchFamily="34" charset="0"/>
+                <a:ea typeface="Arial" pitchFamily="34" charset="-122"/>
+                <a:cs typeface="Arial" pitchFamily="34" charset="-120"/>
+              </a:rPr>
+              <a:t>Персонал и гостеприимство</a:t>
+            </a:r>
+            <a:endParaRPr lang="en-US" sz="3000" dirty="0"/>
+          </a:p>
+        </p:txBody>
+      </p:sp>
+      <p:pic>
+        <p:nvPicPr>
+          <p:cNvPr id="3" name="Image 0" descr="/home/user/ges-2/docs/strategy/deck-images/mediation.jpg">    </p:cNvPr>
+          <p:cNvPicPr>
+            <a:picLocks noChangeAspect="1"/>
+          </p:cNvPicPr>
+          <p:nvPr/>
+        </p:nvPicPr>
+        <p:blipFill>
+          <a:blip r:embed="rId1"/>
+          <a:stretch>
+            <a:fillRect/>
+          </a:stretch>
+        </p:blipFill>
+        <p:spPr>
+          <a:xfrm>
+            <a:off x="640080" y="1783080"/>
+            <a:ext cx="3931920" cy="2621280"/>
+          </a:xfrm>
+          <a:prstGeom prst="rect">
+            <a:avLst/>
+          </a:prstGeom>
+        </p:spPr>
+      </p:pic>
+      <p:sp>
+        <p:nvSpPr>
+          <p:cNvPr id="4" name="Shape 1"/>
+          <p:cNvSpPr/>
+          <p:nvPr/>
+        </p:nvSpPr>
+        <p:spPr>
+          <a:xfrm>
+            <a:off x="640080" y="1783080"/>
+            <a:ext cx="3931920" cy="2621280"/>
+          </a:xfrm>
+          <a:prstGeom prst="rect">
+            <a:avLst/>
+          </a:prstGeom>
+          <a:ln w="6350">
+            <a:solidFill>
+              <a:srgbClr val="000000"/>
+            </a:solidFill>
+            <a:prstDash val="solid"/>
+          </a:ln>
+        </p:spPr>
+      </p:sp>
+      <p:sp>
+        <p:nvSpPr>
+          <p:cNvPr id="5" name="Text 2"/>
+          <p:cNvSpPr txBox="1"/>
+          <p:nvPr/>
+        </p:nvSpPr>
+        <p:spPr>
+          <a:xfrm>
+            <a:off x="5074920" y="1783080"/>
+            <a:ext cx="6473952" cy="320040"/>
+          </a:xfrm>
+          <a:prstGeom prst="rect">
+            <a:avLst/>
+          </a:prstGeom>
+          <a:noFill/>
+          <a:ln/>
+        </p:spPr>
+        <p:txBody>
+          <a:bodyPr wrap="square" lIns="0" tIns="0" rIns="0" bIns="0" rtlCol="0" anchor="ctr"/>
+          <a:lstStyle/>
+          <a:p>
+            <a:pPr indent="0" marL="0">
+              <a:buNone/>
+            </a:pPr>
+            <a:r>
+              <a:rPr lang="en-US" sz="1600" b="1" dirty="0">
+                <a:solidFill>
+                  <a:srgbClr val="000000"/>
+                </a:solidFill>
+                <a:latin typeface="Arial" pitchFamily="34" charset="0"/>
+                <a:ea typeface="Arial" pitchFamily="34" charset="-122"/>
+                <a:cs typeface="Arial" pitchFamily="34" charset="-120"/>
+              </a:rPr>
+              <a:t>Навык</a:t>
+            </a:r>
+            <a:endParaRPr lang="en-US" sz="1600" dirty="0"/>
+          </a:p>
+        </p:txBody>
+      </p:sp>
+      <p:sp>
+        <p:nvSpPr>
+          <p:cNvPr id="6" name="Text 3"/>
+          <p:cNvSpPr txBox="1"/>
+          <p:nvPr/>
+        </p:nvSpPr>
+        <p:spPr>
+          <a:xfrm>
+            <a:off x="5074920" y="2194560"/>
+            <a:ext cx="6473952" cy="1737360"/>
           </a:xfrm>
           <a:prstGeom prst="rect">
             <a:avLst/>
@@ -6840,7 +6115,7 @@
                 <a:ea typeface="Arial" pitchFamily="34" charset="-122"/>
                 <a:cs typeface="Arial" pitchFamily="34" charset="-120"/>
               </a:rPr>
-              <a:t>Журнал обращений и отзывы — регулярный разбор</a:t>
+              <a:t>Гостеприимство как проверяемый навык: обучение, тестирование, внешние тренинги</a:t>
             </a:r>
             <a:endParaRPr lang="en-US" sz="1300" dirty="0"/>
           </a:p>
@@ -6864,7 +6139,7 @@
                 <a:ea typeface="Arial" pitchFamily="34" charset="-122"/>
                 <a:cs typeface="Arial" pitchFamily="34" charset="-120"/>
               </a:rPr>
-              <a:t>Тайный визит раз в год</a:t>
+              <a:t>Актуальные скрипты и база знаний онлайн</a:t>
             </a:r>
             <a:endParaRPr lang="en-US" sz="1300" dirty="0"/>
           </a:p>
@@ -6888,7 +6163,164 @@
                 <a:ea typeface="Arial" pitchFamily="34" charset="-122"/>
                 <a:cs typeface="Arial" pitchFamily="34" charset="-120"/>
               </a:rPr>
-              <a:t>Бэклог запросов с оценкой стоимости</a:t>
+              <a:t>Регулярные воркшопы по программе</a:t>
+            </a:r>
+            <a:endParaRPr lang="en-US" sz="1300" dirty="0"/>
+          </a:p>
+          <a:p>
+            <a:pPr marL="342900" indent="-342900">
+              <a:lnSpc>
+                <a:spcPct val="115000"/>
+              </a:lnSpc>
+              <a:spcAft>
+                <a:spcPts val="1000"/>
+              </a:spcAft>
+              <a:buSzPct val="100000"/>
+              <a:buChar char="•"/>
+            </a:pPr>
+            <a:r>
+              <a:rPr lang="en-US" sz="1300" dirty="0">
+                <a:solidFill>
+                  <a:srgbClr val="000000"/>
+                </a:solidFill>
+                <a:latin typeface="Arial" pitchFamily="34" charset="0"/>
+                <a:ea typeface="Arial" pitchFamily="34" charset="-122"/>
+                <a:cs typeface="Arial" pitchFamily="34" charset="-120"/>
+              </a:rPr>
+              <a:t>Гибридная роль «сервис + контент»</a:t>
+            </a:r>
+            <a:endParaRPr lang="en-US" sz="1300" dirty="0"/>
+          </a:p>
+        </p:txBody>
+      </p:sp>
+      <p:sp>
+        <p:nvSpPr>
+          <p:cNvPr id="7" name="Text 4"/>
+          <p:cNvSpPr txBox="1"/>
+          <p:nvPr/>
+        </p:nvSpPr>
+        <p:spPr>
+          <a:xfrm>
+            <a:off x="5074920" y="4069080"/>
+            <a:ext cx="6473952" cy="320040"/>
+          </a:xfrm>
+          <a:prstGeom prst="rect">
+            <a:avLst/>
+          </a:prstGeom>
+          <a:noFill/>
+          <a:ln/>
+        </p:spPr>
+        <p:txBody>
+          <a:bodyPr wrap="square" lIns="0" tIns="0" rIns="0" bIns="0" rtlCol="0" anchor="ctr"/>
+          <a:lstStyle/>
+          <a:p>
+            <a:pPr indent="0" marL="0">
+              <a:buNone/>
+            </a:pPr>
+            <a:r>
+              <a:rPr lang="en-US" sz="1600" b="1" dirty="0">
+                <a:solidFill>
+                  <a:srgbClr val="000000"/>
+                </a:solidFill>
+                <a:latin typeface="Arial" pitchFamily="34" charset="0"/>
+                <a:ea typeface="Arial" pitchFamily="34" charset="-122"/>
+                <a:cs typeface="Arial" pitchFamily="34" charset="-120"/>
+              </a:rPr>
+              <a:t>Условия</a:t>
+            </a:r>
+            <a:endParaRPr lang="en-US" sz="1600" dirty="0"/>
+          </a:p>
+        </p:txBody>
+      </p:sp>
+      <p:sp>
+        <p:nvSpPr>
+          <p:cNvPr id="8" name="Text 5"/>
+          <p:cNvSpPr txBox="1"/>
+          <p:nvPr/>
+        </p:nvSpPr>
+        <p:spPr>
+          <a:xfrm>
+            <a:off x="5074920" y="4480560"/>
+            <a:ext cx="6473952" cy="1371600"/>
+          </a:xfrm>
+          <a:prstGeom prst="rect">
+            <a:avLst/>
+          </a:prstGeom>
+          <a:noFill/>
+          <a:ln/>
+        </p:spPr>
+        <p:txBody>
+          <a:bodyPr wrap="square" lIns="0" tIns="0" rIns="0" bIns="0" rtlCol="0" anchor="ctr"/>
+          <a:lstStyle/>
+          <a:p>
+            <a:pPr marL="342900" indent="-342900">
+              <a:lnSpc>
+                <a:spcPct val="115000"/>
+              </a:lnSpc>
+              <a:spcAft>
+                <a:spcPts val="1000"/>
+              </a:spcAft>
+              <a:buSzPct val="100000"/>
+              <a:buChar char="•"/>
+            </a:pPr>
+            <a:r>
+              <a:rPr lang="en-US" sz="1300" dirty="0">
+                <a:solidFill>
+                  <a:srgbClr val="000000"/>
+                </a:solidFill>
+                <a:latin typeface="Arial" pitchFamily="34" charset="0"/>
+                <a:ea typeface="Arial" pitchFamily="34" charset="-122"/>
+                <a:cs typeface="Arial" pitchFamily="34" charset="-120"/>
+              </a:rPr>
+              <a:t>Карьерная лестница, поощрения, оплата, графики</a:t>
+            </a:r>
+            <a:endParaRPr lang="en-US" sz="1300" dirty="0"/>
+          </a:p>
+          <a:p>
+            <a:pPr marL="342900" indent="-342900">
+              <a:lnSpc>
+                <a:spcPct val="115000"/>
+              </a:lnSpc>
+              <a:spcAft>
+                <a:spcPts val="1000"/>
+              </a:spcAft>
+              <a:buSzPct val="100000"/>
+              <a:buChar char="•"/>
+            </a:pPr>
+            <a:r>
+              <a:rPr lang="en-US" sz="1300" dirty="0">
+                <a:solidFill>
+                  <a:srgbClr val="000000"/>
+                </a:solidFill>
+                <a:latin typeface="Arial" pitchFamily="34" charset="0"/>
+                <a:ea typeface="Arial" pitchFamily="34" charset="-122"/>
+                <a:cs typeface="Arial" pitchFamily="34" charset="-120"/>
+              </a:rPr>
+              <a:t>Участие в общих собраниях, канал для идей с обязательным ответом</a:t>
+            </a:r>
+            <a:endParaRPr lang="en-US" sz="1300" dirty="0"/>
+          </a:p>
+          <a:p>
+            <a:pPr marL="342900" indent="-342900">
+              <a:lnSpc>
+                <a:spcPct val="115000"/>
+              </a:lnSpc>
+              <a:spcAft>
+                <a:spcPts val="1000"/>
+              </a:spcAft>
+              <a:buSzPct val="100000"/>
+              <a:buChar char="•"/>
+            </a:pPr>
+            <a:r>
+              <a:rPr lang="en-US" sz="1300" dirty="0">
+                <a:solidFill>
+                  <a:srgbClr val="000000"/>
+                </a:solidFill>
+                <a:latin typeface="Arial" pitchFamily="34" charset="0"/>
+                <a:ea typeface="Arial" pitchFamily="34" charset="-122"/>
+                <a:cs typeface="Arial" pitchFamily="34" charset="-120"/>
+              </a:rPr>
+              <a:t>Директор по клиентскому опыту</a:t>
             </a:r>
             <a:endParaRPr lang="en-US" sz="1300" dirty="0"/>
           </a:p>
@@ -6952,50 +6384,30 @@
                 <a:ea typeface="Arial" pitchFamily="34" charset="-122"/>
                 <a:cs typeface="Arial" pitchFamily="34" charset="-120"/>
               </a:rPr>
-              <a:t>Персонал и гостеприимство</a:t>
+              <a:t>Стандарты и документы</a:t>
             </a:r>
             <a:endParaRPr lang="en-US" sz="3000" dirty="0"/>
           </a:p>
         </p:txBody>
       </p:sp>
-      <p:pic>
-        <p:nvPicPr>
-          <p:cNvPr id="3" name="Image 0" descr="/home/user/ges-2/docs/strategy/deck-images/mediation.jpg">    </p:cNvPr>
-          <p:cNvPicPr>
-            <a:picLocks noChangeAspect="1"/>
-          </p:cNvPicPr>
-          <p:nvPr/>
-        </p:nvPicPr>
-        <p:blipFill>
-          <a:blip r:embed="rId1"/>
-          <a:srcRect l="0" r="0" t="0" b="0"/>
-          <a:stretch/>
-        </p:blipFill>
-        <p:spPr>
-          <a:xfrm>
-            <a:off x="640080" y="1691640"/>
-            <a:ext cx="3931920" cy="4114800"/>
-          </a:xfrm>
-          <a:prstGeom prst="rect">
-            <a:avLst/>
-          </a:prstGeom>
-        </p:spPr>
-      </p:pic>
-      <p:sp>
-        <p:nvSpPr>
-          <p:cNvPr id="4" name="Shape 1"/>
+      <p:sp>
+        <p:nvSpPr>
+          <p:cNvPr id="3" name="Shape 1"/>
           <p:cNvSpPr/>
           <p:nvPr/>
         </p:nvSpPr>
         <p:spPr>
           <a:xfrm>
-            <a:off x="640080" y="1691640"/>
-            <a:ext cx="3931920" cy="4114800"/>
-          </a:xfrm>
-          <a:prstGeom prst="rect">
-            <a:avLst/>
-          </a:prstGeom>
-          <a:ln w="6350">
+            <a:off x="640080" y="1920240"/>
+            <a:ext cx="2011680" cy="2926080"/>
+          </a:xfrm>
+          <a:prstGeom prst="rect">
+            <a:avLst/>
+          </a:prstGeom>
+          <a:solidFill>
+            <a:srgbClr val="FFFFFF"/>
+          </a:solidFill>
+          <a:ln w="9525">
             <a:solidFill>
               <a:srgbClr val="000000"/>
             </a:solidFill>
@@ -7005,14 +6417,14 @@
       </p:sp>
       <p:sp>
         <p:nvSpPr>
-          <p:cNvPr id="5" name="Text 2"/>
+          <p:cNvPr id="4" name="Text 2"/>
           <p:cNvSpPr txBox="1"/>
           <p:nvPr/>
         </p:nvSpPr>
         <p:spPr>
           <a:xfrm>
-            <a:off x="5074920" y="1691640"/>
-            <a:ext cx="6473952" cy="320040"/>
+            <a:off x="841248" y="2103120"/>
+            <a:ext cx="914400" cy="274320"/>
           </a:xfrm>
           <a:prstGeom prst="rect">
             <a:avLst/>
@@ -7028,30 +6440,30 @@
               <a:buNone/>
             </a:pPr>
             <a:r>
-              <a:rPr lang="en-US" sz="1600" b="1" dirty="0">
-                <a:solidFill>
-                  <a:srgbClr val="000000"/>
-                </a:solidFill>
-                <a:latin typeface="Arial" pitchFamily="34" charset="0"/>
-                <a:ea typeface="Arial" pitchFamily="34" charset="-122"/>
-                <a:cs typeface="Arial" pitchFamily="34" charset="-120"/>
-              </a:rPr>
-              <a:t>Навык</a:t>
-            </a:r>
-            <a:endParaRPr lang="en-US" sz="1600" dirty="0"/>
-          </a:p>
-        </p:txBody>
-      </p:sp>
-      <p:sp>
-        <p:nvSpPr>
-          <p:cNvPr id="6" name="Text 3"/>
+              <a:rPr lang="en-US" sz="1200" dirty="0">
+                <a:solidFill>
+                  <a:srgbClr val="9CA3AF"/>
+                </a:solidFill>
+                <a:latin typeface="Arial" pitchFamily="34" charset="0"/>
+                <a:ea typeface="Arial" pitchFamily="34" charset="-122"/>
+                <a:cs typeface="Arial" pitchFamily="34" charset="-120"/>
+              </a:rPr>
+              <a:t>01</a:t>
+            </a:r>
+            <a:endParaRPr lang="en-US" sz="1200" dirty="0"/>
+          </a:p>
+        </p:txBody>
+      </p:sp>
+      <p:sp>
+        <p:nvSpPr>
+          <p:cNvPr id="5" name="Text 3"/>
           <p:cNvSpPr txBox="1"/>
           <p:nvPr/>
         </p:nvSpPr>
         <p:spPr>
           <a:xfrm>
-            <a:off x="5074920" y="2103120"/>
-            <a:ext cx="6473952" cy="1737360"/>
+            <a:off x="841248" y="3566160"/>
+            <a:ext cx="1609344" cy="1097280"/>
           </a:xfrm>
           <a:prstGeom prst="rect">
             <a:avLst/>
@@ -7060,21 +6472,17 @@
           <a:ln/>
         </p:spPr>
         <p:txBody>
-          <a:bodyPr wrap="square" lIns="0" tIns="0" rIns="0" bIns="0" rtlCol="0" anchor="ctr"/>
-          <a:lstStyle/>
-          <a:p>
-            <a:pPr marL="342900" indent="-342900">
+          <a:bodyPr wrap="square" lIns="0" tIns="0" rIns="0" bIns="0" rtlCol="0" anchor="b"/>
+          <a:lstStyle/>
+          <a:p>
+            <a:pPr indent="0" marL="0">
               <a:lnSpc>
                 <a:spcPct val="115000"/>
               </a:lnSpc>
-              <a:spcAft>
-                <a:spcPts val="1000"/>
-              </a:spcAft>
-              <a:buSzPct val="100000"/>
-              <a:buChar char="•"/>
-            </a:pPr>
-            <a:r>
-              <a:rPr lang="en-US" sz="1300" dirty="0">
+              <a:buNone/>
+            </a:pPr>
+            <a:r>
+              <a:rPr lang="en-US" sz="1400" dirty="0">
                 <a:solidFill>
                   <a:srgbClr val="000000"/>
                 </a:solidFill>
@@ -7082,23 +6490,19 @@
                 <a:ea typeface="Arial" pitchFamily="34" charset="-122"/>
                 <a:cs typeface="Arial" pitchFamily="34" charset="-120"/>
               </a:rPr>
-              <a:t>Гостеприимство как проверяемый навык: обучение, тестирование, внешние тренинги</a:t>
-            </a:r>
-            <a:endParaRPr lang="en-US" sz="1300" dirty="0"/>
-          </a:p>
-          <a:p>
-            <a:pPr marL="342900" indent="-342900">
+              <a:t>Стандарт</a:t>
+            </a:r>
+            <a:endParaRPr lang="en-US" sz="1400" dirty="0"/>
+          </a:p>
+          <a:p>
+            <a:pPr indent="0" marL="0">
               <a:lnSpc>
                 <a:spcPct val="115000"/>
               </a:lnSpc>
-              <a:spcAft>
-                <a:spcPts val="1000"/>
-              </a:spcAft>
-              <a:buSzPct val="100000"/>
-              <a:buChar char="•"/>
-            </a:pPr>
-            <a:r>
-              <a:rPr lang="en-US" sz="1300" dirty="0">
+              <a:buNone/>
+            </a:pPr>
+            <a:r>
+              <a:rPr lang="en-US" sz="1400" dirty="0">
                 <a:solidFill>
                   <a:srgbClr val="000000"/>
                 </a:solidFill>
@@ -7106,23 +6510,105 @@
                 <a:ea typeface="Arial" pitchFamily="34" charset="-122"/>
                 <a:cs typeface="Arial" pitchFamily="34" charset="-120"/>
               </a:rPr>
-              <a:t>Актуальные скрипты и база знаний онлайн</a:t>
-            </a:r>
-            <a:endParaRPr lang="en-US" sz="1300" dirty="0"/>
-          </a:p>
-          <a:p>
-            <a:pPr marL="342900" indent="-342900">
+              <a:t>обслуживания</a:t>
+            </a:r>
+            <a:endParaRPr lang="en-US" sz="1400" dirty="0"/>
+          </a:p>
+        </p:txBody>
+      </p:sp>
+      <p:sp>
+        <p:nvSpPr>
+          <p:cNvPr id="6" name="Shape 4"/>
+          <p:cNvSpPr/>
+          <p:nvPr/>
+        </p:nvSpPr>
+        <p:spPr>
+          <a:xfrm>
+            <a:off x="2862072" y="1920240"/>
+            <a:ext cx="2011680" cy="2926080"/>
+          </a:xfrm>
+          <a:prstGeom prst="rect">
+            <a:avLst/>
+          </a:prstGeom>
+          <a:solidFill>
+            <a:srgbClr val="FFFFFF"/>
+          </a:solidFill>
+          <a:ln w="9525">
+            <a:solidFill>
+              <a:srgbClr val="000000"/>
+            </a:solidFill>
+            <a:prstDash val="solid"/>
+          </a:ln>
+        </p:spPr>
+      </p:sp>
+      <p:sp>
+        <p:nvSpPr>
+          <p:cNvPr id="7" name="Text 5"/>
+          <p:cNvSpPr txBox="1"/>
+          <p:nvPr/>
+        </p:nvSpPr>
+        <p:spPr>
+          <a:xfrm>
+            <a:off x="3063240" y="2103120"/>
+            <a:ext cx="914400" cy="274320"/>
+          </a:xfrm>
+          <a:prstGeom prst="rect">
+            <a:avLst/>
+          </a:prstGeom>
+          <a:noFill/>
+          <a:ln/>
+        </p:spPr>
+        <p:txBody>
+          <a:bodyPr wrap="square" lIns="0" tIns="0" rIns="0" bIns="0" rtlCol="0" anchor="ctr"/>
+          <a:lstStyle/>
+          <a:p>
+            <a:pPr indent="0" marL="0">
+              <a:buNone/>
+            </a:pPr>
+            <a:r>
+              <a:rPr lang="en-US" sz="1200" dirty="0">
+                <a:solidFill>
+                  <a:srgbClr val="9CA3AF"/>
+                </a:solidFill>
+                <a:latin typeface="Arial" pitchFamily="34" charset="0"/>
+                <a:ea typeface="Arial" pitchFamily="34" charset="-122"/>
+                <a:cs typeface="Arial" pitchFamily="34" charset="-120"/>
+              </a:rPr>
+              <a:t>02</a:t>
+            </a:r>
+            <a:endParaRPr lang="en-US" sz="1200" dirty="0"/>
+          </a:p>
+        </p:txBody>
+      </p:sp>
+      <p:sp>
+        <p:nvSpPr>
+          <p:cNvPr id="8" name="Text 6"/>
+          <p:cNvSpPr txBox="1"/>
+          <p:nvPr/>
+        </p:nvSpPr>
+        <p:spPr>
+          <a:xfrm>
+            <a:off x="3063240" y="3566160"/>
+            <a:ext cx="1609344" cy="1097280"/>
+          </a:xfrm>
+          <a:prstGeom prst="rect">
+            <a:avLst/>
+          </a:prstGeom>
+          <a:noFill/>
+          <a:ln/>
+        </p:spPr>
+        <p:txBody>
+          <a:bodyPr wrap="square" lIns="0" tIns="0" rIns="0" bIns="0" rtlCol="0" anchor="b"/>
+          <a:lstStyle/>
+          <a:p>
+            <a:pPr indent="0" marL="0">
               <a:lnSpc>
                 <a:spcPct val="115000"/>
               </a:lnSpc>
-              <a:spcAft>
-                <a:spcPts val="1000"/>
-              </a:spcAft>
-              <a:buSzPct val="100000"/>
-              <a:buChar char="•"/>
-            </a:pPr>
-            <a:r>
-              <a:rPr lang="en-US" sz="1300" dirty="0">
+              <a:buNone/>
+            </a:pPr>
+            <a:r>
+              <a:rPr lang="en-US" sz="1400" dirty="0">
                 <a:solidFill>
                   <a:srgbClr val="000000"/>
                 </a:solidFill>
@@ -7130,23 +6616,19 @@
                 <a:ea typeface="Arial" pitchFamily="34" charset="-122"/>
                 <a:cs typeface="Arial" pitchFamily="34" charset="-120"/>
               </a:rPr>
-              <a:t>Регулярные воркшопы по программе</a:t>
-            </a:r>
-            <a:endParaRPr lang="en-US" sz="1300" dirty="0"/>
-          </a:p>
-          <a:p>
-            <a:pPr marL="342900" indent="-342900">
+              <a:t>Публичное обещание</a:t>
+            </a:r>
+            <a:endParaRPr lang="en-US" sz="1400" dirty="0"/>
+          </a:p>
+          <a:p>
+            <a:pPr indent="0" marL="0">
               <a:lnSpc>
                 <a:spcPct val="115000"/>
               </a:lnSpc>
-              <a:spcAft>
-                <a:spcPts val="1000"/>
-              </a:spcAft>
-              <a:buSzPct val="100000"/>
-              <a:buChar char="•"/>
-            </a:pPr>
-            <a:r>
-              <a:rPr lang="en-US" sz="1300" dirty="0">
+              <a:buNone/>
+            </a:pPr>
+            <a:r>
+              <a:rPr lang="en-US" sz="1400" dirty="0">
                 <a:solidFill>
                   <a:srgbClr val="000000"/>
                 </a:solidFill>
@@ -7154,22 +6636,47 @@
                 <a:ea typeface="Arial" pitchFamily="34" charset="-122"/>
                 <a:cs typeface="Arial" pitchFamily="34" charset="-120"/>
               </a:rPr>
-              <a:t>Гибридная роль «сервис + контент»</a:t>
-            </a:r>
-            <a:endParaRPr lang="en-US" sz="1300" dirty="0"/>
-          </a:p>
-        </p:txBody>
-      </p:sp>
-      <p:sp>
-        <p:nvSpPr>
-          <p:cNvPr id="7" name="Text 4"/>
+              <a:t>посетителю</a:t>
+            </a:r>
+            <a:endParaRPr lang="en-US" sz="1400" dirty="0"/>
+          </a:p>
+        </p:txBody>
+      </p:sp>
+      <p:sp>
+        <p:nvSpPr>
+          <p:cNvPr id="9" name="Shape 7"/>
+          <p:cNvSpPr/>
+          <p:nvPr/>
+        </p:nvSpPr>
+        <p:spPr>
+          <a:xfrm>
+            <a:off x="5084064" y="1920240"/>
+            <a:ext cx="2011680" cy="2926080"/>
+          </a:xfrm>
+          <a:prstGeom prst="rect">
+            <a:avLst/>
+          </a:prstGeom>
+          <a:solidFill>
+            <a:srgbClr val="FFFFFF"/>
+          </a:solidFill>
+          <a:ln w="9525">
+            <a:solidFill>
+              <a:srgbClr val="000000"/>
+            </a:solidFill>
+            <a:prstDash val="solid"/>
+          </a:ln>
+        </p:spPr>
+      </p:sp>
+      <p:sp>
+        <p:nvSpPr>
+          <p:cNvPr id="10" name="Text 8"/>
           <p:cNvSpPr txBox="1"/>
           <p:nvPr/>
         </p:nvSpPr>
         <p:spPr>
           <a:xfrm>
-            <a:off x="5074920" y="3977640"/>
-            <a:ext cx="6473952" cy="320040"/>
+            <a:off x="5285232" y="2103120"/>
+            <a:ext cx="914400" cy="274320"/>
           </a:xfrm>
           <a:prstGeom prst="rect">
             <a:avLst/>
@@ -7185,30 +6692,30 @@
               <a:buNone/>
             </a:pPr>
             <a:r>
-              <a:rPr lang="en-US" sz="1600" b="1" dirty="0">
-                <a:solidFill>
-                  <a:srgbClr val="000000"/>
-                </a:solidFill>
-                <a:latin typeface="Arial" pitchFamily="34" charset="0"/>
-                <a:ea typeface="Arial" pitchFamily="34" charset="-122"/>
-                <a:cs typeface="Arial" pitchFamily="34" charset="-120"/>
-              </a:rPr>
-              <a:t>Условия</a:t>
-            </a:r>
-            <a:endParaRPr lang="en-US" sz="1600" dirty="0"/>
-          </a:p>
-        </p:txBody>
-      </p:sp>
-      <p:sp>
-        <p:nvSpPr>
-          <p:cNvPr id="8" name="Text 5"/>
+              <a:rPr lang="en-US" sz="1200" dirty="0">
+                <a:solidFill>
+                  <a:srgbClr val="9CA3AF"/>
+                </a:solidFill>
+                <a:latin typeface="Arial" pitchFamily="34" charset="0"/>
+                <a:ea typeface="Arial" pitchFamily="34" charset="-122"/>
+                <a:cs typeface="Arial" pitchFamily="34" charset="-120"/>
+              </a:rPr>
+              <a:t>03</a:t>
+            </a:r>
+            <a:endParaRPr lang="en-US" sz="1200" dirty="0"/>
+          </a:p>
+        </p:txBody>
+      </p:sp>
+      <p:sp>
+        <p:nvSpPr>
+          <p:cNvPr id="11" name="Text 9"/>
           <p:cNvSpPr txBox="1"/>
           <p:nvPr/>
         </p:nvSpPr>
         <p:spPr>
           <a:xfrm>
-            <a:off x="5074920" y="4389120"/>
-            <a:ext cx="6473952" cy="1371600"/>
+            <a:off x="5285232" y="3566160"/>
+            <a:ext cx="1609344" cy="1097280"/>
           </a:xfrm>
           <a:prstGeom prst="rect">
             <a:avLst/>
@@ -7217,21 +6724,17 @@
           <a:ln/>
         </p:spPr>
         <p:txBody>
-          <a:bodyPr wrap="square" lIns="0" tIns="0" rIns="0" bIns="0" rtlCol="0" anchor="ctr"/>
-          <a:lstStyle/>
-          <a:p>
-            <a:pPr marL="342900" indent="-342900">
+          <a:bodyPr wrap="square" lIns="0" tIns="0" rIns="0" bIns="0" rtlCol="0" anchor="b"/>
+          <a:lstStyle/>
+          <a:p>
+            <a:pPr indent="0" marL="0">
               <a:lnSpc>
                 <a:spcPct val="115000"/>
               </a:lnSpc>
-              <a:spcAft>
-                <a:spcPts val="1000"/>
-              </a:spcAft>
-              <a:buSzPct val="100000"/>
-              <a:buChar char="•"/>
-            </a:pPr>
-            <a:r>
-              <a:rPr lang="en-US" sz="1300" dirty="0">
+              <a:buNone/>
+            </a:pPr>
+            <a:r>
+              <a:rPr lang="en-US" sz="1400" dirty="0">
                 <a:solidFill>
                   <a:srgbClr val="000000"/>
                 </a:solidFill>
@@ -7239,23 +6742,19 @@
                 <a:ea typeface="Arial" pitchFamily="34" charset="-122"/>
                 <a:cs typeface="Arial" pitchFamily="34" charset="-120"/>
               </a:rPr>
-              <a:t>Карьерная лестница, поощрения, оплата, графики</a:t>
-            </a:r>
-            <a:endParaRPr lang="en-US" sz="1300" dirty="0"/>
-          </a:p>
-          <a:p>
-            <a:pPr marL="342900" indent="-342900">
+              <a:t>Хендбук сотрудника</a:t>
+            </a:r>
+            <a:endParaRPr lang="en-US" sz="1400" dirty="0"/>
+          </a:p>
+          <a:p>
+            <a:pPr indent="0" marL="0">
               <a:lnSpc>
                 <a:spcPct val="115000"/>
               </a:lnSpc>
-              <a:spcAft>
-                <a:spcPts val="1000"/>
-              </a:spcAft>
-              <a:buSzPct val="100000"/>
-              <a:buChar char="•"/>
-            </a:pPr>
-            <a:r>
-              <a:rPr lang="en-US" sz="1300" dirty="0">
+              <a:buNone/>
+            </a:pPr>
+            <a:r>
+              <a:rPr lang="en-US" sz="1400" dirty="0">
                 <a:solidFill>
                   <a:srgbClr val="000000"/>
                 </a:solidFill>
@@ -7263,23 +6762,105 @@
                 <a:ea typeface="Arial" pitchFamily="34" charset="-122"/>
                 <a:cs typeface="Arial" pitchFamily="34" charset="-120"/>
               </a:rPr>
-              <a:t>Участие в общих собраниях, канал для идей с обязательным ответом</a:t>
-            </a:r>
-            <a:endParaRPr lang="en-US" sz="1300" dirty="0"/>
-          </a:p>
-          <a:p>
-            <a:pPr marL="342900" indent="-342900">
+              <a:t>службы</a:t>
+            </a:r>
+            <a:endParaRPr lang="en-US" sz="1400" dirty="0"/>
+          </a:p>
+        </p:txBody>
+      </p:sp>
+      <p:sp>
+        <p:nvSpPr>
+          <p:cNvPr id="12" name="Shape 10"/>
+          <p:cNvSpPr/>
+          <p:nvPr/>
+        </p:nvSpPr>
+        <p:spPr>
+          <a:xfrm>
+            <a:off x="7306056" y="1920240"/>
+            <a:ext cx="2011680" cy="2926080"/>
+          </a:xfrm>
+          <a:prstGeom prst="rect">
+            <a:avLst/>
+          </a:prstGeom>
+          <a:solidFill>
+            <a:srgbClr val="FFFFFF"/>
+          </a:solidFill>
+          <a:ln w="9525">
+            <a:solidFill>
+              <a:srgbClr val="000000"/>
+            </a:solidFill>
+            <a:prstDash val="solid"/>
+          </a:ln>
+        </p:spPr>
+      </p:sp>
+      <p:sp>
+        <p:nvSpPr>
+          <p:cNvPr id="13" name="Text 11"/>
+          <p:cNvSpPr txBox="1"/>
+          <p:nvPr/>
+        </p:nvSpPr>
+        <p:spPr>
+          <a:xfrm>
+            <a:off x="7507224" y="2103120"/>
+            <a:ext cx="914400" cy="274320"/>
+          </a:xfrm>
+          <a:prstGeom prst="rect">
+            <a:avLst/>
+          </a:prstGeom>
+          <a:noFill/>
+          <a:ln/>
+        </p:spPr>
+        <p:txBody>
+          <a:bodyPr wrap="square" lIns="0" tIns="0" rIns="0" bIns="0" rtlCol="0" anchor="ctr"/>
+          <a:lstStyle/>
+          <a:p>
+            <a:pPr indent="0" marL="0">
+              <a:buNone/>
+            </a:pPr>
+            <a:r>
+              <a:rPr lang="en-US" sz="1200" dirty="0">
+                <a:solidFill>
+                  <a:srgbClr val="9CA3AF"/>
+                </a:solidFill>
+                <a:latin typeface="Arial" pitchFamily="34" charset="0"/>
+                <a:ea typeface="Arial" pitchFamily="34" charset="-122"/>
+                <a:cs typeface="Arial" pitchFamily="34" charset="-120"/>
+              </a:rPr>
+              <a:t>04</a:t>
+            </a:r>
+            <a:endParaRPr lang="en-US" sz="1200" dirty="0"/>
+          </a:p>
+        </p:txBody>
+      </p:sp>
+      <p:sp>
+        <p:nvSpPr>
+          <p:cNvPr id="14" name="Text 12"/>
+          <p:cNvSpPr txBox="1"/>
+          <p:nvPr/>
+        </p:nvSpPr>
+        <p:spPr>
+          <a:xfrm>
+            <a:off x="7507224" y="3566160"/>
+            <a:ext cx="1609344" cy="1097280"/>
+          </a:xfrm>
+          <a:prstGeom prst="rect">
+            <a:avLst/>
+          </a:prstGeom>
+          <a:noFill/>
+          <a:ln/>
+        </p:spPr>
+        <p:txBody>
+          <a:bodyPr wrap="square" lIns="0" tIns="0" rIns="0" bIns="0" rtlCol="0" anchor="b"/>
+          <a:lstStyle/>
+          <a:p>
+            <a:pPr indent="0" marL="0">
               <a:lnSpc>
                 <a:spcPct val="115000"/>
               </a:lnSpc>
-              <a:spcAft>
-                <a:spcPts val="1000"/>
-              </a:spcAft>
-              <a:buSzPct val="100000"/>
-              <a:buChar char="•"/>
-            </a:pPr>
-            <a:r>
-              <a:rPr lang="en-US" sz="1300" dirty="0">
+              <a:buNone/>
+            </a:pPr>
+            <a:r>
+              <a:rPr lang="en-US" sz="1400" dirty="0">
                 <a:solidFill>
                   <a:srgbClr val="000000"/>
                 </a:solidFill>
@@ -7287,9 +6868,155 @@
                 <a:ea typeface="Arial" pitchFamily="34" charset="-122"/>
                 <a:cs typeface="Arial" pitchFamily="34" charset="-120"/>
               </a:rPr>
-              <a:t>Директор по клиентскому опыту</a:t>
-            </a:r>
-            <a:endParaRPr lang="en-US" sz="1300" dirty="0"/>
+              <a:t>Регламент работы</a:t>
+            </a:r>
+            <a:endParaRPr lang="en-US" sz="1400" dirty="0"/>
+          </a:p>
+          <a:p>
+            <a:pPr indent="0" marL="0">
+              <a:lnSpc>
+                <a:spcPct val="115000"/>
+              </a:lnSpc>
+              <a:buNone/>
+            </a:pPr>
+            <a:r>
+              <a:rPr lang="en-US" sz="1400" dirty="0">
+                <a:solidFill>
+                  <a:srgbClr val="000000"/>
+                </a:solidFill>
+                <a:latin typeface="Arial" pitchFamily="34" charset="0"/>
+                <a:ea typeface="Arial" pitchFamily="34" charset="-122"/>
+                <a:cs typeface="Arial" pitchFamily="34" charset="-120"/>
+              </a:rPr>
+              <a:t>с обратной связью</a:t>
+            </a:r>
+            <a:endParaRPr lang="en-US" sz="1400" dirty="0"/>
+          </a:p>
+        </p:txBody>
+      </p:sp>
+      <p:sp>
+        <p:nvSpPr>
+          <p:cNvPr id="15" name="Shape 13"/>
+          <p:cNvSpPr/>
+          <p:nvPr/>
+        </p:nvSpPr>
+        <p:spPr>
+          <a:xfrm>
+            <a:off x="9528048" y="1920240"/>
+            <a:ext cx="2011680" cy="2926080"/>
+          </a:xfrm>
+          <a:prstGeom prst="rect">
+            <a:avLst/>
+          </a:prstGeom>
+          <a:solidFill>
+            <a:srgbClr val="FFFFFF"/>
+          </a:solidFill>
+          <a:ln w="9525">
+            <a:solidFill>
+              <a:srgbClr val="000000"/>
+            </a:solidFill>
+            <a:prstDash val="solid"/>
+          </a:ln>
+        </p:spPr>
+      </p:sp>
+      <p:sp>
+        <p:nvSpPr>
+          <p:cNvPr id="16" name="Text 14"/>
+          <p:cNvSpPr txBox="1"/>
+          <p:nvPr/>
+        </p:nvSpPr>
+        <p:spPr>
+          <a:xfrm>
+            <a:off x="9729216" y="2103120"/>
+            <a:ext cx="914400" cy="274320"/>
+          </a:xfrm>
+          <a:prstGeom prst="rect">
+            <a:avLst/>
+          </a:prstGeom>
+          <a:noFill/>
+          <a:ln/>
+        </p:spPr>
+        <p:txBody>
+          <a:bodyPr wrap="square" lIns="0" tIns="0" rIns="0" bIns="0" rtlCol="0" anchor="ctr"/>
+          <a:lstStyle/>
+          <a:p>
+            <a:pPr indent="0" marL="0">
+              <a:buNone/>
+            </a:pPr>
+            <a:r>
+              <a:rPr lang="en-US" sz="1200" dirty="0">
+                <a:solidFill>
+                  <a:srgbClr val="9CA3AF"/>
+                </a:solidFill>
+                <a:latin typeface="Arial" pitchFamily="34" charset="0"/>
+                <a:ea typeface="Arial" pitchFamily="34" charset="-122"/>
+                <a:cs typeface="Arial" pitchFamily="34" charset="-120"/>
+              </a:rPr>
+              <a:t>05</a:t>
+            </a:r>
+            <a:endParaRPr lang="en-US" sz="1200" dirty="0"/>
+          </a:p>
+        </p:txBody>
+      </p:sp>
+      <p:sp>
+        <p:nvSpPr>
+          <p:cNvPr id="17" name="Text 15"/>
+          <p:cNvSpPr txBox="1"/>
+          <p:nvPr/>
+        </p:nvSpPr>
+        <p:spPr>
+          <a:xfrm>
+            <a:off x="9729216" y="3566160"/>
+            <a:ext cx="1609344" cy="1097280"/>
+          </a:xfrm>
+          <a:prstGeom prst="rect">
+            <a:avLst/>
+          </a:prstGeom>
+          <a:noFill/>
+          <a:ln/>
+        </p:spPr>
+        <p:txBody>
+          <a:bodyPr wrap="square" lIns="0" tIns="0" rIns="0" bIns="0" rtlCol="0" anchor="b"/>
+          <a:lstStyle/>
+          <a:p>
+            <a:pPr indent="0" marL="0">
+              <a:lnSpc>
+                <a:spcPct val="115000"/>
+              </a:lnSpc>
+              <a:buNone/>
+            </a:pPr>
+            <a:r>
+              <a:rPr lang="en-US" sz="1400" dirty="0">
+                <a:solidFill>
+                  <a:srgbClr val="000000"/>
+                </a:solidFill>
+                <a:latin typeface="Arial" pitchFamily="34" charset="0"/>
+                <a:ea typeface="Arial" pitchFamily="34" charset="-122"/>
+                <a:cs typeface="Arial" pitchFamily="34" charset="-120"/>
+              </a:rPr>
+              <a:t>Матрица полномочий</a:t>
+            </a:r>
+            <a:endParaRPr lang="en-US" sz="1400" dirty="0"/>
+          </a:p>
+          <a:p>
+            <a:pPr indent="0" marL="0">
+              <a:lnSpc>
+                <a:spcPct val="115000"/>
+              </a:lnSpc>
+              <a:buNone/>
+            </a:pPr>
+            <a:r>
+              <a:rPr lang="en-US" sz="1400" dirty="0">
+                <a:solidFill>
+                  <a:srgbClr val="000000"/>
+                </a:solidFill>
+                <a:latin typeface="Arial" pitchFamily="34" charset="0"/>
+                <a:ea typeface="Arial" pitchFamily="34" charset="-122"/>
+                <a:cs typeface="Arial" pitchFamily="34" charset="-120"/>
+              </a:rPr>
+              <a:t>фронт-линии</a:t>
+            </a:r>
+            <a:endParaRPr lang="en-US" sz="1400" dirty="0"/>
           </a:p>
         </p:txBody>
       </p:sp>
@@ -7351,7 +7078,7 @@
                 <a:ea typeface="Arial" pitchFamily="34" charset="-122"/>
                 <a:cs typeface="Arial" pitchFamily="34" charset="-120"/>
               </a:rPr>
-              <a:t>Стандарты и документы</a:t>
+              <a:t>Цифровые сервисы</a:t>
             </a:r>
             <a:endParaRPr lang="en-US" sz="3000" dirty="0"/>
           </a:p>
@@ -7359,22 +7086,116 @@
       </p:sp>
       <p:sp>
         <p:nvSpPr>
-          <p:cNvPr id="3" name="Shape 1"/>
+          <p:cNvPr id="3" name="Text 1"/>
+          <p:cNvSpPr txBox="1"/>
+          <p:nvPr/>
+        </p:nvSpPr>
+        <p:spPr>
+          <a:xfrm>
+            <a:off x="640080" y="1874520"/>
+            <a:ext cx="4754880" cy="2011680"/>
+          </a:xfrm>
+          <a:prstGeom prst="rect">
+            <a:avLst/>
+          </a:prstGeom>
+          <a:noFill/>
+          <a:ln/>
+        </p:spPr>
+        <p:txBody>
+          <a:bodyPr wrap="square" lIns="0" tIns="0" rIns="0" bIns="0" rtlCol="0" anchor="ctr"/>
+          <a:lstStyle/>
+          <a:p>
+            <a:pPr marL="342900" indent="-342900">
+              <a:lnSpc>
+                <a:spcPct val="115000"/>
+              </a:lnSpc>
+              <a:spcAft>
+                <a:spcPts val="1000"/>
+              </a:spcAft>
+              <a:buSzPct val="100000"/>
+              <a:buChar char="•"/>
+            </a:pPr>
+            <a:r>
+              <a:rPr lang="en-US" sz="1500" dirty="0">
+                <a:solidFill>
+                  <a:srgbClr val="000000"/>
+                </a:solidFill>
+                <a:latin typeface="Arial" pitchFamily="34" charset="0"/>
+                <a:ea typeface="Arial" pitchFamily="34" charset="-122"/>
+                <a:cs typeface="Arial" pitchFamily="34" charset="-120"/>
+              </a:rPr>
+              <a:t>UI/UX сайта и цифровые пути</a:t>
+            </a:r>
+            <a:endParaRPr lang="en-US" sz="1500" dirty="0"/>
+          </a:p>
+          <a:p>
+            <a:pPr marL="342900" indent="-342900">
+              <a:lnSpc>
+                <a:spcPct val="115000"/>
+              </a:lnSpc>
+              <a:spcAft>
+                <a:spcPts val="1000"/>
+              </a:spcAft>
+              <a:buSzPct val="100000"/>
+              <a:buChar char="•"/>
+            </a:pPr>
+            <a:r>
+              <a:rPr lang="en-US" sz="1500" dirty="0">
+                <a:solidFill>
+                  <a:srgbClr val="000000"/>
+                </a:solidFill>
+                <a:latin typeface="Arial" pitchFamily="34" charset="0"/>
+                <a:ea typeface="Arial" pitchFamily="34" charset="-122"/>
+                <a:cs typeface="Arial" pitchFamily="34" charset="-120"/>
+              </a:rPr>
+              <a:t>Мобильное приложение и веб-сервисы ГЭС-2 для посетителей</a:t>
+            </a:r>
+            <a:endParaRPr lang="en-US" sz="1500" dirty="0"/>
+          </a:p>
+          <a:p>
+            <a:pPr marL="342900" indent="-342900">
+              <a:lnSpc>
+                <a:spcPct val="115000"/>
+              </a:lnSpc>
+              <a:spcAft>
+                <a:spcPts val="1000"/>
+              </a:spcAft>
+              <a:buSzPct val="100000"/>
+              <a:buChar char="•"/>
+            </a:pPr>
+            <a:r>
+              <a:rPr lang="en-US" sz="1500" dirty="0">
+                <a:solidFill>
+                  <a:srgbClr val="000000"/>
+                </a:solidFill>
+                <a:latin typeface="Arial" pitchFamily="34" charset="0"/>
+                <a:ea typeface="Arial" pitchFamily="34" charset="-122"/>
+                <a:cs typeface="Arial" pitchFamily="34" charset="-120"/>
+              </a:rPr>
+              <a:t>Жизненный цикл систем, переход на микросервисную архитектуру</a:t>
+            </a:r>
+            <a:endParaRPr lang="en-US" sz="1500" dirty="0"/>
+          </a:p>
+        </p:txBody>
+      </p:sp>
+      <p:sp>
+        <p:nvSpPr>
+          <p:cNvPr id="4" name="Shape 2"/>
           <p:cNvSpPr/>
           <p:nvPr/>
         </p:nvSpPr>
         <p:spPr>
           <a:xfrm>
-            <a:off x="640080" y="1783080"/>
-            <a:ext cx="2011680" cy="2743200"/>
+            <a:off x="5852160" y="2011680"/>
+            <a:ext cx="5696712" cy="3797808"/>
           </a:xfrm>
           <a:prstGeom prst="rect">
             <a:avLst/>
           </a:prstGeom>
           <a:solidFill>
-            <a:srgbClr val="FFFFFF"/>
+            <a:srgbClr val="EEEEEE"/>
           </a:solidFill>
-          <a:ln w="9525">
+          <a:ln w="6350">
             <a:solidFill>
               <a:srgbClr val="000000"/>
             </a:solidFill>
@@ -7384,53 +7205,14 @@
       </p:sp>
       <p:sp>
         <p:nvSpPr>
-          <p:cNvPr id="4" name="Text 2"/>
-          <p:cNvSpPr txBox="1"/>
-          <p:nvPr/>
-        </p:nvSpPr>
-        <p:spPr>
-          <a:xfrm>
-            <a:off x="841248" y="1965960"/>
-            <a:ext cx="914400" cy="274320"/>
-          </a:xfrm>
-          <a:prstGeom prst="rect">
-            <a:avLst/>
-          </a:prstGeom>
-          <a:noFill/>
-          <a:ln/>
-        </p:spPr>
-        <p:txBody>
-          <a:bodyPr wrap="square" lIns="0" tIns="0" rIns="0" bIns="0" rtlCol="0" anchor="ctr"/>
-          <a:lstStyle/>
-          <a:p>
-            <a:pPr indent="0" marL="0">
-              <a:buNone/>
-            </a:pPr>
-            <a:r>
-              <a:rPr lang="en-US" sz="1200" dirty="0">
-                <a:solidFill>
-                  <a:srgbClr val="9CA3AF"/>
-                </a:solidFill>
-                <a:latin typeface="Arial" pitchFamily="34" charset="0"/>
-                <a:ea typeface="Arial" pitchFamily="34" charset="-122"/>
-                <a:cs typeface="Arial" pitchFamily="34" charset="-120"/>
-              </a:rPr>
-              <a:t>01</a:t>
-            </a:r>
-            <a:endParaRPr lang="en-US" sz="1200" dirty="0"/>
-          </a:p>
-        </p:txBody>
-      </p:sp>
-      <p:sp>
-        <p:nvSpPr>
           <p:cNvPr id="5" name="Text 3"/>
           <p:cNvSpPr txBox="1"/>
           <p:nvPr/>
         </p:nvSpPr>
         <p:spPr>
           <a:xfrm>
-            <a:off x="841248" y="3246120"/>
-            <a:ext cx="1609344" cy="1097280"/>
+            <a:off x="6035040" y="3499104"/>
+            <a:ext cx="5330952" cy="822960"/>
           </a:xfrm>
           <a:prstGeom prst="rect">
             <a:avLst/>
@@ -7439,101 +7221,14 @@
           <a:ln/>
         </p:spPr>
         <p:txBody>
-          <a:bodyPr wrap="square" lIns="0" tIns="0" rIns="0" bIns="0" rtlCol="0" anchor="b"/>
-          <a:lstStyle/>
-          <a:p>
-            <a:pPr indent="0" marL="0">
-              <a:lnSpc>
-                <a:spcPct val="115000"/>
-              </a:lnSpc>
+          <a:bodyPr wrap="square" lIns="0" tIns="0" rIns="0" bIns="0" rtlCol="0" anchor="ctr"/>
+          <a:lstStyle/>
+          <a:p>
+            <a:pPr algn="ctr" indent="0" marL="0">
               <a:buNone/>
             </a:pPr>
             <a:r>
-              <a:rPr lang="en-US" sz="1400" dirty="0">
-                <a:solidFill>
-                  <a:srgbClr val="000000"/>
-                </a:solidFill>
-                <a:latin typeface="Arial" pitchFamily="34" charset="0"/>
-                <a:ea typeface="Arial" pitchFamily="34" charset="-122"/>
-                <a:cs typeface="Arial" pitchFamily="34" charset="-120"/>
-              </a:rPr>
-              <a:t>Стандарт</a:t>
-            </a:r>
-            <a:endParaRPr lang="en-US" sz="1400" dirty="0"/>
-          </a:p>
-          <a:p>
-            <a:pPr indent="0" marL="0">
-              <a:lnSpc>
-                <a:spcPct val="115000"/>
-              </a:lnSpc>
-              <a:buNone/>
-            </a:pPr>
-            <a:r>
-              <a:rPr lang="en-US" sz="1400" dirty="0">
-                <a:solidFill>
-                  <a:srgbClr val="000000"/>
-                </a:solidFill>
-                <a:latin typeface="Arial" pitchFamily="34" charset="0"/>
-                <a:ea typeface="Arial" pitchFamily="34" charset="-122"/>
-                <a:cs typeface="Arial" pitchFamily="34" charset="-120"/>
-              </a:rPr>
-              <a:t>обслуживания</a:t>
-            </a:r>
-            <a:endParaRPr lang="en-US" sz="1400" dirty="0"/>
-          </a:p>
-        </p:txBody>
-      </p:sp>
-      <p:sp>
-        <p:nvSpPr>
-          <p:cNvPr id="6" name="Shape 4"/>
-          <p:cNvSpPr/>
-          <p:nvPr/>
-        </p:nvSpPr>
-        <p:spPr>
-          <a:xfrm>
-            <a:off x="2862072" y="1783080"/>
-            <a:ext cx="2011680" cy="2743200"/>
-          </a:xfrm>
-          <a:prstGeom prst="rect">
-            <a:avLst/>
-          </a:prstGeom>
-          <a:solidFill>
-            <a:srgbClr val="FFFFFF"/>
-          </a:solidFill>
-          <a:ln w="9525">
-            <a:solidFill>
-              <a:srgbClr val="000000"/>
-            </a:solidFill>
-            <a:prstDash val="solid"/>
-          </a:ln>
-        </p:spPr>
-      </p:sp>
-      <p:sp>
-        <p:nvSpPr>
-          <p:cNvPr id="7" name="Text 5"/>
-          <p:cNvSpPr txBox="1"/>
-          <p:nvPr/>
-        </p:nvSpPr>
-        <p:spPr>
-          <a:xfrm>
-            <a:off x="3063240" y="1965960"/>
-            <a:ext cx="914400" cy="274320"/>
-          </a:xfrm>
-          <a:prstGeom prst="rect">
-            <a:avLst/>
-          </a:prstGeom>
-          <a:noFill/>
-          <a:ln/>
-        </p:spPr>
-        <p:txBody>
-          <a:bodyPr wrap="square" lIns="0" tIns="0" rIns="0" bIns="0" rtlCol="0" anchor="ctr"/>
-          <a:lstStyle/>
-          <a:p>
-            <a:pPr indent="0" marL="0">
-              <a:buNone/>
-            </a:pPr>
-            <a:r>
-              <a:rPr lang="en-US" sz="1200" dirty="0">
+              <a:rPr lang="en-US" sz="1100" dirty="0">
                 <a:solidFill>
                   <a:srgbClr val="9CA3AF"/>
                 </a:solidFill>
@@ -7541,488 +7236,9 @@
                 <a:ea typeface="Arial" pitchFamily="34" charset="-122"/>
                 <a:cs typeface="Arial" pitchFamily="34" charset="-120"/>
               </a:rPr>
-              <a:t>02</a:t>
-            </a:r>
-            <a:endParaRPr lang="en-US" sz="1200" dirty="0"/>
-          </a:p>
-        </p:txBody>
-      </p:sp>
-      <p:sp>
-        <p:nvSpPr>
-          <p:cNvPr id="8" name="Text 6"/>
-          <p:cNvSpPr txBox="1"/>
-          <p:nvPr/>
-        </p:nvSpPr>
-        <p:spPr>
-          <a:xfrm>
-            <a:off x="3063240" y="3246120"/>
-            <a:ext cx="1609344" cy="1097280"/>
-          </a:xfrm>
-          <a:prstGeom prst="rect">
-            <a:avLst/>
-          </a:prstGeom>
-          <a:noFill/>
-          <a:ln/>
-        </p:spPr>
-        <p:txBody>
-          <a:bodyPr wrap="square" lIns="0" tIns="0" rIns="0" bIns="0" rtlCol="0" anchor="b"/>
-          <a:lstStyle/>
-          <a:p>
-            <a:pPr indent="0" marL="0">
-              <a:lnSpc>
-                <a:spcPct val="115000"/>
-              </a:lnSpc>
-              <a:buNone/>
-            </a:pPr>
-            <a:r>
-              <a:rPr lang="en-US" sz="1400" dirty="0">
-                <a:solidFill>
-                  <a:srgbClr val="000000"/>
-                </a:solidFill>
-                <a:latin typeface="Arial" pitchFamily="34" charset="0"/>
-                <a:ea typeface="Arial" pitchFamily="34" charset="-122"/>
-                <a:cs typeface="Arial" pitchFamily="34" charset="-120"/>
-              </a:rPr>
-              <a:t>Публичное обещание</a:t>
-            </a:r>
-            <a:endParaRPr lang="en-US" sz="1400" dirty="0"/>
-          </a:p>
-          <a:p>
-            <a:pPr indent="0" marL="0">
-              <a:lnSpc>
-                <a:spcPct val="115000"/>
-              </a:lnSpc>
-              <a:buNone/>
-            </a:pPr>
-            <a:r>
-              <a:rPr lang="en-US" sz="1400" dirty="0">
-                <a:solidFill>
-                  <a:srgbClr val="000000"/>
-                </a:solidFill>
-                <a:latin typeface="Arial" pitchFamily="34" charset="0"/>
-                <a:ea typeface="Arial" pitchFamily="34" charset="-122"/>
-                <a:cs typeface="Arial" pitchFamily="34" charset="-120"/>
-              </a:rPr>
-              <a:t>посетителю</a:t>
-            </a:r>
-            <a:endParaRPr lang="en-US" sz="1400" dirty="0"/>
-          </a:p>
-        </p:txBody>
-      </p:sp>
-      <p:sp>
-        <p:nvSpPr>
-          <p:cNvPr id="9" name="Shape 7"/>
-          <p:cNvSpPr/>
-          <p:nvPr/>
-        </p:nvSpPr>
-        <p:spPr>
-          <a:xfrm>
-            <a:off x="5084064" y="1783080"/>
-            <a:ext cx="2011680" cy="2743200"/>
-          </a:xfrm>
-          <a:prstGeom prst="rect">
-            <a:avLst/>
-          </a:prstGeom>
-          <a:solidFill>
-            <a:srgbClr val="FFFFFF"/>
-          </a:solidFill>
-          <a:ln w="9525">
-            <a:solidFill>
-              <a:srgbClr val="000000"/>
-            </a:solidFill>
-            <a:prstDash val="solid"/>
-          </a:ln>
-        </p:spPr>
-      </p:sp>
-      <p:sp>
-        <p:nvSpPr>
-          <p:cNvPr id="10" name="Text 8"/>
-          <p:cNvSpPr txBox="1"/>
-          <p:nvPr/>
-        </p:nvSpPr>
-        <p:spPr>
-          <a:xfrm>
-            <a:off x="5285232" y="1965960"/>
-            <a:ext cx="914400" cy="274320"/>
-          </a:xfrm>
-          <a:prstGeom prst="rect">
-            <a:avLst/>
-          </a:prstGeom>
-          <a:noFill/>
-          <a:ln/>
-        </p:spPr>
-        <p:txBody>
-          <a:bodyPr wrap="square" lIns="0" tIns="0" rIns="0" bIns="0" rtlCol="0" anchor="ctr"/>
-          <a:lstStyle/>
-          <a:p>
-            <a:pPr indent="0" marL="0">
-              <a:buNone/>
-            </a:pPr>
-            <a:r>
-              <a:rPr lang="en-US" sz="1200" dirty="0">
-                <a:solidFill>
-                  <a:srgbClr val="9CA3AF"/>
-                </a:solidFill>
-                <a:latin typeface="Arial" pitchFamily="34" charset="0"/>
-                <a:ea typeface="Arial" pitchFamily="34" charset="-122"/>
-                <a:cs typeface="Arial" pitchFamily="34" charset="-120"/>
-              </a:rPr>
-              <a:t>03</a:t>
-            </a:r>
-            <a:endParaRPr lang="en-US" sz="1200" dirty="0"/>
-          </a:p>
-        </p:txBody>
-      </p:sp>
-      <p:sp>
-        <p:nvSpPr>
-          <p:cNvPr id="11" name="Text 9"/>
-          <p:cNvSpPr txBox="1"/>
-          <p:nvPr/>
-        </p:nvSpPr>
-        <p:spPr>
-          <a:xfrm>
-            <a:off x="5285232" y="3246120"/>
-            <a:ext cx="1609344" cy="1097280"/>
-          </a:xfrm>
-          <a:prstGeom prst="rect">
-            <a:avLst/>
-          </a:prstGeom>
-          <a:noFill/>
-          <a:ln/>
-        </p:spPr>
-        <p:txBody>
-          <a:bodyPr wrap="square" lIns="0" tIns="0" rIns="0" bIns="0" rtlCol="0" anchor="b"/>
-          <a:lstStyle/>
-          <a:p>
-            <a:pPr indent="0" marL="0">
-              <a:lnSpc>
-                <a:spcPct val="115000"/>
-              </a:lnSpc>
-              <a:buNone/>
-            </a:pPr>
-            <a:r>
-              <a:rPr lang="en-US" sz="1400" dirty="0">
-                <a:solidFill>
-                  <a:srgbClr val="000000"/>
-                </a:solidFill>
-                <a:latin typeface="Arial" pitchFamily="34" charset="0"/>
-                <a:ea typeface="Arial" pitchFamily="34" charset="-122"/>
-                <a:cs typeface="Arial" pitchFamily="34" charset="-120"/>
-              </a:rPr>
-              <a:t>Хендбук сотрудника</a:t>
-            </a:r>
-            <a:endParaRPr lang="en-US" sz="1400" dirty="0"/>
-          </a:p>
-          <a:p>
-            <a:pPr indent="0" marL="0">
-              <a:lnSpc>
-                <a:spcPct val="115000"/>
-              </a:lnSpc>
-              <a:buNone/>
-            </a:pPr>
-            <a:r>
-              <a:rPr lang="en-US" sz="1400" dirty="0">
-                <a:solidFill>
-                  <a:srgbClr val="000000"/>
-                </a:solidFill>
-                <a:latin typeface="Arial" pitchFamily="34" charset="0"/>
-                <a:ea typeface="Arial" pitchFamily="34" charset="-122"/>
-                <a:cs typeface="Arial" pitchFamily="34" charset="-120"/>
-              </a:rPr>
-              <a:t>службы</a:t>
-            </a:r>
-            <a:endParaRPr lang="en-US" sz="1400" dirty="0"/>
-          </a:p>
-        </p:txBody>
-      </p:sp>
-      <p:sp>
-        <p:nvSpPr>
-          <p:cNvPr id="12" name="Shape 10"/>
-          <p:cNvSpPr/>
-          <p:nvPr/>
-        </p:nvSpPr>
-        <p:spPr>
-          <a:xfrm>
-            <a:off x="7306056" y="1783080"/>
-            <a:ext cx="2011680" cy="2743200"/>
-          </a:xfrm>
-          <a:prstGeom prst="rect">
-            <a:avLst/>
-          </a:prstGeom>
-          <a:solidFill>
-            <a:srgbClr val="FFFFFF"/>
-          </a:solidFill>
-          <a:ln w="9525">
-            <a:solidFill>
-              <a:srgbClr val="000000"/>
-            </a:solidFill>
-            <a:prstDash val="solid"/>
-          </a:ln>
-        </p:spPr>
-      </p:sp>
-      <p:sp>
-        <p:nvSpPr>
-          <p:cNvPr id="13" name="Text 11"/>
-          <p:cNvSpPr txBox="1"/>
-          <p:nvPr/>
-        </p:nvSpPr>
-        <p:spPr>
-          <a:xfrm>
-            <a:off x="7507224" y="1965960"/>
-            <a:ext cx="914400" cy="274320"/>
-          </a:xfrm>
-          <a:prstGeom prst="rect">
-            <a:avLst/>
-          </a:prstGeom>
-          <a:noFill/>
-          <a:ln/>
-        </p:spPr>
-        <p:txBody>
-          <a:bodyPr wrap="square" lIns="0" tIns="0" rIns="0" bIns="0" rtlCol="0" anchor="ctr"/>
-          <a:lstStyle/>
-          <a:p>
-            <a:pPr indent="0" marL="0">
-              <a:buNone/>
-            </a:pPr>
-            <a:r>
-              <a:rPr lang="en-US" sz="1200" dirty="0">
-                <a:solidFill>
-                  <a:srgbClr val="9CA3AF"/>
-                </a:solidFill>
-                <a:latin typeface="Arial" pitchFamily="34" charset="0"/>
-                <a:ea typeface="Arial" pitchFamily="34" charset="-122"/>
-                <a:cs typeface="Arial" pitchFamily="34" charset="-120"/>
-              </a:rPr>
-              <a:t>04</a:t>
-            </a:r>
-            <a:endParaRPr lang="en-US" sz="1200" dirty="0"/>
-          </a:p>
-        </p:txBody>
-      </p:sp>
-      <p:sp>
-        <p:nvSpPr>
-          <p:cNvPr id="14" name="Text 12"/>
-          <p:cNvSpPr txBox="1"/>
-          <p:nvPr/>
-        </p:nvSpPr>
-        <p:spPr>
-          <a:xfrm>
-            <a:off x="7507224" y="3246120"/>
-            <a:ext cx="1609344" cy="1097280"/>
-          </a:xfrm>
-          <a:prstGeom prst="rect">
-            <a:avLst/>
-          </a:prstGeom>
-          <a:noFill/>
-          <a:ln/>
-        </p:spPr>
-        <p:txBody>
-          <a:bodyPr wrap="square" lIns="0" tIns="0" rIns="0" bIns="0" rtlCol="0" anchor="b"/>
-          <a:lstStyle/>
-          <a:p>
-            <a:pPr indent="0" marL="0">
-              <a:lnSpc>
-                <a:spcPct val="115000"/>
-              </a:lnSpc>
-              <a:buNone/>
-            </a:pPr>
-            <a:r>
-              <a:rPr lang="en-US" sz="1400" dirty="0">
-                <a:solidFill>
-                  <a:srgbClr val="000000"/>
-                </a:solidFill>
-                <a:latin typeface="Arial" pitchFamily="34" charset="0"/>
-                <a:ea typeface="Arial" pitchFamily="34" charset="-122"/>
-                <a:cs typeface="Arial" pitchFamily="34" charset="-120"/>
-              </a:rPr>
-              <a:t>Регламент работы</a:t>
-            </a:r>
-            <a:endParaRPr lang="en-US" sz="1400" dirty="0"/>
-          </a:p>
-          <a:p>
-            <a:pPr indent="0" marL="0">
-              <a:lnSpc>
-                <a:spcPct val="115000"/>
-              </a:lnSpc>
-              <a:buNone/>
-            </a:pPr>
-            <a:r>
-              <a:rPr lang="en-US" sz="1400" dirty="0">
-                <a:solidFill>
-                  <a:srgbClr val="000000"/>
-                </a:solidFill>
-                <a:latin typeface="Arial" pitchFamily="34" charset="0"/>
-                <a:ea typeface="Arial" pitchFamily="34" charset="-122"/>
-                <a:cs typeface="Arial" pitchFamily="34" charset="-120"/>
-              </a:rPr>
-              <a:t>с обратной связью</a:t>
-            </a:r>
-            <a:endParaRPr lang="en-US" sz="1400" dirty="0"/>
-          </a:p>
-        </p:txBody>
-      </p:sp>
-      <p:sp>
-        <p:nvSpPr>
-          <p:cNvPr id="15" name="Shape 13"/>
-          <p:cNvSpPr/>
-          <p:nvPr/>
-        </p:nvSpPr>
-        <p:spPr>
-          <a:xfrm>
-            <a:off x="9528048" y="1783080"/>
-            <a:ext cx="2011680" cy="2743200"/>
-          </a:xfrm>
-          <a:prstGeom prst="rect">
-            <a:avLst/>
-          </a:prstGeom>
-          <a:solidFill>
-            <a:srgbClr val="FFFFFF"/>
-          </a:solidFill>
-          <a:ln w="9525">
-            <a:solidFill>
-              <a:srgbClr val="000000"/>
-            </a:solidFill>
-            <a:prstDash val="solid"/>
-          </a:ln>
-        </p:spPr>
-      </p:sp>
-      <p:sp>
-        <p:nvSpPr>
-          <p:cNvPr id="16" name="Text 14"/>
-          <p:cNvSpPr txBox="1"/>
-          <p:nvPr/>
-        </p:nvSpPr>
-        <p:spPr>
-          <a:xfrm>
-            <a:off x="9729216" y="1965960"/>
-            <a:ext cx="914400" cy="274320"/>
-          </a:xfrm>
-          <a:prstGeom prst="rect">
-            <a:avLst/>
-          </a:prstGeom>
-          <a:noFill/>
-          <a:ln/>
-        </p:spPr>
-        <p:txBody>
-          <a:bodyPr wrap="square" lIns="0" tIns="0" rIns="0" bIns="0" rtlCol="0" anchor="ctr"/>
-          <a:lstStyle/>
-          <a:p>
-            <a:pPr indent="0" marL="0">
-              <a:buNone/>
-            </a:pPr>
-            <a:r>
-              <a:rPr lang="en-US" sz="1200" dirty="0">
-                <a:solidFill>
-                  <a:srgbClr val="9CA3AF"/>
-                </a:solidFill>
-                <a:latin typeface="Arial" pitchFamily="34" charset="0"/>
-                <a:ea typeface="Arial" pitchFamily="34" charset="-122"/>
-                <a:cs typeface="Arial" pitchFamily="34" charset="-120"/>
-              </a:rPr>
-              <a:t>05</a:t>
-            </a:r>
-            <a:endParaRPr lang="en-US" sz="1200" dirty="0"/>
-          </a:p>
-        </p:txBody>
-      </p:sp>
-      <p:sp>
-        <p:nvSpPr>
-          <p:cNvPr id="17" name="Text 15"/>
-          <p:cNvSpPr txBox="1"/>
-          <p:nvPr/>
-        </p:nvSpPr>
-        <p:spPr>
-          <a:xfrm>
-            <a:off x="9729216" y="3246120"/>
-            <a:ext cx="1609344" cy="1097280"/>
-          </a:xfrm>
-          <a:prstGeom prst="rect">
-            <a:avLst/>
-          </a:prstGeom>
-          <a:noFill/>
-          <a:ln/>
-        </p:spPr>
-        <p:txBody>
-          <a:bodyPr wrap="square" lIns="0" tIns="0" rIns="0" bIns="0" rtlCol="0" anchor="b"/>
-          <a:lstStyle/>
-          <a:p>
-            <a:pPr indent="0" marL="0">
-              <a:lnSpc>
-                <a:spcPct val="115000"/>
-              </a:lnSpc>
-              <a:buNone/>
-            </a:pPr>
-            <a:r>
-              <a:rPr lang="en-US" sz="1400" dirty="0">
-                <a:solidFill>
-                  <a:srgbClr val="000000"/>
-                </a:solidFill>
-                <a:latin typeface="Arial" pitchFamily="34" charset="0"/>
-                <a:ea typeface="Arial" pitchFamily="34" charset="-122"/>
-                <a:cs typeface="Arial" pitchFamily="34" charset="-120"/>
-              </a:rPr>
-              <a:t>Матрица полномочий</a:t>
-            </a:r>
-            <a:endParaRPr lang="en-US" sz="1400" dirty="0"/>
-          </a:p>
-          <a:p>
-            <a:pPr indent="0" marL="0">
-              <a:lnSpc>
-                <a:spcPct val="115000"/>
-              </a:lnSpc>
-              <a:buNone/>
-            </a:pPr>
-            <a:r>
-              <a:rPr lang="en-US" sz="1400" dirty="0">
-                <a:solidFill>
-                  <a:srgbClr val="000000"/>
-                </a:solidFill>
-                <a:latin typeface="Arial" pitchFamily="34" charset="0"/>
-                <a:ea typeface="Arial" pitchFamily="34" charset="-122"/>
-                <a:cs typeface="Arial" pitchFamily="34" charset="-120"/>
-              </a:rPr>
-              <a:t>фронт-линии</a:t>
-            </a:r>
-            <a:endParaRPr lang="en-US" sz="1400" dirty="0"/>
-          </a:p>
-        </p:txBody>
-      </p:sp>
-      <p:sp>
-        <p:nvSpPr>
-          <p:cNvPr id="18" name="Text 16"/>
-          <p:cNvSpPr txBox="1"/>
-          <p:nvPr/>
-        </p:nvSpPr>
-        <p:spPr>
-          <a:xfrm>
-            <a:off x="640080" y="4892040"/>
-            <a:ext cx="10911535" cy="365760"/>
-          </a:xfrm>
-          <a:prstGeom prst="rect">
-            <a:avLst/>
-          </a:prstGeom>
-          <a:noFill/>
-          <a:ln/>
-        </p:spPr>
-        <p:txBody>
-          <a:bodyPr wrap="square" lIns="0" tIns="0" rIns="0" bIns="0" rtlCol="0" anchor="ctr"/>
-          <a:lstStyle/>
-          <a:p>
-            <a:pPr indent="0" marL="0">
-              <a:buNone/>
-            </a:pPr>
-            <a:r>
-              <a:rPr lang="en-US" sz="1400" i="1" dirty="0">
-                <a:solidFill>
-                  <a:srgbClr val="000000"/>
-                </a:solidFill>
-                <a:latin typeface="Arial" pitchFamily="34" charset="0"/>
-                <a:ea typeface="Arial" pitchFamily="34" charset="-122"/>
-                <a:cs typeface="Arial" pitchFamily="34" charset="-120"/>
-              </a:rPr>
-              <a:t>Стандарт обслуживания не пишется до аудита точек контакта</a:t>
-            </a:r>
-            <a:endParaRPr lang="en-US" sz="1400" dirty="0"/>
+              <a:t>Скриншот ges-2.org</a:t>
+            </a:r>
+            <a:endParaRPr lang="en-US" sz="1100" dirty="0"/>
           </a:p>
         </p:txBody>
       </p:sp>

--- a/docs/strategy/ges2-service-cx-proposal.pptx
+++ b/docs/strategy/ges2-service-cx-proposal.pptx
@@ -2652,7 +2652,7 @@
                 <a:ea typeface="Arial" pitchFamily="34" charset="-122"/>
                 <a:cs typeface="Arial" pitchFamily="34" charset="-120"/>
               </a:rPr>
-              <a:t>Наше понимание задачи</a:t>
+              <a:t>Понимание задачи</a:t>
             </a:r>
             <a:endParaRPr lang="en-US" sz="3000" dirty="0"/>
           </a:p>

--- a/docs/strategy/ges2-service-cx-proposal.pptx
+++ b/docs/strategy/ges2-service-cx-proposal.pptx
@@ -1392,7 +1392,7 @@
           <a:p>
             <a:r>
               <a:rPr lang="en-US" dirty="0"/>
-              <a:t>Скриншот главной страницы сайта. Снимается самостоятельно - из этой среды внешние сайты недоступны.</a:t>
+              <a:t>Главная страница ges-2.org. Две точки трения видны прямо на экране: бегущая строка с режимом работы, которую нельзя перечитать, и кнопка «Регистрация на вход» без визуального приоритета, хотя это главное целевое действие посетителя.</a:t>
             </a:r>
             <a:endParaRPr lang="en-US" dirty="0"/>
           </a:p>
@@ -7178,23 +7178,44 @@
           </a:p>
         </p:txBody>
       </p:sp>
-      <p:sp>
-        <p:nvSpPr>
-          <p:cNvPr id="4" name="Shape 2"/>
+      <p:pic>
+        <p:nvPicPr>
+          <p:cNvPr id="4" name="Image 0" descr="/home/user/ges-2/docs/strategy/deck-images/site.jpg">    </p:cNvPr>
+          <p:cNvPicPr>
+            <a:picLocks noChangeAspect="1"/>
+          </p:cNvPicPr>
+          <p:nvPr/>
+        </p:nvPicPr>
+        <p:blipFill>
+          <a:blip r:embed="rId1"/>
+          <a:stretch>
+            <a:fillRect/>
+          </a:stretch>
+        </p:blipFill>
+        <p:spPr>
+          <a:xfrm>
+            <a:off x="5852160" y="2377440"/>
+            <a:ext cx="5696712" cy="2757230"/>
+          </a:xfrm>
+          <a:prstGeom prst="rect">
+            <a:avLst/>
+          </a:prstGeom>
+        </p:spPr>
+      </p:pic>
+      <p:sp>
+        <p:nvSpPr>
+          <p:cNvPr id="5" name="Shape 2"/>
           <p:cNvSpPr/>
           <p:nvPr/>
         </p:nvSpPr>
         <p:spPr>
           <a:xfrm>
-            <a:off x="5852160" y="2011680"/>
-            <a:ext cx="5696712" cy="3797808"/>
-          </a:xfrm>
-          <a:prstGeom prst="rect">
-            <a:avLst/>
-          </a:prstGeom>
-          <a:solidFill>
-            <a:srgbClr val="EEEEEE"/>
-          </a:solidFill>
+            <a:off x="5852160" y="2377440"/>
+            <a:ext cx="5696712" cy="2757230"/>
+          </a:xfrm>
+          <a:prstGeom prst="rect">
+            <a:avLst/>
+          </a:prstGeom>
           <a:ln w="6350">
             <a:solidFill>
               <a:srgbClr val="000000"/>
@@ -7202,45 +7223,6 @@
             <a:prstDash val="solid"/>
           </a:ln>
         </p:spPr>
-      </p:sp>
-      <p:sp>
-        <p:nvSpPr>
-          <p:cNvPr id="5" name="Text 3"/>
-          <p:cNvSpPr txBox="1"/>
-          <p:nvPr/>
-        </p:nvSpPr>
-        <p:spPr>
-          <a:xfrm>
-            <a:off x="6035040" y="3499104"/>
-            <a:ext cx="5330952" cy="822960"/>
-          </a:xfrm>
-          <a:prstGeom prst="rect">
-            <a:avLst/>
-          </a:prstGeom>
-          <a:noFill/>
-          <a:ln/>
-        </p:spPr>
-        <p:txBody>
-          <a:bodyPr wrap="square" lIns="0" tIns="0" rIns="0" bIns="0" rtlCol="0" anchor="ctr"/>
-          <a:lstStyle/>
-          <a:p>
-            <a:pPr algn="ctr" indent="0" marL="0">
-              <a:buNone/>
-            </a:pPr>
-            <a:r>
-              <a:rPr lang="en-US" sz="1100" dirty="0">
-                <a:solidFill>
-                  <a:srgbClr val="9CA3AF"/>
-                </a:solidFill>
-                <a:latin typeface="Arial" pitchFamily="34" charset="0"/>
-                <a:ea typeface="Arial" pitchFamily="34" charset="-122"/>
-                <a:cs typeface="Arial" pitchFamily="34" charset="-120"/>
-              </a:rPr>
-              <a:t>Скриншот ges-2.org</a:t>
-            </a:r>
-            <a:endParaRPr lang="en-US" sz="1100" dirty="0"/>
-          </a:p>
-        </p:txBody>
       </p:sp>
     </p:spTree>
   </p:cSld>

--- a/docs/strategy/ges2-service-cx-proposal.pptx
+++ b/docs/strategy/ges2-service-cx-proposal.pptx
@@ -2024,7 +2024,7 @@
         <p:spPr>
           <a:xfrm>
             <a:off x="640080" y="457200"/>
-            <a:ext cx="10911535" cy="731520"/>
+            <a:ext cx="9144000" cy="731520"/>
           </a:xfrm>
           <a:prstGeom prst="rect">
             <a:avLst/>
@@ -2057,6 +2057,45 @@
       <p:sp>
         <p:nvSpPr>
           <p:cNvPr id="3" name="Text 1"/>
+          <p:cNvSpPr txBox="1"/>
+          <p:nvPr/>
+        </p:nvSpPr>
+        <p:spPr>
+          <a:xfrm>
+            <a:off x="9722815" y="566928"/>
+            <a:ext cx="1828800" cy="274320"/>
+          </a:xfrm>
+          <a:prstGeom prst="rect">
+            <a:avLst/>
+          </a:prstGeom>
+          <a:noFill/>
+          <a:ln/>
+        </p:spPr>
+        <p:txBody>
+          <a:bodyPr wrap="square" lIns="0" tIns="0" rIns="0" bIns="0" rtlCol="0" anchor="ctr"/>
+          <a:lstStyle/>
+          <a:p>
+            <a:pPr algn="r" indent="0" marL="0">
+              <a:buNone/>
+            </a:pPr>
+            <a:r>
+              <a:rPr lang="en-US" sz="1200" dirty="0">
+                <a:solidFill>
+                  <a:srgbClr val="9CA3AF"/>
+                </a:solidFill>
+                <a:latin typeface="Arial" pitchFamily="34" charset="0"/>
+                <a:ea typeface="Arial" pitchFamily="34" charset="-122"/>
+                <a:cs typeface="Arial" pitchFamily="34" charset="-120"/>
+              </a:rPr>
+              <a:t>10 / 11</a:t>
+            </a:r>
+            <a:endParaRPr lang="en-US" sz="1200" dirty="0"/>
+          </a:p>
+        </p:txBody>
+      </p:sp>
+      <p:sp>
+        <p:nvSpPr>
+          <p:cNvPr id="4" name="Text 2"/>
           <p:cNvSpPr txBox="1"/>
           <p:nvPr/>
         </p:nvSpPr>
@@ -2150,7 +2189,7 @@
       </p:sp>
       <p:pic>
         <p:nvPicPr>
-          <p:cNvPr id="4" name="Image 0" descr="/home/user/ges-2/docs/strategy/deck-images/platforms.jpg">    </p:cNvPr>
+          <p:cNvPr id="5" name="Image 0" descr="/home/user/ges-2/docs/strategy/deck-images/platforms.jpg">    </p:cNvPr>
           <p:cNvPicPr>
             <a:picLocks noChangeAspect="1"/>
           </p:cNvPicPr>
@@ -2174,7 +2213,7 @@
       </p:pic>
       <p:sp>
         <p:nvSpPr>
-          <p:cNvPr id="5" name="Shape 2"/>
+          <p:cNvPr id="6" name="Shape 3"/>
           <p:cNvSpPr/>
           <p:nvPr/>
         </p:nvSpPr>
@@ -2228,7 +2267,7 @@
         <p:spPr>
           <a:xfrm>
             <a:off x="640080" y="457200"/>
-            <a:ext cx="10911535" cy="731520"/>
+            <a:ext cx="9144000" cy="731520"/>
           </a:xfrm>
           <a:prstGeom prst="rect">
             <a:avLst/>
@@ -2266,6 +2305,45 @@
         </p:nvSpPr>
         <p:spPr>
           <a:xfrm>
+            <a:off x="9722815" y="566928"/>
+            <a:ext cx="1828800" cy="274320"/>
+          </a:xfrm>
+          <a:prstGeom prst="rect">
+            <a:avLst/>
+          </a:prstGeom>
+          <a:noFill/>
+          <a:ln/>
+        </p:spPr>
+        <p:txBody>
+          <a:bodyPr wrap="square" lIns="0" tIns="0" rIns="0" bIns="0" rtlCol="0" anchor="ctr"/>
+          <a:lstStyle/>
+          <a:p>
+            <a:pPr algn="r" indent="0" marL="0">
+              <a:buNone/>
+            </a:pPr>
+            <a:r>
+              <a:rPr lang="en-US" sz="1200" dirty="0">
+                <a:solidFill>
+                  <a:srgbClr val="9CA3AF"/>
+                </a:solidFill>
+                <a:latin typeface="Arial" pitchFamily="34" charset="0"/>
+                <a:ea typeface="Arial" pitchFamily="34" charset="-122"/>
+                <a:cs typeface="Arial" pitchFamily="34" charset="-120"/>
+              </a:rPr>
+              <a:t>11 / 11</a:t>
+            </a:r>
+            <a:endParaRPr lang="en-US" sz="1200" dirty="0"/>
+          </a:p>
+        </p:txBody>
+      </p:sp>
+      <p:sp>
+        <p:nvSpPr>
+          <p:cNvPr id="4" name="Text 2"/>
+          <p:cNvSpPr txBox="1"/>
+          <p:nvPr/>
+        </p:nvSpPr>
+        <p:spPr>
+          <a:xfrm>
             <a:off x="640080" y="1783080"/>
             <a:ext cx="3474720" cy="320040"/>
           </a:xfrm>
@@ -2299,7 +2377,7 @@
       </p:sp>
       <p:sp>
         <p:nvSpPr>
-          <p:cNvPr id="4" name="Text 2"/>
+          <p:cNvPr id="5" name="Text 3"/>
           <p:cNvSpPr txBox="1"/>
           <p:nvPr/>
         </p:nvSpPr>
@@ -2369,7 +2447,7 @@
       </p:sp>
       <p:sp>
         <p:nvSpPr>
-          <p:cNvPr id="5" name="Text 3"/>
+          <p:cNvPr id="6" name="Text 4"/>
           <p:cNvSpPr txBox="1"/>
           <p:nvPr/>
         </p:nvSpPr>
@@ -2408,7 +2486,7 @@
       </p:sp>
       <p:sp>
         <p:nvSpPr>
-          <p:cNvPr id="6" name="Text 4"/>
+          <p:cNvPr id="7" name="Text 5"/>
           <p:cNvSpPr txBox="1"/>
           <p:nvPr/>
         </p:nvSpPr>
@@ -2550,7 +2628,7 @@
       </p:sp>
       <p:pic>
         <p:nvPicPr>
-          <p:cNvPr id="7" name="Image 0" descr="/home/user/ges-2/docs/strategy/deck-images/books.jpg">    </p:cNvPr>
+          <p:cNvPr id="8" name="Image 0" descr="/home/user/ges-2/docs/strategy/deck-images/books.jpg">    </p:cNvPr>
           <p:cNvPicPr>
             <a:picLocks noChangeAspect="1"/>
           </p:cNvPicPr>
@@ -2574,7 +2652,7 @@
       </p:pic>
       <p:sp>
         <p:nvSpPr>
-          <p:cNvPr id="8" name="Shape 5"/>
+          <p:cNvPr id="9" name="Shape 6"/>
           <p:cNvSpPr/>
           <p:nvPr/>
         </p:nvSpPr>
@@ -2628,7 +2706,7 @@
         <p:spPr>
           <a:xfrm>
             <a:off x="640080" y="457200"/>
-            <a:ext cx="10911535" cy="731520"/>
+            <a:ext cx="9144000" cy="731520"/>
           </a:xfrm>
           <a:prstGeom prst="rect">
             <a:avLst/>
@@ -2661,6 +2739,45 @@
       <p:sp>
         <p:nvSpPr>
           <p:cNvPr id="3" name="Text 1"/>
+          <p:cNvSpPr txBox="1"/>
+          <p:nvPr/>
+        </p:nvSpPr>
+        <p:spPr>
+          <a:xfrm>
+            <a:off x="9722815" y="566928"/>
+            <a:ext cx="1828800" cy="274320"/>
+          </a:xfrm>
+          <a:prstGeom prst="rect">
+            <a:avLst/>
+          </a:prstGeom>
+          <a:noFill/>
+          <a:ln/>
+        </p:spPr>
+        <p:txBody>
+          <a:bodyPr wrap="square" lIns="0" tIns="0" rIns="0" bIns="0" rtlCol="0" anchor="ctr"/>
+          <a:lstStyle/>
+          <a:p>
+            <a:pPr algn="r" indent="0" marL="0">
+              <a:buNone/>
+            </a:pPr>
+            <a:r>
+              <a:rPr lang="en-US" sz="1200" dirty="0">
+                <a:solidFill>
+                  <a:srgbClr val="9CA3AF"/>
+                </a:solidFill>
+                <a:latin typeface="Arial" pitchFamily="34" charset="0"/>
+                <a:ea typeface="Arial" pitchFamily="34" charset="-122"/>
+                <a:cs typeface="Arial" pitchFamily="34" charset="-120"/>
+              </a:rPr>
+              <a:t>2 / 11</a:t>
+            </a:r>
+            <a:endParaRPr lang="en-US" sz="1200" dirty="0"/>
+          </a:p>
+        </p:txBody>
+      </p:sp>
+      <p:sp>
+        <p:nvSpPr>
+          <p:cNvPr id="4" name="Text 2"/>
           <p:cNvSpPr txBox="1"/>
           <p:nvPr/>
         </p:nvSpPr>
@@ -2714,7 +2831,7 @@
                 <a:ea typeface="Arial" pitchFamily="34" charset="-122"/>
                 <a:cs typeface="Arial" pitchFamily="34" charset="-120"/>
               </a:rPr>
-              <a:t>ради чего существует сервис</a:t>
+              <a:t>что поддерживает сервис</a:t>
             </a:r>
             <a:endParaRPr lang="en-US" sz="1800" dirty="0"/>
           </a:p>
@@ -2722,7 +2839,7 @@
       </p:sp>
       <p:sp>
         <p:nvSpPr>
-          <p:cNvPr id="4" name="Shape 2"/>
+          <p:cNvPr id="5" name="Shape 3"/>
           <p:cNvSpPr/>
           <p:nvPr/>
         </p:nvSpPr>
@@ -2745,7 +2862,7 @@
       </p:sp>
       <p:sp>
         <p:nvSpPr>
-          <p:cNvPr id="5" name="Text 3"/>
+          <p:cNvPr id="6" name="Text 4"/>
           <p:cNvSpPr txBox="1"/>
           <p:nvPr/>
         </p:nvSpPr>
@@ -2779,7 +2896,7 @@
                 <a:ea typeface="Arial" pitchFamily="34" charset="-122"/>
                 <a:cs typeface="Arial" pitchFamily="34" charset="-120"/>
               </a:rPr>
-              <a:t>Сервис не создаёт доверие,</a:t>
+              <a:t>Исполнение сервиса требует</a:t>
             </a:r>
             <a:endParaRPr lang="en-US" sz="1800" dirty="0"/>
           </a:p>
@@ -2799,7 +2916,7 @@
                 <a:ea typeface="Arial" pitchFamily="34" charset="-122"/>
                 <a:cs typeface="Arial" pitchFamily="34" charset="-120"/>
               </a:rPr>
-              <a:t>он его исполняет и конвертирует</a:t>
+              <a:t>единых стандартов и дисциплины</a:t>
             </a:r>
             <a:endParaRPr lang="en-US" sz="1800" dirty="0"/>
           </a:p>
@@ -2807,7 +2924,7 @@
       </p:sp>
       <p:sp>
         <p:nvSpPr>
-          <p:cNvPr id="6" name="Shape 4"/>
+          <p:cNvPr id="7" name="Shape 5"/>
           <p:cNvSpPr/>
           <p:nvPr/>
         </p:nvSpPr>
@@ -2830,7 +2947,7 @@
       </p:sp>
       <p:sp>
         <p:nvSpPr>
-          <p:cNvPr id="7" name="Text 5"/>
+          <p:cNvPr id="8" name="Text 6"/>
           <p:cNvSpPr txBox="1"/>
           <p:nvPr/>
         </p:nvSpPr>
@@ -2864,7 +2981,7 @@
                 <a:ea typeface="Arial" pitchFamily="34" charset="-122"/>
                 <a:cs typeface="Arial" pitchFamily="34" charset="-120"/>
               </a:rPr>
-              <a:t>Периметр - весь путь, от поиска</a:t>
+              <a:t>Постепенный переход к модели</a:t>
             </a:r>
             <a:endParaRPr lang="en-US" sz="1800" dirty="0"/>
           </a:p>
@@ -2884,7 +3001,7 @@
                 <a:ea typeface="Arial" pitchFamily="34" charset="-122"/>
                 <a:cs typeface="Arial" pitchFamily="34" charset="-120"/>
               </a:rPr>
-              <a:t>информации до выхода из здания</a:t>
+              <a:t>частичной окупаемости находится в фокусе</a:t>
             </a:r>
             <a:endParaRPr lang="en-US" sz="1800" dirty="0"/>
           </a:p>
@@ -2892,7 +3009,7 @@
       </p:sp>
       <p:pic>
         <p:nvPicPr>
-          <p:cNvPr id="8" name="Image 0" descr="/home/user/ges-2/docs/strategy/deck-images/facade.jpg">    </p:cNvPr>
+          <p:cNvPr id="9" name="Image 0" descr="/home/user/ges-2/docs/strategy/deck-images/facade.jpg">    </p:cNvPr>
           <p:cNvPicPr>
             <a:picLocks noChangeAspect="1"/>
           </p:cNvPicPr>
@@ -2916,7 +3033,7 @@
       </p:pic>
       <p:sp>
         <p:nvSpPr>
-          <p:cNvPr id="9" name="Shape 6"/>
+          <p:cNvPr id="10" name="Shape 7"/>
           <p:cNvSpPr/>
           <p:nvPr/>
         </p:nvSpPr>
@@ -2970,7 +3087,7 @@
         <p:spPr>
           <a:xfrm>
             <a:off x="640080" y="457200"/>
-            <a:ext cx="10911535" cy="731520"/>
+            <a:ext cx="9144000" cy="731520"/>
           </a:xfrm>
           <a:prstGeom prst="rect">
             <a:avLst/>
@@ -3008,6 +3125,45 @@
         </p:nvSpPr>
         <p:spPr>
           <a:xfrm>
+            <a:off x="9722815" y="566928"/>
+            <a:ext cx="1828800" cy="274320"/>
+          </a:xfrm>
+          <a:prstGeom prst="rect">
+            <a:avLst/>
+          </a:prstGeom>
+          <a:noFill/>
+          <a:ln/>
+        </p:spPr>
+        <p:txBody>
+          <a:bodyPr wrap="square" lIns="0" tIns="0" rIns="0" bIns="0" rtlCol="0" anchor="ctr"/>
+          <a:lstStyle/>
+          <a:p>
+            <a:pPr algn="r" indent="0" marL="0">
+              <a:buNone/>
+            </a:pPr>
+            <a:r>
+              <a:rPr lang="en-US" sz="1200" dirty="0">
+                <a:solidFill>
+                  <a:srgbClr val="9CA3AF"/>
+                </a:solidFill>
+                <a:latin typeface="Arial" pitchFamily="34" charset="0"/>
+                <a:ea typeface="Arial" pitchFamily="34" charset="-122"/>
+                <a:cs typeface="Arial" pitchFamily="34" charset="-120"/>
+              </a:rPr>
+              <a:t>3 / 11</a:t>
+            </a:r>
+            <a:endParaRPr lang="en-US" sz="1200" dirty="0"/>
+          </a:p>
+        </p:txBody>
+      </p:sp>
+      <p:sp>
+        <p:nvSpPr>
+          <p:cNvPr id="4" name="Text 2"/>
+          <p:cNvSpPr txBox="1"/>
+          <p:nvPr/>
+        </p:nvSpPr>
+        <p:spPr>
+          <a:xfrm>
             <a:off x="640080" y="1737360"/>
             <a:ext cx="548640" cy="365760"/>
           </a:xfrm>
@@ -3041,7 +3197,7 @@
       </p:sp>
       <p:sp>
         <p:nvSpPr>
-          <p:cNvPr id="4" name="Text 2"/>
+          <p:cNvPr id="5" name="Text 3"/>
           <p:cNvSpPr txBox="1"/>
           <p:nvPr/>
         </p:nvSpPr>
@@ -3072,7 +3228,7 @@
                 <a:ea typeface="Arial" pitchFamily="34" charset="-122"/>
                 <a:cs typeface="Arial" pitchFamily="34" charset="-120"/>
               </a:rPr>
-              <a:t>Горизонтальные связи</a:t>
+              <a:t>Как выстраивается взаимодействие</a:t>
             </a:r>
             <a:endParaRPr lang="en-US" sz="1600" dirty="0"/>
           </a:p>
@@ -3080,7 +3236,7 @@
       </p:sp>
       <p:sp>
         <p:nvSpPr>
-          <p:cNvPr id="5" name="Shape 3"/>
+          <p:cNvPr id="6" name="Shape 4"/>
           <p:cNvSpPr/>
           <p:nvPr/>
         </p:nvSpPr>
@@ -3103,7 +3259,7 @@
       </p:sp>
       <p:sp>
         <p:nvSpPr>
-          <p:cNvPr id="6" name="Text 4"/>
+          <p:cNvPr id="7" name="Text 5"/>
           <p:cNvSpPr txBox="1"/>
           <p:nvPr/>
         </p:nvSpPr>
@@ -3142,7 +3298,7 @@
       </p:sp>
       <p:sp>
         <p:nvSpPr>
-          <p:cNvPr id="7" name="Text 5"/>
+          <p:cNvPr id="8" name="Text 6"/>
           <p:cNvSpPr txBox="1"/>
           <p:nvPr/>
         </p:nvSpPr>
@@ -3181,7 +3337,7 @@
       </p:sp>
       <p:sp>
         <p:nvSpPr>
-          <p:cNvPr id="8" name="Shape 6"/>
+          <p:cNvPr id="9" name="Shape 7"/>
           <p:cNvSpPr/>
           <p:nvPr/>
         </p:nvSpPr>
@@ -3204,7 +3360,7 @@
       </p:sp>
       <p:sp>
         <p:nvSpPr>
-          <p:cNvPr id="9" name="Text 7"/>
+          <p:cNvPr id="10" name="Text 8"/>
           <p:cNvSpPr txBox="1"/>
           <p:nvPr/>
         </p:nvSpPr>
@@ -3243,7 +3399,7 @@
       </p:sp>
       <p:sp>
         <p:nvSpPr>
-          <p:cNvPr id="10" name="Text 8"/>
+          <p:cNvPr id="11" name="Text 9"/>
           <p:cNvSpPr txBox="1"/>
           <p:nvPr/>
         </p:nvSpPr>
@@ -3282,7 +3438,7 @@
       </p:sp>
       <p:sp>
         <p:nvSpPr>
-          <p:cNvPr id="11" name="Shape 9"/>
+          <p:cNvPr id="12" name="Shape 10"/>
           <p:cNvSpPr/>
           <p:nvPr/>
         </p:nvSpPr>
@@ -3305,7 +3461,7 @@
       </p:sp>
       <p:sp>
         <p:nvSpPr>
-          <p:cNvPr id="12" name="Text 10"/>
+          <p:cNvPr id="13" name="Text 11"/>
           <p:cNvSpPr txBox="1"/>
           <p:nvPr/>
         </p:nvSpPr>
@@ -3344,7 +3500,7 @@
       </p:sp>
       <p:sp>
         <p:nvSpPr>
-          <p:cNvPr id="13" name="Text 11"/>
+          <p:cNvPr id="14" name="Text 12"/>
           <p:cNvSpPr txBox="1"/>
           <p:nvPr/>
         </p:nvSpPr>
@@ -3383,7 +3539,7 @@
       </p:sp>
       <p:sp>
         <p:nvSpPr>
-          <p:cNvPr id="14" name="Shape 12"/>
+          <p:cNvPr id="15" name="Shape 13"/>
           <p:cNvSpPr/>
           <p:nvPr/>
         </p:nvSpPr>
@@ -3406,7 +3562,7 @@
       </p:sp>
       <p:sp>
         <p:nvSpPr>
-          <p:cNvPr id="15" name="Text 13"/>
+          <p:cNvPr id="16" name="Text 14"/>
           <p:cNvSpPr txBox="1"/>
           <p:nvPr/>
         </p:nvSpPr>
@@ -3445,7 +3601,7 @@
       </p:sp>
       <p:sp>
         <p:nvSpPr>
-          <p:cNvPr id="16" name="Text 14"/>
+          <p:cNvPr id="17" name="Text 15"/>
           <p:cNvSpPr txBox="1"/>
           <p:nvPr/>
         </p:nvSpPr>
@@ -3484,7 +3640,7 @@
       </p:sp>
       <p:sp>
         <p:nvSpPr>
-          <p:cNvPr id="17" name="Shape 15"/>
+          <p:cNvPr id="18" name="Shape 16"/>
           <p:cNvSpPr/>
           <p:nvPr/>
         </p:nvSpPr>
@@ -3507,7 +3663,7 @@
       </p:sp>
       <p:sp>
         <p:nvSpPr>
-          <p:cNvPr id="18" name="Text 16"/>
+          <p:cNvPr id="19" name="Text 17"/>
           <p:cNvSpPr txBox="1"/>
           <p:nvPr/>
         </p:nvSpPr>
@@ -3546,7 +3702,7 @@
       </p:sp>
       <p:sp>
         <p:nvSpPr>
-          <p:cNvPr id="19" name="Text 17"/>
+          <p:cNvPr id="20" name="Text 18"/>
           <p:cNvSpPr txBox="1"/>
           <p:nvPr/>
         </p:nvSpPr>
@@ -3585,7 +3741,7 @@
       </p:sp>
       <p:sp>
         <p:nvSpPr>
-          <p:cNvPr id="20" name="Shape 18"/>
+          <p:cNvPr id="21" name="Shape 19"/>
           <p:cNvSpPr/>
           <p:nvPr/>
         </p:nvSpPr>
@@ -3608,7 +3764,7 @@
       </p:sp>
       <p:sp>
         <p:nvSpPr>
-          <p:cNvPr id="21" name="Text 19"/>
+          <p:cNvPr id="22" name="Text 20"/>
           <p:cNvSpPr txBox="1"/>
           <p:nvPr/>
         </p:nvSpPr>
@@ -3647,7 +3803,7 @@
       </p:sp>
       <p:sp>
         <p:nvSpPr>
-          <p:cNvPr id="22" name="Text 20"/>
+          <p:cNvPr id="23" name="Text 21"/>
           <p:cNvSpPr txBox="1"/>
           <p:nvPr/>
         </p:nvSpPr>
@@ -3686,7 +3842,7 @@
       </p:sp>
       <p:sp>
         <p:nvSpPr>
-          <p:cNvPr id="23" name="Shape 21"/>
+          <p:cNvPr id="24" name="Shape 22"/>
           <p:cNvSpPr/>
           <p:nvPr/>
         </p:nvSpPr>
@@ -3709,7 +3865,7 @@
       </p:sp>
       <p:sp>
         <p:nvSpPr>
-          <p:cNvPr id="24" name="Text 22"/>
+          <p:cNvPr id="25" name="Text 23"/>
           <p:cNvSpPr txBox="1"/>
           <p:nvPr/>
         </p:nvSpPr>
@@ -3748,7 +3904,7 @@
       </p:sp>
       <p:sp>
         <p:nvSpPr>
-          <p:cNvPr id="25" name="Text 23"/>
+          <p:cNvPr id="26" name="Text 24"/>
           <p:cNvSpPr txBox="1"/>
           <p:nvPr/>
         </p:nvSpPr>
@@ -3787,7 +3943,7 @@
       </p:sp>
       <p:sp>
         <p:nvSpPr>
-          <p:cNvPr id="26" name="Shape 24"/>
+          <p:cNvPr id="27" name="Shape 25"/>
           <p:cNvSpPr/>
           <p:nvPr/>
         </p:nvSpPr>
@@ -3810,7 +3966,7 @@
       </p:sp>
       <p:pic>
         <p:nvPicPr>
-          <p:cNvPr id="27" name="Image 0" descr="/home/user/ges-2/docs/strategy/deck-images/prospekt.jpg">    </p:cNvPr>
+          <p:cNvPr id="28" name="Image 0" descr="/home/user/ges-2/docs/strategy/deck-images/prospekt.jpg">    </p:cNvPr>
           <p:cNvPicPr>
             <a:picLocks noChangeAspect="1"/>
           </p:cNvPicPr>
@@ -3834,7 +3990,7 @@
       </p:pic>
       <p:sp>
         <p:nvSpPr>
-          <p:cNvPr id="28" name="Shape 25"/>
+          <p:cNvPr id="29" name="Shape 26"/>
           <p:cNvSpPr/>
           <p:nvPr/>
         </p:nvSpPr>
@@ -3888,7 +4044,7 @@
         <p:spPr>
           <a:xfrm>
             <a:off x="640080" y="457200"/>
-            <a:ext cx="10911535" cy="731520"/>
+            <a:ext cx="9144000" cy="731520"/>
           </a:xfrm>
           <a:prstGeom prst="rect">
             <a:avLst/>
@@ -3915,12 +4071,51 @@
               <a:t>Как выстраивается взаимодействие</a:t>
             </a:r>
             <a:endParaRPr lang="en-US" sz="3000" dirty="0"/>
+          </a:p>
+        </p:txBody>
+      </p:sp>
+      <p:sp>
+        <p:nvSpPr>
+          <p:cNvPr id="3" name="Text 1"/>
+          <p:cNvSpPr txBox="1"/>
+          <p:nvPr/>
+        </p:nvSpPr>
+        <p:spPr>
+          <a:xfrm>
+            <a:off x="9722815" y="566928"/>
+            <a:ext cx="1828800" cy="274320"/>
+          </a:xfrm>
+          <a:prstGeom prst="rect">
+            <a:avLst/>
+          </a:prstGeom>
+          <a:noFill/>
+          <a:ln/>
+        </p:spPr>
+        <p:txBody>
+          <a:bodyPr wrap="square" lIns="0" tIns="0" rIns="0" bIns="0" rtlCol="0" anchor="ctr"/>
+          <a:lstStyle/>
+          <a:p>
+            <a:pPr algn="r" indent="0" marL="0">
+              <a:buNone/>
+            </a:pPr>
+            <a:r>
+              <a:rPr lang="en-US" sz="1200" dirty="0">
+                <a:solidFill>
+                  <a:srgbClr val="9CA3AF"/>
+                </a:solidFill>
+                <a:latin typeface="Arial" pitchFamily="34" charset="0"/>
+                <a:ea typeface="Arial" pitchFamily="34" charset="-122"/>
+                <a:cs typeface="Arial" pitchFamily="34" charset="-120"/>
+              </a:rPr>
+              <a:t>4 / 11</a:t>
+            </a:r>
+            <a:endParaRPr lang="en-US" sz="1200" dirty="0"/>
           </a:p>
         </p:txBody>
       </p:sp>
       <p:pic>
         <p:nvPicPr>
-          <p:cNvPr id="3" name="Image 0" descr="/home/user/ges-2/docs/strategy/deck-images/svody.jpg">    </p:cNvPr>
+          <p:cNvPr id="4" name="Image 0" descr="/home/user/ges-2/docs/strategy/deck-images/svody.jpg">    </p:cNvPr>
           <p:cNvPicPr>
             <a:picLocks noChangeAspect="1"/>
           </p:cNvPicPr>
@@ -3944,7 +4139,7 @@
       </p:pic>
       <p:sp>
         <p:nvSpPr>
-          <p:cNvPr id="4" name="Shape 1"/>
+          <p:cNvPr id="5" name="Shape 2"/>
           <p:cNvSpPr/>
           <p:nvPr/>
         </p:nvSpPr>
@@ -3966,7 +4161,7 @@
       </p:sp>
       <p:sp>
         <p:nvSpPr>
-          <p:cNvPr id="5" name="Text 2"/>
+          <p:cNvPr id="6" name="Text 3"/>
           <p:cNvSpPr txBox="1"/>
           <p:nvPr/>
         </p:nvSpPr>
@@ -4140,7 +4335,7 @@
         <p:spPr>
           <a:xfrm>
             <a:off x="640080" y="457200"/>
-            <a:ext cx="10911535" cy="731520"/>
+            <a:ext cx="9144000" cy="731520"/>
           </a:xfrm>
           <a:prstGeom prst="rect">
             <a:avLst/>
@@ -4178,6 +4373,45 @@
         </p:nvSpPr>
         <p:spPr>
           <a:xfrm>
+            <a:off x="9722815" y="566928"/>
+            <a:ext cx="1828800" cy="274320"/>
+          </a:xfrm>
+          <a:prstGeom prst="rect">
+            <a:avLst/>
+          </a:prstGeom>
+          <a:noFill/>
+          <a:ln/>
+        </p:spPr>
+        <p:txBody>
+          <a:bodyPr wrap="square" lIns="0" tIns="0" rIns="0" bIns="0" rtlCol="0" anchor="ctr"/>
+          <a:lstStyle/>
+          <a:p>
+            <a:pPr algn="r" indent="0" marL="0">
+              <a:buNone/>
+            </a:pPr>
+            <a:r>
+              <a:rPr lang="en-US" sz="1200" dirty="0">
+                <a:solidFill>
+                  <a:srgbClr val="9CA3AF"/>
+                </a:solidFill>
+                <a:latin typeface="Arial" pitchFamily="34" charset="0"/>
+                <a:ea typeface="Arial" pitchFamily="34" charset="-122"/>
+                <a:cs typeface="Arial" pitchFamily="34" charset="-120"/>
+              </a:rPr>
+              <a:t>5 / 11</a:t>
+            </a:r>
+            <a:endParaRPr lang="en-US" sz="1200" dirty="0"/>
+          </a:p>
+        </p:txBody>
+      </p:sp>
+      <p:sp>
+        <p:nvSpPr>
+          <p:cNvPr id="4" name="Text 2"/>
+          <p:cNvSpPr txBox="1"/>
+          <p:nvPr/>
+        </p:nvSpPr>
+        <p:spPr>
+          <a:xfrm>
             <a:off x="640080" y="1837944"/>
             <a:ext cx="457200" cy="457200"/>
           </a:xfrm>
@@ -4211,7 +4445,7 @@
       </p:sp>
       <p:sp>
         <p:nvSpPr>
-          <p:cNvPr id="4" name="Text 2"/>
+          <p:cNvPr id="5" name="Text 3"/>
           <p:cNvSpPr txBox="1"/>
           <p:nvPr/>
         </p:nvSpPr>
@@ -4253,7 +4487,7 @@
       </p:sp>
       <p:sp>
         <p:nvSpPr>
-          <p:cNvPr id="5" name="Text 3"/>
+          <p:cNvPr id="6" name="Text 4"/>
           <p:cNvSpPr txBox="1"/>
           <p:nvPr/>
         </p:nvSpPr>
@@ -4292,7 +4526,7 @@
       </p:sp>
       <p:sp>
         <p:nvSpPr>
-          <p:cNvPr id="6" name="Text 4"/>
+          <p:cNvPr id="7" name="Text 5"/>
           <p:cNvSpPr txBox="1"/>
           <p:nvPr/>
         </p:nvSpPr>
@@ -4334,7 +4568,7 @@
       </p:sp>
       <p:sp>
         <p:nvSpPr>
-          <p:cNvPr id="7" name="Text 5"/>
+          <p:cNvPr id="8" name="Text 6"/>
           <p:cNvSpPr txBox="1"/>
           <p:nvPr/>
         </p:nvSpPr>
@@ -4373,7 +4607,7 @@
       </p:sp>
       <p:sp>
         <p:nvSpPr>
-          <p:cNvPr id="8" name="Text 6"/>
+          <p:cNvPr id="9" name="Text 7"/>
           <p:cNvSpPr txBox="1"/>
           <p:nvPr/>
         </p:nvSpPr>
@@ -4415,7 +4649,7 @@
       </p:sp>
       <p:sp>
         <p:nvSpPr>
-          <p:cNvPr id="9" name="Text 7"/>
+          <p:cNvPr id="10" name="Text 8"/>
           <p:cNvSpPr txBox="1"/>
           <p:nvPr/>
         </p:nvSpPr>
@@ -4454,7 +4688,7 @@
       </p:sp>
       <p:sp>
         <p:nvSpPr>
-          <p:cNvPr id="10" name="Text 8"/>
+          <p:cNvPr id="11" name="Text 9"/>
           <p:cNvSpPr txBox="1"/>
           <p:nvPr/>
         </p:nvSpPr>
@@ -4496,7 +4730,7 @@
       </p:sp>
       <p:sp>
         <p:nvSpPr>
-          <p:cNvPr id="11" name="Text 9"/>
+          <p:cNvPr id="12" name="Text 10"/>
           <p:cNvSpPr txBox="1"/>
           <p:nvPr/>
         </p:nvSpPr>
@@ -4535,7 +4769,7 @@
       </p:sp>
       <p:sp>
         <p:nvSpPr>
-          <p:cNvPr id="12" name="Text 10"/>
+          <p:cNvPr id="13" name="Text 11"/>
           <p:cNvSpPr txBox="1"/>
           <p:nvPr/>
         </p:nvSpPr>
@@ -4577,7 +4811,7 @@
       </p:sp>
       <p:pic>
         <p:nvPicPr>
-          <p:cNvPr id="13" name="Image 0" descr="/home/user/ges-2/docs/strategy/deck-images/flow.jpg">    </p:cNvPr>
+          <p:cNvPr id="14" name="Image 0" descr="/home/user/ges-2/docs/strategy/deck-images/flow.jpg">    </p:cNvPr>
           <p:cNvPicPr>
             <a:picLocks noChangeAspect="1"/>
           </p:cNvPicPr>
@@ -4601,7 +4835,7 @@
       </p:pic>
       <p:sp>
         <p:nvSpPr>
-          <p:cNvPr id="14" name="Shape 11"/>
+          <p:cNvPr id="15" name="Shape 12"/>
           <p:cNvSpPr/>
           <p:nvPr/>
         </p:nvSpPr>
@@ -4655,7 +4889,7 @@
         <p:spPr>
           <a:xfrm>
             <a:off x="640080" y="457200"/>
-            <a:ext cx="10911535" cy="731520"/>
+            <a:ext cx="9144000" cy="731520"/>
           </a:xfrm>
           <a:prstGeom prst="rect">
             <a:avLst/>
@@ -4682,6 +4916,45 @@
               <a:t>Обратная связь и метрики</a:t>
             </a:r>
             <a:endParaRPr lang="en-US" sz="3000" dirty="0"/>
+          </a:p>
+        </p:txBody>
+      </p:sp>
+      <p:sp>
+        <p:nvSpPr>
+          <p:cNvPr id="3" name="Text 1"/>
+          <p:cNvSpPr txBox="1"/>
+          <p:nvPr/>
+        </p:nvSpPr>
+        <p:spPr>
+          <a:xfrm>
+            <a:off x="9722815" y="566928"/>
+            <a:ext cx="1828800" cy="274320"/>
+          </a:xfrm>
+          <a:prstGeom prst="rect">
+            <a:avLst/>
+          </a:prstGeom>
+          <a:noFill/>
+          <a:ln/>
+        </p:spPr>
+        <p:txBody>
+          <a:bodyPr wrap="square" lIns="0" tIns="0" rIns="0" bIns="0" rtlCol="0" anchor="ctr"/>
+          <a:lstStyle/>
+          <a:p>
+            <a:pPr algn="r" indent="0" marL="0">
+              <a:buNone/>
+            </a:pPr>
+            <a:r>
+              <a:rPr lang="en-US" sz="1200" dirty="0">
+                <a:solidFill>
+                  <a:srgbClr val="9CA3AF"/>
+                </a:solidFill>
+                <a:latin typeface="Arial" pitchFamily="34" charset="0"/>
+                <a:ea typeface="Arial" pitchFamily="34" charset="-122"/>
+                <a:cs typeface="Arial" pitchFamily="34" charset="-120"/>
+              </a:rPr>
+              <a:t>6 / 11</a:t>
+            </a:r>
+            <a:endParaRPr lang="en-US" sz="1200" dirty="0"/>
           </a:p>
         </p:txBody>
       </p:sp>
@@ -5719,7 +5992,7 @@
       </p:graphicFrame>
       <p:sp>
         <p:nvSpPr>
-          <p:cNvPr id="4" name="Shape 1"/>
+          <p:cNvPr id="5" name="Shape 2"/>
           <p:cNvSpPr/>
           <p:nvPr/>
         </p:nvSpPr>
@@ -5742,7 +6015,7 @@
       </p:sp>
       <p:sp>
         <p:nvSpPr>
-          <p:cNvPr id="5" name="Text 2"/>
+          <p:cNvPr id="6" name="Text 3"/>
           <p:cNvSpPr txBox="1"/>
           <p:nvPr/>
         </p:nvSpPr>
@@ -5804,7 +6077,7 @@
       </p:sp>
       <p:sp>
         <p:nvSpPr>
-          <p:cNvPr id="6" name="Text 3"/>
+          <p:cNvPr id="7" name="Text 4"/>
           <p:cNvSpPr txBox="1"/>
           <p:nvPr/>
         </p:nvSpPr>
@@ -5858,7 +6131,7 @@
                 <a:ea typeface="Arial" pitchFamily="34" charset="-122"/>
                 <a:cs typeface="Arial" pitchFamily="34" charset="-120"/>
               </a:rPr>
-              <a:t>раз в год</a:t>
+              <a:t>несколько раз в год</a:t>
             </a:r>
             <a:endParaRPr lang="en-US" sz="1300" dirty="0"/>
           </a:p>
@@ -5866,7 +6139,7 @@
       </p:sp>
       <p:sp>
         <p:nvSpPr>
-          <p:cNvPr id="7" name="Text 4"/>
+          <p:cNvPr id="8" name="Text 5"/>
           <p:cNvSpPr txBox="1"/>
           <p:nvPr/>
         </p:nvSpPr>
@@ -5960,7 +6233,7 @@
         <p:spPr>
           <a:xfrm>
             <a:off x="640080" y="457200"/>
-            <a:ext cx="10911535" cy="731520"/>
+            <a:ext cx="9144000" cy="731520"/>
           </a:xfrm>
           <a:prstGeom prst="rect">
             <a:avLst/>
@@ -5987,12 +6260,51 @@
               <a:t>Персонал и гостеприимство</a:t>
             </a:r>
             <a:endParaRPr lang="en-US" sz="3000" dirty="0"/>
+          </a:p>
+        </p:txBody>
+      </p:sp>
+      <p:sp>
+        <p:nvSpPr>
+          <p:cNvPr id="3" name="Text 1"/>
+          <p:cNvSpPr txBox="1"/>
+          <p:nvPr/>
+        </p:nvSpPr>
+        <p:spPr>
+          <a:xfrm>
+            <a:off x="9722815" y="566928"/>
+            <a:ext cx="1828800" cy="274320"/>
+          </a:xfrm>
+          <a:prstGeom prst="rect">
+            <a:avLst/>
+          </a:prstGeom>
+          <a:noFill/>
+          <a:ln/>
+        </p:spPr>
+        <p:txBody>
+          <a:bodyPr wrap="square" lIns="0" tIns="0" rIns="0" bIns="0" rtlCol="0" anchor="ctr"/>
+          <a:lstStyle/>
+          <a:p>
+            <a:pPr algn="r" indent="0" marL="0">
+              <a:buNone/>
+            </a:pPr>
+            <a:r>
+              <a:rPr lang="en-US" sz="1200" dirty="0">
+                <a:solidFill>
+                  <a:srgbClr val="9CA3AF"/>
+                </a:solidFill>
+                <a:latin typeface="Arial" pitchFamily="34" charset="0"/>
+                <a:ea typeface="Arial" pitchFamily="34" charset="-122"/>
+                <a:cs typeface="Arial" pitchFamily="34" charset="-120"/>
+              </a:rPr>
+              <a:t>7 / 11</a:t>
+            </a:r>
+            <a:endParaRPr lang="en-US" sz="1200" dirty="0"/>
           </a:p>
         </p:txBody>
       </p:sp>
       <p:pic>
         <p:nvPicPr>
-          <p:cNvPr id="3" name="Image 0" descr="/home/user/ges-2/docs/strategy/deck-images/mediation.jpg">    </p:cNvPr>
+          <p:cNvPr id="4" name="Image 0" descr="/home/user/ges-2/docs/strategy/deck-images/mediation.jpg">    </p:cNvPr>
           <p:cNvPicPr>
             <a:picLocks noChangeAspect="1"/>
           </p:cNvPicPr>
@@ -6016,7 +6328,7 @@
       </p:pic>
       <p:sp>
         <p:nvSpPr>
-          <p:cNvPr id="4" name="Shape 1"/>
+          <p:cNvPr id="5" name="Shape 2"/>
           <p:cNvSpPr/>
           <p:nvPr/>
         </p:nvSpPr>
@@ -6038,7 +6350,7 @@
       </p:sp>
       <p:sp>
         <p:nvSpPr>
-          <p:cNvPr id="5" name="Text 2"/>
+          <p:cNvPr id="6" name="Text 3"/>
           <p:cNvSpPr txBox="1"/>
           <p:nvPr/>
         </p:nvSpPr>
@@ -6077,7 +6389,7 @@
       </p:sp>
       <p:sp>
         <p:nvSpPr>
-          <p:cNvPr id="6" name="Text 3"/>
+          <p:cNvPr id="7" name="Text 4"/>
           <p:cNvSpPr txBox="1"/>
           <p:nvPr/>
         </p:nvSpPr>
@@ -6195,7 +6507,7 @@
       </p:sp>
       <p:sp>
         <p:nvSpPr>
-          <p:cNvPr id="7" name="Text 4"/>
+          <p:cNvPr id="8" name="Text 5"/>
           <p:cNvSpPr txBox="1"/>
           <p:nvPr/>
         </p:nvSpPr>
@@ -6234,7 +6546,7 @@
       </p:sp>
       <p:sp>
         <p:nvSpPr>
-          <p:cNvPr id="8" name="Text 5"/>
+          <p:cNvPr id="9" name="Text 6"/>
           <p:cNvSpPr txBox="1"/>
           <p:nvPr/>
         </p:nvSpPr>
@@ -6360,7 +6672,7 @@
         <p:spPr>
           <a:xfrm>
             <a:off x="640080" y="457200"/>
-            <a:ext cx="10911535" cy="731520"/>
+            <a:ext cx="9144000" cy="731520"/>
           </a:xfrm>
           <a:prstGeom prst="rect">
             <a:avLst/>
@@ -6392,7 +6704,46 @@
       </p:sp>
       <p:sp>
         <p:nvSpPr>
-          <p:cNvPr id="3" name="Shape 1"/>
+          <p:cNvPr id="3" name="Text 1"/>
+          <p:cNvSpPr txBox="1"/>
+          <p:nvPr/>
+        </p:nvSpPr>
+        <p:spPr>
+          <a:xfrm>
+            <a:off x="9722815" y="566928"/>
+            <a:ext cx="1828800" cy="274320"/>
+          </a:xfrm>
+          <a:prstGeom prst="rect">
+            <a:avLst/>
+          </a:prstGeom>
+          <a:noFill/>
+          <a:ln/>
+        </p:spPr>
+        <p:txBody>
+          <a:bodyPr wrap="square" lIns="0" tIns="0" rIns="0" bIns="0" rtlCol="0" anchor="ctr"/>
+          <a:lstStyle/>
+          <a:p>
+            <a:pPr algn="r" indent="0" marL="0">
+              <a:buNone/>
+            </a:pPr>
+            <a:r>
+              <a:rPr lang="en-US" sz="1200" dirty="0">
+                <a:solidFill>
+                  <a:srgbClr val="9CA3AF"/>
+                </a:solidFill>
+                <a:latin typeface="Arial" pitchFamily="34" charset="0"/>
+                <a:ea typeface="Arial" pitchFamily="34" charset="-122"/>
+                <a:cs typeface="Arial" pitchFamily="34" charset="-120"/>
+              </a:rPr>
+              <a:t>8 / 11</a:t>
+            </a:r>
+            <a:endParaRPr lang="en-US" sz="1200" dirty="0"/>
+          </a:p>
+        </p:txBody>
+      </p:sp>
+      <p:sp>
+        <p:nvSpPr>
+          <p:cNvPr id="4" name="Shape 2"/>
           <p:cNvSpPr/>
           <p:nvPr/>
         </p:nvSpPr>
@@ -6417,7 +6768,7 @@
       </p:sp>
       <p:sp>
         <p:nvSpPr>
-          <p:cNvPr id="4" name="Text 2"/>
+          <p:cNvPr id="5" name="Text 3"/>
           <p:cNvSpPr txBox="1"/>
           <p:nvPr/>
         </p:nvSpPr>
@@ -6456,7 +6807,7 @@
       </p:sp>
       <p:sp>
         <p:nvSpPr>
-          <p:cNvPr id="5" name="Text 3"/>
+          <p:cNvPr id="6" name="Text 4"/>
           <p:cNvSpPr txBox="1"/>
           <p:nvPr/>
         </p:nvSpPr>
@@ -6518,7 +6869,7 @@
       </p:sp>
       <p:sp>
         <p:nvSpPr>
-          <p:cNvPr id="6" name="Shape 4"/>
+          <p:cNvPr id="7" name="Shape 5"/>
           <p:cNvSpPr/>
           <p:nvPr/>
         </p:nvSpPr>
@@ -6543,7 +6894,7 @@
       </p:sp>
       <p:sp>
         <p:nvSpPr>
-          <p:cNvPr id="7" name="Text 5"/>
+          <p:cNvPr id="8" name="Text 6"/>
           <p:cNvSpPr txBox="1"/>
           <p:nvPr/>
         </p:nvSpPr>
@@ -6582,7 +6933,7 @@
       </p:sp>
       <p:sp>
         <p:nvSpPr>
-          <p:cNvPr id="8" name="Text 6"/>
+          <p:cNvPr id="9" name="Text 7"/>
           <p:cNvSpPr txBox="1"/>
           <p:nvPr/>
         </p:nvSpPr>
@@ -6644,7 +6995,7 @@
       </p:sp>
       <p:sp>
         <p:nvSpPr>
-          <p:cNvPr id="9" name="Shape 7"/>
+          <p:cNvPr id="10" name="Shape 8"/>
           <p:cNvSpPr/>
           <p:nvPr/>
         </p:nvSpPr>
@@ -6669,7 +7020,7 @@
       </p:sp>
       <p:sp>
         <p:nvSpPr>
-          <p:cNvPr id="10" name="Text 8"/>
+          <p:cNvPr id="11" name="Text 9"/>
           <p:cNvSpPr txBox="1"/>
           <p:nvPr/>
         </p:nvSpPr>
@@ -6708,7 +7059,7 @@
       </p:sp>
       <p:sp>
         <p:nvSpPr>
-          <p:cNvPr id="11" name="Text 9"/>
+          <p:cNvPr id="12" name="Text 10"/>
           <p:cNvSpPr txBox="1"/>
           <p:nvPr/>
         </p:nvSpPr>
@@ -6770,7 +7121,7 @@
       </p:sp>
       <p:sp>
         <p:nvSpPr>
-          <p:cNvPr id="12" name="Shape 10"/>
+          <p:cNvPr id="13" name="Shape 11"/>
           <p:cNvSpPr/>
           <p:nvPr/>
         </p:nvSpPr>
@@ -6795,7 +7146,7 @@
       </p:sp>
       <p:sp>
         <p:nvSpPr>
-          <p:cNvPr id="13" name="Text 11"/>
+          <p:cNvPr id="14" name="Text 12"/>
           <p:cNvSpPr txBox="1"/>
           <p:nvPr/>
         </p:nvSpPr>
@@ -6834,7 +7185,7 @@
       </p:sp>
       <p:sp>
         <p:nvSpPr>
-          <p:cNvPr id="14" name="Text 12"/>
+          <p:cNvPr id="15" name="Text 13"/>
           <p:cNvSpPr txBox="1"/>
           <p:nvPr/>
         </p:nvSpPr>
@@ -6896,7 +7247,7 @@
       </p:sp>
       <p:sp>
         <p:nvSpPr>
-          <p:cNvPr id="15" name="Shape 13"/>
+          <p:cNvPr id="16" name="Shape 14"/>
           <p:cNvSpPr/>
           <p:nvPr/>
         </p:nvSpPr>
@@ -6921,7 +7272,7 @@
       </p:sp>
       <p:sp>
         <p:nvSpPr>
-          <p:cNvPr id="16" name="Text 14"/>
+          <p:cNvPr id="17" name="Text 15"/>
           <p:cNvSpPr txBox="1"/>
           <p:nvPr/>
         </p:nvSpPr>
@@ -6960,7 +7311,7 @@
       </p:sp>
       <p:sp>
         <p:nvSpPr>
-          <p:cNvPr id="17" name="Text 15"/>
+          <p:cNvPr id="18" name="Text 16"/>
           <p:cNvSpPr txBox="1"/>
           <p:nvPr/>
         </p:nvSpPr>
@@ -7054,7 +7405,7 @@
         <p:spPr>
           <a:xfrm>
             <a:off x="640080" y="457200"/>
-            <a:ext cx="10911535" cy="731520"/>
+            <a:ext cx="9144000" cy="731520"/>
           </a:xfrm>
           <a:prstGeom prst="rect">
             <a:avLst/>
@@ -7087,6 +7438,45 @@
       <p:sp>
         <p:nvSpPr>
           <p:cNvPr id="3" name="Text 1"/>
+          <p:cNvSpPr txBox="1"/>
+          <p:nvPr/>
+        </p:nvSpPr>
+        <p:spPr>
+          <a:xfrm>
+            <a:off x="9722815" y="566928"/>
+            <a:ext cx="1828800" cy="274320"/>
+          </a:xfrm>
+          <a:prstGeom prst="rect">
+            <a:avLst/>
+          </a:prstGeom>
+          <a:noFill/>
+          <a:ln/>
+        </p:spPr>
+        <p:txBody>
+          <a:bodyPr wrap="square" lIns="0" tIns="0" rIns="0" bIns="0" rtlCol="0" anchor="ctr"/>
+          <a:lstStyle/>
+          <a:p>
+            <a:pPr algn="r" indent="0" marL="0">
+              <a:buNone/>
+            </a:pPr>
+            <a:r>
+              <a:rPr lang="en-US" sz="1200" dirty="0">
+                <a:solidFill>
+                  <a:srgbClr val="9CA3AF"/>
+                </a:solidFill>
+                <a:latin typeface="Arial" pitchFamily="34" charset="0"/>
+                <a:ea typeface="Arial" pitchFamily="34" charset="-122"/>
+                <a:cs typeface="Arial" pitchFamily="34" charset="-120"/>
+              </a:rPr>
+              <a:t>9 / 11</a:t>
+            </a:r>
+            <a:endParaRPr lang="en-US" sz="1200" dirty="0"/>
+          </a:p>
+        </p:txBody>
+      </p:sp>
+      <p:sp>
+        <p:nvSpPr>
+          <p:cNvPr id="4" name="Text 2"/>
           <p:cNvSpPr txBox="1"/>
           <p:nvPr/>
         </p:nvSpPr>
@@ -7180,7 +7570,7 @@
       </p:sp>
       <p:pic>
         <p:nvPicPr>
-          <p:cNvPr id="4" name="Image 0" descr="/home/user/ges-2/docs/strategy/deck-images/site.jpg">    </p:cNvPr>
+          <p:cNvPr id="5" name="Image 0" descr="/home/user/ges-2/docs/strategy/deck-images/site.jpg">    </p:cNvPr>
           <p:cNvPicPr>
             <a:picLocks noChangeAspect="1"/>
           </p:cNvPicPr>
@@ -7204,7 +7594,7 @@
       </p:pic>
       <p:sp>
         <p:nvSpPr>
-          <p:cNvPr id="5" name="Shape 2"/>
+          <p:cNvPr id="6" name="Shape 3"/>
           <p:cNvSpPr/>
           <p:nvPr/>
         </p:nvSpPr>

--- a/docs/strategy/ges2-service-cx-proposal.pptx
+++ b/docs/strategy/ges2-service-cx-proposal.pptx
@@ -6318,7 +6318,7 @@
         </p:blipFill>
         <p:spPr>
           <a:xfrm>
-            <a:off x="640080" y="1783080"/>
+            <a:off x="640080" y="2505456"/>
             <a:ext cx="3931920" cy="2621280"/>
           </a:xfrm>
           <a:prstGeom prst="rect">
@@ -6334,7 +6334,7 @@
         </p:nvSpPr>
         <p:spPr>
           <a:xfrm>
-            <a:off x="640080" y="1783080"/>
+            <a:off x="640080" y="2505456"/>
             <a:ext cx="3931920" cy="2621280"/>
           </a:xfrm>
           <a:prstGeom prst="rect">
@@ -6813,7 +6813,7 @@
         </p:nvSpPr>
         <p:spPr>
           <a:xfrm>
-            <a:off x="841248" y="3566160"/>
+            <a:off x="841248" y="2432304"/>
             <a:ext cx="1609344" cy="1097280"/>
           </a:xfrm>
           <a:prstGeom prst="rect">
@@ -6823,7 +6823,7 @@
           <a:ln/>
         </p:spPr>
         <p:txBody>
-          <a:bodyPr wrap="square" lIns="0" tIns="0" rIns="0" bIns="0" rtlCol="0" anchor="b"/>
+          <a:bodyPr wrap="square" lIns="0" tIns="0" rIns="0" bIns="0" rtlCol="0" anchor="t"/>
           <a:lstStyle/>
           <a:p>
             <a:pPr indent="0" marL="0">
@@ -6939,7 +6939,7 @@
         </p:nvSpPr>
         <p:spPr>
           <a:xfrm>
-            <a:off x="3063240" y="3566160"/>
+            <a:off x="3063240" y="2432304"/>
             <a:ext cx="1609344" cy="1097280"/>
           </a:xfrm>
           <a:prstGeom prst="rect">
@@ -6949,7 +6949,7 @@
           <a:ln/>
         </p:spPr>
         <p:txBody>
-          <a:bodyPr wrap="square" lIns="0" tIns="0" rIns="0" bIns="0" rtlCol="0" anchor="b"/>
+          <a:bodyPr wrap="square" lIns="0" tIns="0" rIns="0" bIns="0" rtlCol="0" anchor="t"/>
           <a:lstStyle/>
           <a:p>
             <a:pPr indent="0" marL="0">
@@ -7065,7 +7065,7 @@
         </p:nvSpPr>
         <p:spPr>
           <a:xfrm>
-            <a:off x="5285232" y="3566160"/>
+            <a:off x="5285232" y="2432304"/>
             <a:ext cx="1609344" cy="1097280"/>
           </a:xfrm>
           <a:prstGeom prst="rect">
@@ -7075,7 +7075,7 @@
           <a:ln/>
         </p:spPr>
         <p:txBody>
-          <a:bodyPr wrap="square" lIns="0" tIns="0" rIns="0" bIns="0" rtlCol="0" anchor="b"/>
+          <a:bodyPr wrap="square" lIns="0" tIns="0" rIns="0" bIns="0" rtlCol="0" anchor="t"/>
           <a:lstStyle/>
           <a:p>
             <a:pPr indent="0" marL="0">
@@ -7191,7 +7191,7 @@
         </p:nvSpPr>
         <p:spPr>
           <a:xfrm>
-            <a:off x="7507224" y="3566160"/>
+            <a:off x="7507224" y="2432304"/>
             <a:ext cx="1609344" cy="1097280"/>
           </a:xfrm>
           <a:prstGeom prst="rect">
@@ -7201,7 +7201,7 @@
           <a:ln/>
         </p:spPr>
         <p:txBody>
-          <a:bodyPr wrap="square" lIns="0" tIns="0" rIns="0" bIns="0" rtlCol="0" anchor="b"/>
+          <a:bodyPr wrap="square" lIns="0" tIns="0" rIns="0" bIns="0" rtlCol="0" anchor="t"/>
           <a:lstStyle/>
           <a:p>
             <a:pPr indent="0" marL="0">
@@ -7317,7 +7317,7 @@
         </p:nvSpPr>
         <p:spPr>
           <a:xfrm>
-            <a:off x="9729216" y="3566160"/>
+            <a:off x="9729216" y="2432304"/>
             <a:ext cx="1609344" cy="1097280"/>
           </a:xfrm>
           <a:prstGeom prst="rect">
@@ -7327,7 +7327,7 @@
           <a:ln/>
         </p:spPr>
         <p:txBody>
-          <a:bodyPr wrap="square" lIns="0" tIns="0" rIns="0" bIns="0" rtlCol="0" anchor="b"/>
+          <a:bodyPr wrap="square" lIns="0" tIns="0" rIns="0" bIns="0" rtlCol="0" anchor="t"/>
           <a:lstStyle/>
           <a:p>
             <a:pPr indent="0" marL="0">
